--- a/reports/presentation/Alfabetizacao_Apresentacao.pptx
+++ b/reports/presentation/Alfabetizacao_Apresentacao.pptx
@@ -5,17 +5,17 @@
     <p:sldMasterId id="2147483648" r:id="rId1"/>
   </p:sldMasterIdLst>
   <p:sldIdLst>
-    <p:sldId id="256" r:id="rId7"/>
-    <p:sldId id="257" r:id="rId8"/>
-    <p:sldId id="258" r:id="rId9"/>
-    <p:sldId id="259" r:id="rId10"/>
-    <p:sldId id="260" r:id="rId11"/>
-    <p:sldId id="261" r:id="rId12"/>
-    <p:sldId id="262" r:id="rId13"/>
-    <p:sldId id="263" r:id="rId14"/>
-    <p:sldId id="264" r:id="rId15"/>
+    <p:sldId id="256" r:id="rId2"/>
+    <p:sldId id="257" r:id="rId3"/>
+    <p:sldId id="258" r:id="rId4"/>
+    <p:sldId id="259" r:id="rId5"/>
+    <p:sldId id="260" r:id="rId6"/>
+    <p:sldId id="261" r:id="rId7"/>
+    <p:sldId id="262" r:id="rId8"/>
+    <p:sldId id="263" r:id="rId9"/>
+    <p:sldId id="264" r:id="rId10"/>
   </p:sldIdLst>
-  <p:sldSz cx="12191695" cy="6858000" type="screen4x3"/>
+  <p:sldSz cx="12192000" cy="6858000"/>
   <p:notesSz cx="6858000" cy="9144000"/>
   <p:defaultTextStyle>
     <a:defPPr>
@@ -112,6 +112,22 @@
       </a:defRPr>
     </a:lvl9pPr>
   </p:defaultTextStyle>
+  <p:extLst>
+    <p:ext uri="{EFAFB233-063F-42B5-8137-9DF3F51BA10A}">
+      <p15:sldGuideLst xmlns:p15="http://schemas.microsoft.com/office/powerpoint/2012/main">
+        <p15:guide id="1" orient="horz" pos="2160">
+          <p15:clr>
+            <a:srgbClr val="A4A3A4"/>
+          </p15:clr>
+        </p15:guide>
+        <p15:guide id="2" pos="2880">
+          <p15:clr>
+            <a:srgbClr val="A4A3A4"/>
+          </p15:clr>
+        </p15:guide>
+      </p15:sldGuideLst>
+    </p:ext>
+  </p:extLst>
 </p:presentation>
 </file>
 
@@ -153,10 +169,9 @@
           <a:lstStyle/>
           <a:p>
             <a:r>
-              <a:rPr lang="en-US" smtClean="0"/>
+              <a:rPr lang="en-US"/>
               <a:t>Click to edit Master title style</a:t>
             </a:r>
-            <a:endParaRPr lang="en-US"/>
           </a:p>
         </p:txBody>
       </p:sp>
@@ -272,10 +287,9 @@
           </a:lstStyle>
           <a:p>
             <a:r>
-              <a:rPr lang="en-US" smtClean="0"/>
+              <a:rPr lang="en-US"/>
               <a:t>Click to edit Master subtitle style</a:t>
             </a:r>
-            <a:endParaRPr lang="en-US"/>
           </a:p>
         </p:txBody>
       </p:sp>
@@ -296,7 +310,7 @@
           <a:p>
             <a:fld id="{5BCAD085-E8A6-8845-BD4E-CB4CCA059FC4}" type="datetimeFigureOut">
               <a:rPr lang="en-US" smtClean="0"/>
-              <a:t>1/27/13</a:t>
+              <a:t>8/23/2026</a:t>
             </a:fld>
             <a:endParaRPr lang="en-US"/>
           </a:p>
@@ -338,7 +352,7 @@
           <a:p>
             <a:fld id="{C1FF6DA9-008F-8B48-92A6-B652298478BF}" type="slidenum">
               <a:rPr lang="en-US" smtClean="0"/>
-              <a:t>‹#›</a:t>
+              <a:t>‹nº›</a:t>
             </a:fld>
             <a:endParaRPr lang="en-US"/>
           </a:p>
@@ -390,10 +404,9 @@
           <a:lstStyle/>
           <a:p>
             <a:r>
-              <a:rPr lang="en-US" smtClean="0"/>
+              <a:rPr lang="en-US"/>
               <a:t>Click to edit Master title style</a:t>
             </a:r>
-            <a:endParaRPr lang="en-US"/>
           </a:p>
         </p:txBody>
       </p:sp>
@@ -414,38 +427,37 @@
           <a:p>
             <a:pPr lvl="0"/>
             <a:r>
-              <a:rPr lang="en-US" smtClean="0"/>
+              <a:rPr lang="en-US"/>
               <a:t>Click to edit Master text styles</a:t>
             </a:r>
           </a:p>
           <a:p>
             <a:pPr lvl="1"/>
             <a:r>
-              <a:rPr lang="en-US" smtClean="0"/>
+              <a:rPr lang="en-US"/>
               <a:t>Second level</a:t>
             </a:r>
           </a:p>
           <a:p>
             <a:pPr lvl="2"/>
             <a:r>
-              <a:rPr lang="en-US" smtClean="0"/>
+              <a:rPr lang="en-US"/>
               <a:t>Third level</a:t>
             </a:r>
           </a:p>
           <a:p>
             <a:pPr lvl="3"/>
             <a:r>
-              <a:rPr lang="en-US" smtClean="0"/>
+              <a:rPr lang="en-US"/>
               <a:t>Fourth level</a:t>
             </a:r>
           </a:p>
           <a:p>
             <a:pPr lvl="4"/>
             <a:r>
-              <a:rPr lang="en-US" smtClean="0"/>
+              <a:rPr lang="en-US"/>
               <a:t>Fifth level</a:t>
             </a:r>
-            <a:endParaRPr lang="en-US"/>
           </a:p>
         </p:txBody>
       </p:sp>
@@ -466,7 +478,7 @@
           <a:p>
             <a:fld id="{5BCAD085-E8A6-8845-BD4E-CB4CCA059FC4}" type="datetimeFigureOut">
               <a:rPr lang="en-US" smtClean="0"/>
-              <a:t>1/27/13</a:t>
+              <a:t>8/23/2026</a:t>
             </a:fld>
             <a:endParaRPr lang="en-US"/>
           </a:p>
@@ -508,7 +520,7 @@
           <a:p>
             <a:fld id="{C1FF6DA9-008F-8B48-92A6-B652298478BF}" type="slidenum">
               <a:rPr lang="en-US" smtClean="0"/>
-              <a:t>‹#›</a:t>
+              <a:t>‹nº›</a:t>
             </a:fld>
             <a:endParaRPr lang="en-US"/>
           </a:p>
@@ -565,10 +577,9 @@
           <a:lstStyle/>
           <a:p>
             <a:r>
-              <a:rPr lang="en-US" smtClean="0"/>
+              <a:rPr lang="en-US"/>
               <a:t>Click to edit Master title style</a:t>
             </a:r>
-            <a:endParaRPr lang="en-US"/>
           </a:p>
         </p:txBody>
       </p:sp>
@@ -594,38 +605,37 @@
           <a:p>
             <a:pPr lvl="0"/>
             <a:r>
-              <a:rPr lang="en-US" smtClean="0"/>
+              <a:rPr lang="en-US"/>
               <a:t>Click to edit Master text styles</a:t>
             </a:r>
           </a:p>
           <a:p>
             <a:pPr lvl="1"/>
             <a:r>
-              <a:rPr lang="en-US" smtClean="0"/>
+              <a:rPr lang="en-US"/>
               <a:t>Second level</a:t>
             </a:r>
           </a:p>
           <a:p>
             <a:pPr lvl="2"/>
             <a:r>
-              <a:rPr lang="en-US" smtClean="0"/>
+              <a:rPr lang="en-US"/>
               <a:t>Third level</a:t>
             </a:r>
           </a:p>
           <a:p>
             <a:pPr lvl="3"/>
             <a:r>
-              <a:rPr lang="en-US" smtClean="0"/>
+              <a:rPr lang="en-US"/>
               <a:t>Fourth level</a:t>
             </a:r>
           </a:p>
           <a:p>
             <a:pPr lvl="4"/>
             <a:r>
-              <a:rPr lang="en-US" smtClean="0"/>
+              <a:rPr lang="en-US"/>
               <a:t>Fifth level</a:t>
             </a:r>
-            <a:endParaRPr lang="en-US"/>
           </a:p>
         </p:txBody>
       </p:sp>
@@ -646,7 +656,7 @@
           <a:p>
             <a:fld id="{5BCAD085-E8A6-8845-BD4E-CB4CCA059FC4}" type="datetimeFigureOut">
               <a:rPr lang="en-US" smtClean="0"/>
-              <a:t>1/27/13</a:t>
+              <a:t>8/23/2026</a:t>
             </a:fld>
             <a:endParaRPr lang="en-US"/>
           </a:p>
@@ -688,7 +698,7 @@
           <a:p>
             <a:fld id="{C1FF6DA9-008F-8B48-92A6-B652298478BF}" type="slidenum">
               <a:rPr lang="en-US" smtClean="0"/>
-              <a:t>‹#›</a:t>
+              <a:t>‹nº›</a:t>
             </a:fld>
             <a:endParaRPr lang="en-US"/>
           </a:p>
@@ -740,10 +750,9 @@
           <a:lstStyle/>
           <a:p>
             <a:r>
-              <a:rPr lang="en-US" smtClean="0"/>
+              <a:rPr lang="en-US"/>
               <a:t>Click to edit Master title style</a:t>
             </a:r>
-            <a:endParaRPr lang="en-US"/>
           </a:p>
         </p:txBody>
       </p:sp>
@@ -764,38 +773,37 @@
           <a:p>
             <a:pPr lvl="0"/>
             <a:r>
-              <a:rPr lang="en-US" smtClean="0"/>
+              <a:rPr lang="en-US"/>
               <a:t>Click to edit Master text styles</a:t>
             </a:r>
           </a:p>
           <a:p>
             <a:pPr lvl="1"/>
             <a:r>
-              <a:rPr lang="en-US" smtClean="0"/>
+              <a:rPr lang="en-US"/>
               <a:t>Second level</a:t>
             </a:r>
           </a:p>
           <a:p>
             <a:pPr lvl="2"/>
             <a:r>
-              <a:rPr lang="en-US" smtClean="0"/>
+              <a:rPr lang="en-US"/>
               <a:t>Third level</a:t>
             </a:r>
           </a:p>
           <a:p>
             <a:pPr lvl="3"/>
             <a:r>
-              <a:rPr lang="en-US" smtClean="0"/>
+              <a:rPr lang="en-US"/>
               <a:t>Fourth level</a:t>
             </a:r>
           </a:p>
           <a:p>
             <a:pPr lvl="4"/>
             <a:r>
-              <a:rPr lang="en-US" smtClean="0"/>
+              <a:rPr lang="en-US"/>
               <a:t>Fifth level</a:t>
             </a:r>
-            <a:endParaRPr lang="en-US"/>
           </a:p>
         </p:txBody>
       </p:sp>
@@ -816,7 +824,7 @@
           <a:p>
             <a:fld id="{5BCAD085-E8A6-8845-BD4E-CB4CCA059FC4}" type="datetimeFigureOut">
               <a:rPr lang="en-US" smtClean="0"/>
-              <a:t>1/27/13</a:t>
+              <a:t>8/23/2026</a:t>
             </a:fld>
             <a:endParaRPr lang="en-US"/>
           </a:p>
@@ -858,7 +866,7 @@
           <a:p>
             <a:fld id="{C1FF6DA9-008F-8B48-92A6-B652298478BF}" type="slidenum">
               <a:rPr lang="en-US" smtClean="0"/>
-              <a:t>‹#›</a:t>
+              <a:t>‹nº›</a:t>
             </a:fld>
             <a:endParaRPr lang="en-US"/>
           </a:p>
@@ -919,10 +927,9 @@
           </a:lstStyle>
           <a:p>
             <a:r>
-              <a:rPr lang="en-US" smtClean="0"/>
+              <a:rPr lang="en-US"/>
               <a:t>Click to edit Master title style</a:t>
             </a:r>
-            <a:endParaRPr lang="en-US"/>
           </a:p>
         </p:txBody>
       </p:sp>
@@ -1039,7 +1046,7 @@
           <a:p>
             <a:pPr lvl="0"/>
             <a:r>
-              <a:rPr lang="en-US" smtClean="0"/>
+              <a:rPr lang="en-US"/>
               <a:t>Click to edit Master text styles</a:t>
             </a:r>
           </a:p>
@@ -1062,7 +1069,7 @@
           <a:p>
             <a:fld id="{5BCAD085-E8A6-8845-BD4E-CB4CCA059FC4}" type="datetimeFigureOut">
               <a:rPr lang="en-US" smtClean="0"/>
-              <a:t>1/27/13</a:t>
+              <a:t>8/23/2026</a:t>
             </a:fld>
             <a:endParaRPr lang="en-US"/>
           </a:p>
@@ -1104,7 +1111,7 @@
           <a:p>
             <a:fld id="{C1FF6DA9-008F-8B48-92A6-B652298478BF}" type="slidenum">
               <a:rPr lang="en-US" smtClean="0"/>
-              <a:t>‹#›</a:t>
+              <a:t>‹nº›</a:t>
             </a:fld>
             <a:endParaRPr lang="en-US"/>
           </a:p>
@@ -1156,10 +1163,9 @@
           <a:lstStyle/>
           <a:p>
             <a:r>
-              <a:rPr lang="en-US" smtClean="0"/>
+              <a:rPr lang="en-US"/>
               <a:t>Click to edit Master title style</a:t>
             </a:r>
-            <a:endParaRPr lang="en-US"/>
           </a:p>
         </p:txBody>
       </p:sp>
@@ -1213,38 +1219,37 @@
           <a:p>
             <a:pPr lvl="0"/>
             <a:r>
-              <a:rPr lang="en-US" smtClean="0"/>
+              <a:rPr lang="en-US"/>
               <a:t>Click to edit Master text styles</a:t>
             </a:r>
           </a:p>
           <a:p>
             <a:pPr lvl="1"/>
             <a:r>
-              <a:rPr lang="en-US" smtClean="0"/>
+              <a:rPr lang="en-US"/>
               <a:t>Second level</a:t>
             </a:r>
           </a:p>
           <a:p>
             <a:pPr lvl="2"/>
             <a:r>
-              <a:rPr lang="en-US" smtClean="0"/>
+              <a:rPr lang="en-US"/>
               <a:t>Third level</a:t>
             </a:r>
           </a:p>
           <a:p>
             <a:pPr lvl="3"/>
             <a:r>
-              <a:rPr lang="en-US" smtClean="0"/>
+              <a:rPr lang="en-US"/>
               <a:t>Fourth level</a:t>
             </a:r>
           </a:p>
           <a:p>
             <a:pPr lvl="4"/>
             <a:r>
-              <a:rPr lang="en-US" smtClean="0"/>
+              <a:rPr lang="en-US"/>
               <a:t>Fifth level</a:t>
             </a:r>
-            <a:endParaRPr lang="en-US"/>
           </a:p>
         </p:txBody>
       </p:sp>
@@ -1298,38 +1303,37 @@
           <a:p>
             <a:pPr lvl="0"/>
             <a:r>
-              <a:rPr lang="en-US" smtClean="0"/>
+              <a:rPr lang="en-US"/>
               <a:t>Click to edit Master text styles</a:t>
             </a:r>
           </a:p>
           <a:p>
             <a:pPr lvl="1"/>
             <a:r>
-              <a:rPr lang="en-US" smtClean="0"/>
+              <a:rPr lang="en-US"/>
               <a:t>Second level</a:t>
             </a:r>
           </a:p>
           <a:p>
             <a:pPr lvl="2"/>
             <a:r>
-              <a:rPr lang="en-US" smtClean="0"/>
+              <a:rPr lang="en-US"/>
               <a:t>Third level</a:t>
             </a:r>
           </a:p>
           <a:p>
             <a:pPr lvl="3"/>
             <a:r>
-              <a:rPr lang="en-US" smtClean="0"/>
+              <a:rPr lang="en-US"/>
               <a:t>Fourth level</a:t>
             </a:r>
           </a:p>
           <a:p>
             <a:pPr lvl="4"/>
             <a:r>
-              <a:rPr lang="en-US" smtClean="0"/>
+              <a:rPr lang="en-US"/>
               <a:t>Fifth level</a:t>
             </a:r>
-            <a:endParaRPr lang="en-US"/>
           </a:p>
         </p:txBody>
       </p:sp>
@@ -1350,7 +1354,7 @@
           <a:p>
             <a:fld id="{5BCAD085-E8A6-8845-BD4E-CB4CCA059FC4}" type="datetimeFigureOut">
               <a:rPr lang="en-US" smtClean="0"/>
-              <a:t>1/27/13</a:t>
+              <a:t>8/23/2026</a:t>
             </a:fld>
             <a:endParaRPr lang="en-US"/>
           </a:p>
@@ -1392,7 +1396,7 @@
           <a:p>
             <a:fld id="{C1FF6DA9-008F-8B48-92A6-B652298478BF}" type="slidenum">
               <a:rPr lang="en-US" smtClean="0"/>
-              <a:t>‹#›</a:t>
+              <a:t>‹nº›</a:t>
             </a:fld>
             <a:endParaRPr lang="en-US"/>
           </a:p>
@@ -1448,10 +1452,9 @@
           </a:lstStyle>
           <a:p>
             <a:r>
-              <a:rPr lang="en-US" smtClean="0"/>
+              <a:rPr lang="en-US"/>
               <a:t>Click to edit Master title style</a:t>
             </a:r>
-            <a:endParaRPr lang="en-US"/>
           </a:p>
         </p:txBody>
       </p:sp>
@@ -1514,7 +1517,7 @@
           <a:p>
             <a:pPr lvl="0"/>
             <a:r>
-              <a:rPr lang="en-US" smtClean="0"/>
+              <a:rPr lang="en-US"/>
               <a:t>Click to edit Master text styles</a:t>
             </a:r>
           </a:p>
@@ -1570,38 +1573,37 @@
           <a:p>
             <a:pPr lvl="0"/>
             <a:r>
-              <a:rPr lang="en-US" smtClean="0"/>
+              <a:rPr lang="en-US"/>
               <a:t>Click to edit Master text styles</a:t>
             </a:r>
           </a:p>
           <a:p>
             <a:pPr lvl="1"/>
             <a:r>
-              <a:rPr lang="en-US" smtClean="0"/>
+              <a:rPr lang="en-US"/>
               <a:t>Second level</a:t>
             </a:r>
           </a:p>
           <a:p>
             <a:pPr lvl="2"/>
             <a:r>
-              <a:rPr lang="en-US" smtClean="0"/>
+              <a:rPr lang="en-US"/>
               <a:t>Third level</a:t>
             </a:r>
           </a:p>
           <a:p>
             <a:pPr lvl="3"/>
             <a:r>
-              <a:rPr lang="en-US" smtClean="0"/>
+              <a:rPr lang="en-US"/>
               <a:t>Fourth level</a:t>
             </a:r>
           </a:p>
           <a:p>
             <a:pPr lvl="4"/>
             <a:r>
-              <a:rPr lang="en-US" smtClean="0"/>
+              <a:rPr lang="en-US"/>
               <a:t>Fifth level</a:t>
             </a:r>
-            <a:endParaRPr lang="en-US"/>
           </a:p>
         </p:txBody>
       </p:sp>
@@ -1664,7 +1666,7 @@
           <a:p>
             <a:pPr lvl="0"/>
             <a:r>
-              <a:rPr lang="en-US" smtClean="0"/>
+              <a:rPr lang="en-US"/>
               <a:t>Click to edit Master text styles</a:t>
             </a:r>
           </a:p>
@@ -1720,38 +1722,37 @@
           <a:p>
             <a:pPr lvl="0"/>
             <a:r>
-              <a:rPr lang="en-US" smtClean="0"/>
+              <a:rPr lang="en-US"/>
               <a:t>Click to edit Master text styles</a:t>
             </a:r>
           </a:p>
           <a:p>
             <a:pPr lvl="1"/>
             <a:r>
-              <a:rPr lang="en-US" smtClean="0"/>
+              <a:rPr lang="en-US"/>
               <a:t>Second level</a:t>
             </a:r>
           </a:p>
           <a:p>
             <a:pPr lvl="2"/>
             <a:r>
-              <a:rPr lang="en-US" smtClean="0"/>
+              <a:rPr lang="en-US"/>
               <a:t>Third level</a:t>
             </a:r>
           </a:p>
           <a:p>
             <a:pPr lvl="3"/>
             <a:r>
-              <a:rPr lang="en-US" smtClean="0"/>
+              <a:rPr lang="en-US"/>
               <a:t>Fourth level</a:t>
             </a:r>
           </a:p>
           <a:p>
             <a:pPr lvl="4"/>
             <a:r>
-              <a:rPr lang="en-US" smtClean="0"/>
+              <a:rPr lang="en-US"/>
               <a:t>Fifth level</a:t>
             </a:r>
-            <a:endParaRPr lang="en-US"/>
           </a:p>
         </p:txBody>
       </p:sp>
@@ -1772,7 +1773,7 @@
           <a:p>
             <a:fld id="{5BCAD085-E8A6-8845-BD4E-CB4CCA059FC4}" type="datetimeFigureOut">
               <a:rPr lang="en-US" smtClean="0"/>
-              <a:t>1/27/13</a:t>
+              <a:t>8/23/2026</a:t>
             </a:fld>
             <a:endParaRPr lang="en-US"/>
           </a:p>
@@ -1814,7 +1815,7 @@
           <a:p>
             <a:fld id="{C1FF6DA9-008F-8B48-92A6-B652298478BF}" type="slidenum">
               <a:rPr lang="en-US" smtClean="0"/>
-              <a:t>‹#›</a:t>
+              <a:t>‹nº›</a:t>
             </a:fld>
             <a:endParaRPr lang="en-US"/>
           </a:p>
@@ -1866,10 +1867,9 @@
           <a:lstStyle/>
           <a:p>
             <a:r>
-              <a:rPr lang="en-US" smtClean="0"/>
+              <a:rPr lang="en-US"/>
               <a:t>Click to edit Master title style</a:t>
             </a:r>
-            <a:endParaRPr lang="en-US"/>
           </a:p>
         </p:txBody>
       </p:sp>
@@ -1890,7 +1890,7 @@
           <a:p>
             <a:fld id="{5BCAD085-E8A6-8845-BD4E-CB4CCA059FC4}" type="datetimeFigureOut">
               <a:rPr lang="en-US" smtClean="0"/>
-              <a:t>1/27/13</a:t>
+              <a:t>8/23/2026</a:t>
             </a:fld>
             <a:endParaRPr lang="en-US"/>
           </a:p>
@@ -1932,7 +1932,7 @@
           <a:p>
             <a:fld id="{C1FF6DA9-008F-8B48-92A6-B652298478BF}" type="slidenum">
               <a:rPr lang="en-US" smtClean="0"/>
-              <a:t>‹#›</a:t>
+              <a:t>‹nº›</a:t>
             </a:fld>
             <a:endParaRPr lang="en-US"/>
           </a:p>
@@ -1985,7 +1985,7 @@
           <a:p>
             <a:fld id="{5BCAD085-E8A6-8845-BD4E-CB4CCA059FC4}" type="datetimeFigureOut">
               <a:rPr lang="en-US" smtClean="0"/>
-              <a:t>1/27/13</a:t>
+              <a:t>8/23/2026</a:t>
             </a:fld>
             <a:endParaRPr lang="en-US"/>
           </a:p>
@@ -2027,7 +2027,7 @@
           <a:p>
             <a:fld id="{C1FF6DA9-008F-8B48-92A6-B652298478BF}" type="slidenum">
               <a:rPr lang="en-US" smtClean="0"/>
-              <a:t>‹#›</a:t>
+              <a:t>‹nº›</a:t>
             </a:fld>
             <a:endParaRPr lang="en-US"/>
           </a:p>
@@ -2088,10 +2088,9 @@
           </a:lstStyle>
           <a:p>
             <a:r>
-              <a:rPr lang="en-US" smtClean="0"/>
+              <a:rPr lang="en-US"/>
               <a:t>Click to edit Master title style</a:t>
             </a:r>
-            <a:endParaRPr lang="en-US"/>
           </a:p>
         </p:txBody>
       </p:sp>
@@ -2145,38 +2144,37 @@
           <a:p>
             <a:pPr lvl="0"/>
             <a:r>
-              <a:rPr lang="en-US" smtClean="0"/>
+              <a:rPr lang="en-US"/>
               <a:t>Click to edit Master text styles</a:t>
             </a:r>
           </a:p>
           <a:p>
             <a:pPr lvl="1"/>
             <a:r>
-              <a:rPr lang="en-US" smtClean="0"/>
+              <a:rPr lang="en-US"/>
               <a:t>Second level</a:t>
             </a:r>
           </a:p>
           <a:p>
             <a:pPr lvl="2"/>
             <a:r>
-              <a:rPr lang="en-US" smtClean="0"/>
+              <a:rPr lang="en-US"/>
               <a:t>Third level</a:t>
             </a:r>
           </a:p>
           <a:p>
             <a:pPr lvl="3"/>
             <a:r>
-              <a:rPr lang="en-US" smtClean="0"/>
+              <a:rPr lang="en-US"/>
               <a:t>Fourth level</a:t>
             </a:r>
           </a:p>
           <a:p>
             <a:pPr lvl="4"/>
             <a:r>
-              <a:rPr lang="en-US" smtClean="0"/>
+              <a:rPr lang="en-US"/>
               <a:t>Fifth level</a:t>
             </a:r>
-            <a:endParaRPr lang="en-US"/>
           </a:p>
         </p:txBody>
       </p:sp>
@@ -2239,7 +2237,7 @@
           <a:p>
             <a:pPr lvl="0"/>
             <a:r>
-              <a:rPr lang="en-US" smtClean="0"/>
+              <a:rPr lang="en-US"/>
               <a:t>Click to edit Master text styles</a:t>
             </a:r>
           </a:p>
@@ -2262,7 +2260,7 @@
           <a:p>
             <a:fld id="{5BCAD085-E8A6-8845-BD4E-CB4CCA059FC4}" type="datetimeFigureOut">
               <a:rPr lang="en-US" smtClean="0"/>
-              <a:t>1/27/13</a:t>
+              <a:t>8/23/2026</a:t>
             </a:fld>
             <a:endParaRPr lang="en-US"/>
           </a:p>
@@ -2304,7 +2302,7 @@
           <a:p>
             <a:fld id="{C1FF6DA9-008F-8B48-92A6-B652298478BF}" type="slidenum">
               <a:rPr lang="en-US" smtClean="0"/>
-              <a:t>‹#›</a:t>
+              <a:t>‹nº›</a:t>
             </a:fld>
             <a:endParaRPr lang="en-US"/>
           </a:p>
@@ -2365,10 +2363,9 @@
           </a:lstStyle>
           <a:p>
             <a:r>
-              <a:rPr lang="en-US" smtClean="0"/>
+              <a:rPr lang="en-US"/>
               <a:t>Click to edit Master title style</a:t>
             </a:r>
-            <a:endParaRPr lang="en-US"/>
           </a:p>
         </p:txBody>
       </p:sp>
@@ -2492,7 +2489,7 @@
           <a:p>
             <a:pPr lvl="0"/>
             <a:r>
-              <a:rPr lang="en-US" smtClean="0"/>
+              <a:rPr lang="en-US"/>
               <a:t>Click to edit Master text styles</a:t>
             </a:r>
           </a:p>
@@ -2515,7 +2512,7 @@
           <a:p>
             <a:fld id="{5BCAD085-E8A6-8845-BD4E-CB4CCA059FC4}" type="datetimeFigureOut">
               <a:rPr lang="en-US" smtClean="0"/>
-              <a:t>1/27/13</a:t>
+              <a:t>8/23/2026</a:t>
             </a:fld>
             <a:endParaRPr lang="en-US"/>
           </a:p>
@@ -2557,7 +2554,7 @@
           <a:p>
             <a:fld id="{C1FF6DA9-008F-8B48-92A6-B652298478BF}" type="slidenum">
               <a:rPr lang="en-US" smtClean="0"/>
-              <a:t>‹#›</a:t>
+              <a:t>‹nº›</a:t>
             </a:fld>
             <a:endParaRPr lang="en-US"/>
           </a:p>
@@ -2624,10 +2621,9 @@
           <a:lstStyle/>
           <a:p>
             <a:r>
-              <a:rPr lang="en-US" smtClean="0"/>
+              <a:rPr lang="en-US"/>
               <a:t>Click to edit Master title style</a:t>
             </a:r>
-            <a:endParaRPr lang="en-US"/>
           </a:p>
         </p:txBody>
       </p:sp>
@@ -2658,38 +2654,37 @@
           <a:p>
             <a:pPr lvl="0"/>
             <a:r>
-              <a:rPr lang="en-US" smtClean="0"/>
+              <a:rPr lang="en-US"/>
               <a:t>Click to edit Master text styles</a:t>
             </a:r>
           </a:p>
           <a:p>
             <a:pPr lvl="1"/>
             <a:r>
-              <a:rPr lang="en-US" smtClean="0"/>
+              <a:rPr lang="en-US"/>
               <a:t>Second level</a:t>
             </a:r>
           </a:p>
           <a:p>
             <a:pPr lvl="2"/>
             <a:r>
-              <a:rPr lang="en-US" smtClean="0"/>
+              <a:rPr lang="en-US"/>
               <a:t>Third level</a:t>
             </a:r>
           </a:p>
           <a:p>
             <a:pPr lvl="3"/>
             <a:r>
-              <a:rPr lang="en-US" smtClean="0"/>
+              <a:rPr lang="en-US"/>
               <a:t>Fourth level</a:t>
             </a:r>
           </a:p>
           <a:p>
             <a:pPr lvl="4"/>
             <a:r>
-              <a:rPr lang="en-US" smtClean="0"/>
+              <a:rPr lang="en-US"/>
               <a:t>Fifth level</a:t>
             </a:r>
-            <a:endParaRPr lang="en-US"/>
           </a:p>
         </p:txBody>
       </p:sp>
@@ -2728,7 +2723,7 @@
           <a:p>
             <a:fld id="{5BCAD085-E8A6-8845-BD4E-CB4CCA059FC4}" type="datetimeFigureOut">
               <a:rPr lang="en-US" smtClean="0"/>
-              <a:t>1/27/13</a:t>
+              <a:t>8/23/2026</a:t>
             </a:fld>
             <a:endParaRPr lang="en-US"/>
           </a:p>
@@ -2806,7 +2801,7 @@
           <a:p>
             <a:fld id="{C1FF6DA9-008F-8B48-92A6-B652298478BF}" type="slidenum">
               <a:rPr lang="en-US" smtClean="0"/>
-              <a:t>‹#›</a:t>
+              <a:t>‹nº›</a:t>
             </a:fld>
             <a:endParaRPr lang="en-US"/>
           </a:p>
@@ -3087,7 +3082,7 @@
 </file>
 
 <file path=ppt/slides/slide1.xml><?xml version="1.0" encoding="utf-8"?>
-<p:sld xmlns:a="http://schemas.openxmlformats.org/drawingml/2006/main" xmlns:p="http://schemas.openxmlformats.org/presentationml/2006/main" xmlns:r="http://schemas.openxmlformats.org/officeDocument/2006/relationships">
+<p:sld xmlns:a="http://schemas.openxmlformats.org/drawingml/2006/main" xmlns:r="http://schemas.openxmlformats.org/officeDocument/2006/relationships" xmlns:p="http://schemas.openxmlformats.org/presentationml/2006/main">
   <p:cSld>
     <p:spTree>
       <p:nvGrpSpPr>
@@ -3095,7 +3090,14 @@
         <p:cNvGrpSpPr/>
         <p:nvPr/>
       </p:nvGrpSpPr>
-      <p:grpSpPr/>
+      <p:grpSpPr>
+        <a:xfrm>
+          <a:off x="0" y="0"/>
+          <a:ext cx="0" cy="0"/>
+          <a:chOff x="0" y="0"/>
+          <a:chExt cx="0" cy="0"/>
+        </a:xfrm>
+      </p:grpSpPr>
       <p:sp>
         <p:nvSpPr>
           <p:cNvPr id="2" name="Rectangle 1"/>
@@ -3137,6 +3139,7 @@
           <a:lstStyle/>
           <a:p>
             <a:pPr algn="ctr"/>
+            <a:endParaRPr/>
           </a:p>
         </p:txBody>
       </p:sp>
@@ -3181,19 +3184,26 @@
           <a:lstStyle/>
           <a:p>
             <a:pPr algn="ctr"/>
-          </a:p>
-        </p:txBody>
-      </p:sp>
-      <p:sp>
-        <p:nvSpPr>
-          <p:cNvPr id="4" name="TextBox 3"/>
+            <a:endParaRPr/>
+          </a:p>
+        </p:txBody>
+      </p:sp>
+      <p:sp>
+        <p:nvSpPr>
+          <p:cNvPr id="10" name="TextBox 3">
+            <a:extLst>
+              <a:ext uri="{FF2B5EF4-FFF2-40B4-BE49-F238E27FC236}">
+                <a16:creationId xmlns:a16="http://schemas.microsoft.com/office/drawing/2014/main" id="{E1D8E6B4-34EF-F875-C901-32352B4B8E09}"/>
+              </a:ext>
+            </a:extLst>
+          </p:cNvPr>
           <p:cNvSpPr txBox="1"/>
           <p:nvPr/>
         </p:nvSpPr>
         <p:spPr>
           <a:xfrm>
-            <a:off x="914400" y="1874519"/>
-            <a:ext cx="10058400" cy="1188720"/>
+            <a:off x="914400" y="759306"/>
+            <a:ext cx="10058400" cy="769441"/>
           </a:xfrm>
           <a:prstGeom prst="rect">
             <a:avLst/>
@@ -3206,41 +3216,47 @@
           </a:bodyPr>
           <a:lstStyle/>
           <a:p>
-            <a:pPr algn="l"/>
-            <a:r>
-              <a:rPr sz="4000" b="1" i="0">
+            <a:pPr algn="ctr"/>
+            <a:r>
+              <a:rPr sz="4400" b="1" i="0" dirty="0">
                 <a:solidFill>
                   <a:srgbClr val="FFFFFF"/>
                 </a:solidFill>
-                <a:latin typeface="Calibri"/>
-              </a:rPr>
-              <a:t>Pipeline Híbrido para Análise</a:t>
-            </a:r>
-          </a:p>
-          <a:p>
-            <a:pPr algn="l"/>
-            <a:r>
-              <a:rPr sz="4000" b="1" i="0">
+              </a:rPr>
+              <a:t>Case</a:t>
+            </a:r>
+            <a:r>
+              <a:rPr lang="pt-BR" sz="4400" b="1" i="0" dirty="0">
                 <a:solidFill>
                   <a:srgbClr val="FFFFFF"/>
                 </a:solidFill>
-                <a:latin typeface="Calibri"/>
-              </a:rPr>
-              <a:t>da Alfabetização no Brasil</a:t>
-            </a:r>
-          </a:p>
-        </p:txBody>
-      </p:sp>
-      <p:sp>
-        <p:nvSpPr>
-          <p:cNvPr id="5" name="TextBox 4"/>
+              </a:rPr>
+              <a:t> 02</a:t>
+            </a:r>
+            <a:endParaRPr sz="4400" b="1" i="0" dirty="0">
+              <a:solidFill>
+                <a:srgbClr val="FFFFFF"/>
+              </a:solidFill>
+            </a:endParaRPr>
+          </a:p>
+        </p:txBody>
+      </p:sp>
+      <p:sp>
+        <p:nvSpPr>
+          <p:cNvPr id="12" name="TextBox 4">
+            <a:extLst>
+              <a:ext uri="{FF2B5EF4-FFF2-40B4-BE49-F238E27FC236}">
+                <a16:creationId xmlns:a16="http://schemas.microsoft.com/office/drawing/2014/main" id="{69E7B574-F9AB-0460-E210-81648042C13D}"/>
+              </a:ext>
+            </a:extLst>
+          </p:cNvPr>
           <p:cNvSpPr txBox="1"/>
           <p:nvPr/>
         </p:nvSpPr>
         <p:spPr>
           <a:xfrm>
-            <a:off x="914400" y="3246120"/>
-            <a:ext cx="10058400" cy="640080"/>
+            <a:off x="914400" y="2211897"/>
+            <a:ext cx="10058400" cy="646331"/>
           </a:xfrm>
           <a:prstGeom prst="rect">
             <a:avLst/>
@@ -3253,29 +3269,34 @@
           </a:bodyPr>
           <a:lstStyle/>
           <a:p>
-            <a:pPr algn="l"/>
-            <a:r>
-              <a:rPr sz="2600" b="0" i="0">
-                <a:solidFill>
-                  <a:srgbClr val="AACCFF"/>
-                </a:solidFill>
-                <a:latin typeface="Calibri"/>
-              </a:rPr>
-              <a:t>Indicador Criança Alfabetizada</a:t>
-            </a:r>
-          </a:p>
-        </p:txBody>
-      </p:sp>
-      <p:sp>
-        <p:nvSpPr>
-          <p:cNvPr id="6" name="Rectangle 5"/>
+            <a:pPr algn="ctr"/>
+            <a:r>
+              <a:rPr lang="pt-BR" sz="3600" b="1" dirty="0">
+                <a:solidFill>
+                  <a:srgbClr val="FFFFFF"/>
+                </a:solidFill>
+              </a:rPr>
+              <a:t>Análise da Alfabetização no Brasil</a:t>
+            </a:r>
+          </a:p>
+        </p:txBody>
+      </p:sp>
+      <p:sp>
+        <p:nvSpPr>
+          <p:cNvPr id="14" name="Rectangle 5">
+            <a:extLst>
+              <a:ext uri="{FF2B5EF4-FFF2-40B4-BE49-F238E27FC236}">
+                <a16:creationId xmlns:a16="http://schemas.microsoft.com/office/drawing/2014/main" id="{8A9F078D-49AB-5379-7440-D8639757E017}"/>
+              </a:ext>
+            </a:extLst>
+          </p:cNvPr>
           <p:cNvSpPr/>
           <p:nvPr/>
         </p:nvSpPr>
         <p:spPr>
           <a:xfrm>
-            <a:off x="914400" y="3977639"/>
-            <a:ext cx="3931920" cy="36576"/>
+            <a:off x="4114800" y="3031206"/>
+            <a:ext cx="3931920" cy="38100"/>
           </a:xfrm>
           <a:prstGeom prst="rect">
             <a:avLst/>
@@ -3286,7 +3307,6 @@
           <a:ln>
             <a:noFill/>
           </a:ln>
-          <a:effectLst/>
         </p:spPr>
         <p:style>
           <a:lnRef idx="1">
@@ -3307,19 +3327,26 @@
           <a:lstStyle/>
           <a:p>
             <a:pPr algn="ctr"/>
-          </a:p>
-        </p:txBody>
-      </p:sp>
-      <p:sp>
-        <p:nvSpPr>
-          <p:cNvPr id="7" name="TextBox 6"/>
+            <a:endParaRPr/>
+          </a:p>
+        </p:txBody>
+      </p:sp>
+      <p:sp>
+        <p:nvSpPr>
+          <p:cNvPr id="16" name="TextBox 6">
+            <a:extLst>
+              <a:ext uri="{FF2B5EF4-FFF2-40B4-BE49-F238E27FC236}">
+                <a16:creationId xmlns:a16="http://schemas.microsoft.com/office/drawing/2014/main" id="{FF898DDB-ABC0-7C1B-4109-470ECF733D8A}"/>
+              </a:ext>
+            </a:extLst>
+          </p:cNvPr>
           <p:cNvSpPr txBox="1"/>
           <p:nvPr/>
         </p:nvSpPr>
         <p:spPr>
           <a:xfrm>
-            <a:off x="914400" y="4206240"/>
-            <a:ext cx="10058400" cy="457200"/>
+            <a:off x="1065212" y="3670027"/>
+            <a:ext cx="10058400" cy="461665"/>
           </a:xfrm>
           <a:prstGeom prst="rect">
             <a:avLst/>
@@ -3332,29 +3359,47 @@
           </a:bodyPr>
           <a:lstStyle/>
           <a:p>
-            <a:pPr algn="l"/>
-            <a:r>
-              <a:rPr sz="1600" b="0" i="0">
-                <a:solidFill>
-                  <a:srgbClr val="AACCFF"/>
-                </a:solidFill>
-                <a:latin typeface="Calibri"/>
-              </a:rPr>
-              <a:t>Pós-Tech FIAP  |  1IAST  |  Tech Challenge Fase 2</a:t>
-            </a:r>
-          </a:p>
-        </p:txBody>
-      </p:sp>
-      <p:sp>
-        <p:nvSpPr>
-          <p:cNvPr id="8" name="TextBox 7"/>
+            <a:pPr algn="ctr"/>
+            <a:r>
+              <a:rPr sz="2400" b="0" i="0" dirty="0">
+                <a:solidFill>
+                  <a:srgbClr val="88AACC"/>
+                </a:solidFill>
+              </a:rPr>
+              <a:t>Pós-Tech FIAP  |  1IAST  |  Tech Challenge Fase </a:t>
+            </a:r>
+            <a:r>
+              <a:rPr lang="pt-BR" sz="2400" b="0" i="0" dirty="0">
+                <a:solidFill>
+                  <a:srgbClr val="88AACC"/>
+                </a:solidFill>
+              </a:rPr>
+              <a:t>2</a:t>
+            </a:r>
+            <a:endParaRPr sz="2400" b="0" i="0" dirty="0">
+              <a:solidFill>
+                <a:srgbClr val="88AACC"/>
+              </a:solidFill>
+            </a:endParaRPr>
+          </a:p>
+        </p:txBody>
+      </p:sp>
+      <p:sp>
+        <p:nvSpPr>
+          <p:cNvPr id="18" name="TextBox 6">
+            <a:extLst>
+              <a:ext uri="{FF2B5EF4-FFF2-40B4-BE49-F238E27FC236}">
+                <a16:creationId xmlns:a16="http://schemas.microsoft.com/office/drawing/2014/main" id="{0A84BDA8-A494-149E-B9E5-A0A85DEFE623}"/>
+              </a:ext>
+            </a:extLst>
+          </p:cNvPr>
           <p:cNvSpPr txBox="1"/>
           <p:nvPr/>
         </p:nvSpPr>
         <p:spPr>
           <a:xfrm>
-            <a:off x="914400" y="4617720"/>
-            <a:ext cx="10058400" cy="457200"/>
+            <a:off x="1065212" y="4131692"/>
+            <a:ext cx="10058400" cy="461665"/>
           </a:xfrm>
           <a:prstGeom prst="rect">
             <a:avLst/>
@@ -3367,16 +3412,20 @@
           </a:bodyPr>
           <a:lstStyle/>
           <a:p>
-            <a:pPr algn="l"/>
-            <a:r>
-              <a:rPr sz="1600" b="0" i="0">
-                <a:solidFill>
-                  <a:srgbClr val="FFFFFF"/>
-                </a:solidFill>
-                <a:latin typeface="Calibri"/>
+            <a:pPr algn="ctr"/>
+            <a:r>
+              <a:rPr lang="pt-BR" sz="2400" b="0" i="0" dirty="0">
+                <a:solidFill>
+                  <a:schemeClr val="bg1"/>
+                </a:solidFill>
               </a:rPr>
               <a:t>Felipe Barbato de Biaggio</a:t>
             </a:r>
+            <a:endParaRPr sz="2400" b="0" i="0" dirty="0">
+              <a:solidFill>
+                <a:schemeClr val="bg1"/>
+              </a:solidFill>
+            </a:endParaRPr>
           </a:p>
         </p:txBody>
       </p:sp>
@@ -3389,7 +3438,7 @@
 </file>
 
 <file path=ppt/slides/slide2.xml><?xml version="1.0" encoding="utf-8"?>
-<p:sld xmlns:a="http://schemas.openxmlformats.org/drawingml/2006/main" xmlns:p="http://schemas.openxmlformats.org/presentationml/2006/main" xmlns:r="http://schemas.openxmlformats.org/officeDocument/2006/relationships">
+<p:sld xmlns:a="http://schemas.openxmlformats.org/drawingml/2006/main" xmlns:r="http://schemas.openxmlformats.org/officeDocument/2006/relationships" xmlns:p="http://schemas.openxmlformats.org/presentationml/2006/main">
   <p:cSld>
     <p:spTree>
       <p:nvGrpSpPr>
@@ -3397,7 +3446,14 @@
         <p:cNvGrpSpPr/>
         <p:nvPr/>
       </p:nvGrpSpPr>
-      <p:grpSpPr/>
+      <p:grpSpPr>
+        <a:xfrm>
+          <a:off x="0" y="0"/>
+          <a:ext cx="0" cy="0"/>
+          <a:chOff x="0" y="0"/>
+          <a:chExt cx="0" cy="0"/>
+        </a:xfrm>
+      </p:grpSpPr>
       <p:sp>
         <p:nvSpPr>
           <p:cNvPr id="2" name="Rectangle 1"/>
@@ -3439,6 +3495,7 @@
           <a:lstStyle/>
           <a:p>
             <a:pPr algn="ctr"/>
+            <a:endParaRPr/>
           </a:p>
         </p:txBody>
       </p:sp>
@@ -3483,6 +3540,7 @@
           <a:lstStyle/>
           <a:p>
             <a:pPr algn="ctr"/>
+            <a:endParaRPr/>
           </a:p>
         </p:txBody>
       </p:sp>
@@ -3562,6 +3620,7 @@
           <a:lstStyle/>
           <a:p>
             <a:pPr algn="ctr"/>
+            <a:endParaRPr/>
           </a:p>
         </p:txBody>
       </p:sp>
@@ -3644,7 +3703,7 @@
         <p:spPr>
           <a:xfrm>
             <a:off x="365760" y="1920240"/>
-            <a:ext cx="11338560" cy="2377440"/>
+            <a:ext cx="11338560" cy="1938992"/>
           </a:xfrm>
           <a:prstGeom prst="rect">
             <a:avLst/>
@@ -3663,7 +3722,7 @@
               </a:spcAft>
             </a:pPr>
             <a:r>
-              <a:rPr sz="1500" b="1">
+              <a:rPr sz="1500" b="1" dirty="0">
                 <a:solidFill>
                   <a:srgbClr val="2E86C1"/>
                 </a:solidFill>
@@ -3672,13 +3731,283 @@
               <a:t>▶  </a:t>
             </a:r>
             <a:r>
-              <a:rPr sz="1500">
-                <a:solidFill>
-                  <a:srgbClr val="444444"/>
-                </a:solidFill>
-                <a:latin typeface="Calibri"/>
-              </a:rPr>
-              <a:t>O Compromisso Nacional Criança Alfabetizada mobiliza União, estados e municípios para que toda criança esteja alfabetizada até o final do 2º ano do ensino fundamental — meta: 2030.</a:t>
+              <a:rPr sz="1500" dirty="0">
+                <a:solidFill>
+                  <a:srgbClr val="444444"/>
+                </a:solidFill>
+                <a:latin typeface="Calibri"/>
+              </a:rPr>
+              <a:t>O </a:t>
+            </a:r>
+            <a:r>
+              <a:rPr sz="1500" dirty="0" err="1">
+                <a:solidFill>
+                  <a:srgbClr val="444444"/>
+                </a:solidFill>
+                <a:latin typeface="Calibri"/>
+              </a:rPr>
+              <a:t>Compromisso</a:t>
+            </a:r>
+            <a:r>
+              <a:rPr sz="1500" dirty="0">
+                <a:solidFill>
+                  <a:srgbClr val="444444"/>
+                </a:solidFill>
+                <a:latin typeface="Calibri"/>
+              </a:rPr>
+              <a:t> Nacional </a:t>
+            </a:r>
+            <a:r>
+              <a:rPr sz="1500" dirty="0" err="1">
+                <a:solidFill>
+                  <a:srgbClr val="444444"/>
+                </a:solidFill>
+                <a:latin typeface="Calibri"/>
+              </a:rPr>
+              <a:t>Criança</a:t>
+            </a:r>
+            <a:r>
+              <a:rPr sz="1500" dirty="0">
+                <a:solidFill>
+                  <a:srgbClr val="444444"/>
+                </a:solidFill>
+                <a:latin typeface="Calibri"/>
+              </a:rPr>
+              <a:t> </a:t>
+            </a:r>
+            <a:r>
+              <a:rPr sz="1500" dirty="0" err="1">
+                <a:solidFill>
+                  <a:srgbClr val="444444"/>
+                </a:solidFill>
+                <a:latin typeface="Calibri"/>
+              </a:rPr>
+              <a:t>Alfabetizada</a:t>
+            </a:r>
+            <a:r>
+              <a:rPr sz="1500" dirty="0">
+                <a:solidFill>
+                  <a:srgbClr val="444444"/>
+                </a:solidFill>
+                <a:latin typeface="Calibri"/>
+              </a:rPr>
+              <a:t> </a:t>
+            </a:r>
+            <a:r>
+              <a:rPr sz="1500" dirty="0" err="1">
+                <a:solidFill>
+                  <a:srgbClr val="444444"/>
+                </a:solidFill>
+                <a:latin typeface="Calibri"/>
+              </a:rPr>
+              <a:t>mobiliza</a:t>
+            </a:r>
+            <a:r>
+              <a:rPr sz="1500" dirty="0">
+                <a:solidFill>
+                  <a:srgbClr val="444444"/>
+                </a:solidFill>
+                <a:latin typeface="Calibri"/>
+              </a:rPr>
+              <a:t> </a:t>
+            </a:r>
+            <a:r>
+              <a:rPr sz="1500" dirty="0" err="1">
+                <a:solidFill>
+                  <a:srgbClr val="444444"/>
+                </a:solidFill>
+                <a:latin typeface="Calibri"/>
+              </a:rPr>
+              <a:t>União</a:t>
+            </a:r>
+            <a:r>
+              <a:rPr sz="1500" dirty="0">
+                <a:solidFill>
+                  <a:srgbClr val="444444"/>
+                </a:solidFill>
+                <a:latin typeface="Calibri"/>
+              </a:rPr>
+              <a:t>, </a:t>
+            </a:r>
+            <a:r>
+              <a:rPr sz="1500" dirty="0" err="1">
+                <a:solidFill>
+                  <a:srgbClr val="444444"/>
+                </a:solidFill>
+                <a:latin typeface="Calibri"/>
+              </a:rPr>
+              <a:t>estados</a:t>
+            </a:r>
+            <a:r>
+              <a:rPr sz="1500" dirty="0">
+                <a:solidFill>
+                  <a:srgbClr val="444444"/>
+                </a:solidFill>
+                <a:latin typeface="Calibri"/>
+              </a:rPr>
+              <a:t> e </a:t>
+            </a:r>
+            <a:r>
+              <a:rPr sz="1500" dirty="0" err="1">
+                <a:solidFill>
+                  <a:srgbClr val="444444"/>
+                </a:solidFill>
+                <a:latin typeface="Calibri"/>
+              </a:rPr>
+              <a:t>municípios</a:t>
+            </a:r>
+            <a:r>
+              <a:rPr sz="1500" dirty="0">
+                <a:solidFill>
+                  <a:srgbClr val="444444"/>
+                </a:solidFill>
+                <a:latin typeface="Calibri"/>
+              </a:rPr>
+              <a:t> para </a:t>
+            </a:r>
+            <a:r>
+              <a:rPr sz="1500" dirty="0" err="1">
+                <a:solidFill>
+                  <a:srgbClr val="444444"/>
+                </a:solidFill>
+                <a:latin typeface="Calibri"/>
+              </a:rPr>
+              <a:t>que</a:t>
+            </a:r>
+            <a:r>
+              <a:rPr sz="1500" dirty="0">
+                <a:solidFill>
+                  <a:srgbClr val="444444"/>
+                </a:solidFill>
+                <a:latin typeface="Calibri"/>
+              </a:rPr>
+              <a:t> </a:t>
+            </a:r>
+            <a:r>
+              <a:rPr sz="1500" dirty="0" err="1">
+                <a:solidFill>
+                  <a:srgbClr val="444444"/>
+                </a:solidFill>
+                <a:latin typeface="Calibri"/>
+              </a:rPr>
+              <a:t>toda</a:t>
+            </a:r>
+            <a:r>
+              <a:rPr sz="1500" dirty="0">
+                <a:solidFill>
+                  <a:srgbClr val="444444"/>
+                </a:solidFill>
+                <a:latin typeface="Calibri"/>
+              </a:rPr>
+              <a:t> </a:t>
+            </a:r>
+            <a:r>
+              <a:rPr sz="1500" dirty="0" err="1">
+                <a:solidFill>
+                  <a:srgbClr val="444444"/>
+                </a:solidFill>
+                <a:latin typeface="Calibri"/>
+              </a:rPr>
+              <a:t>criança</a:t>
+            </a:r>
+            <a:r>
+              <a:rPr sz="1500" dirty="0">
+                <a:solidFill>
+                  <a:srgbClr val="444444"/>
+                </a:solidFill>
+                <a:latin typeface="Calibri"/>
+              </a:rPr>
+              <a:t> </a:t>
+            </a:r>
+            <a:r>
+              <a:rPr sz="1500" dirty="0" err="1">
+                <a:solidFill>
+                  <a:srgbClr val="444444"/>
+                </a:solidFill>
+                <a:latin typeface="Calibri"/>
+              </a:rPr>
+              <a:t>esteja</a:t>
+            </a:r>
+            <a:r>
+              <a:rPr sz="1500" dirty="0">
+                <a:solidFill>
+                  <a:srgbClr val="444444"/>
+                </a:solidFill>
+                <a:latin typeface="Calibri"/>
+              </a:rPr>
+              <a:t> </a:t>
+            </a:r>
+            <a:r>
+              <a:rPr sz="1500" dirty="0" err="1">
+                <a:solidFill>
+                  <a:srgbClr val="444444"/>
+                </a:solidFill>
+                <a:latin typeface="Calibri"/>
+              </a:rPr>
+              <a:t>alfabetizada</a:t>
+            </a:r>
+            <a:r>
+              <a:rPr sz="1500" dirty="0">
+                <a:solidFill>
+                  <a:srgbClr val="444444"/>
+                </a:solidFill>
+                <a:latin typeface="Calibri"/>
+              </a:rPr>
+              <a:t> </a:t>
+            </a:r>
+            <a:r>
+              <a:rPr sz="1500" dirty="0" err="1">
+                <a:solidFill>
+                  <a:srgbClr val="444444"/>
+                </a:solidFill>
+                <a:latin typeface="Calibri"/>
+              </a:rPr>
+              <a:t>até</a:t>
+            </a:r>
+            <a:r>
+              <a:rPr sz="1500" dirty="0">
+                <a:solidFill>
+                  <a:srgbClr val="444444"/>
+                </a:solidFill>
+                <a:latin typeface="Calibri"/>
+              </a:rPr>
+              <a:t> o final do 2º </a:t>
+            </a:r>
+            <a:r>
+              <a:rPr sz="1500" dirty="0" err="1">
+                <a:solidFill>
+                  <a:srgbClr val="444444"/>
+                </a:solidFill>
+                <a:latin typeface="Calibri"/>
+              </a:rPr>
+              <a:t>ano</a:t>
+            </a:r>
+            <a:r>
+              <a:rPr sz="1500" dirty="0">
+                <a:solidFill>
+                  <a:srgbClr val="444444"/>
+                </a:solidFill>
+                <a:latin typeface="Calibri"/>
+              </a:rPr>
+              <a:t> do </a:t>
+            </a:r>
+            <a:r>
+              <a:rPr sz="1500" dirty="0" err="1">
+                <a:solidFill>
+                  <a:srgbClr val="444444"/>
+                </a:solidFill>
+                <a:latin typeface="Calibri"/>
+              </a:rPr>
+              <a:t>ensino</a:t>
+            </a:r>
+            <a:r>
+              <a:rPr sz="1500" dirty="0">
+                <a:solidFill>
+                  <a:srgbClr val="444444"/>
+                </a:solidFill>
+                <a:latin typeface="Calibri"/>
+              </a:rPr>
+              <a:t> fundamental — meta: 2030.</a:t>
             </a:r>
           </a:p>
           <a:p>
@@ -3688,7 +4017,7 @@
               </a:spcAft>
             </a:pPr>
             <a:r>
-              <a:rPr sz="1500" b="1">
+              <a:rPr sz="1500" b="1" dirty="0">
                 <a:solidFill>
                   <a:srgbClr val="2E86C1"/>
                 </a:solidFill>
@@ -3697,13 +4026,211 @@
               <a:t>▶  </a:t>
             </a:r>
             <a:r>
-              <a:rPr sz="1500">
-                <a:solidFill>
-                  <a:srgbClr val="444444"/>
-                </a:solidFill>
-                <a:latin typeface="Calibri"/>
-              </a:rPr>
-              <a:t>O INEP definiu 743 pontos na escala de proficiência do Saeb como o corte de alfabetização, criando o Indicador Criança Alfabetizada.</a:t>
+              <a:rPr sz="1500" dirty="0">
+                <a:solidFill>
+                  <a:srgbClr val="444444"/>
+                </a:solidFill>
+                <a:latin typeface="Calibri"/>
+              </a:rPr>
+              <a:t>O INEP </a:t>
+            </a:r>
+            <a:r>
+              <a:rPr sz="1500" dirty="0" err="1">
+                <a:solidFill>
+                  <a:srgbClr val="444444"/>
+                </a:solidFill>
+                <a:latin typeface="Calibri"/>
+              </a:rPr>
+              <a:t>definiu</a:t>
+            </a:r>
+            <a:r>
+              <a:rPr sz="1500" dirty="0">
+                <a:solidFill>
+                  <a:srgbClr val="444444"/>
+                </a:solidFill>
+                <a:latin typeface="Calibri"/>
+              </a:rPr>
+              <a:t> 743 </a:t>
+            </a:r>
+            <a:r>
+              <a:rPr sz="1500" dirty="0" err="1">
+                <a:solidFill>
+                  <a:srgbClr val="444444"/>
+                </a:solidFill>
+                <a:latin typeface="Calibri"/>
+              </a:rPr>
+              <a:t>pontos</a:t>
+            </a:r>
+            <a:r>
+              <a:rPr sz="1500" dirty="0">
+                <a:solidFill>
+                  <a:srgbClr val="444444"/>
+                </a:solidFill>
+                <a:latin typeface="Calibri"/>
+              </a:rPr>
+              <a:t> </a:t>
+            </a:r>
+            <a:r>
+              <a:rPr sz="1500" dirty="0" err="1">
+                <a:solidFill>
+                  <a:srgbClr val="444444"/>
+                </a:solidFill>
+                <a:latin typeface="Calibri"/>
+              </a:rPr>
+              <a:t>na</a:t>
+            </a:r>
+            <a:r>
+              <a:rPr sz="1500" dirty="0">
+                <a:solidFill>
+                  <a:srgbClr val="444444"/>
+                </a:solidFill>
+                <a:latin typeface="Calibri"/>
+              </a:rPr>
+              <a:t> </a:t>
+            </a:r>
+            <a:r>
+              <a:rPr sz="1500" dirty="0" err="1">
+                <a:solidFill>
+                  <a:srgbClr val="444444"/>
+                </a:solidFill>
+                <a:latin typeface="Calibri"/>
+              </a:rPr>
+              <a:t>escala</a:t>
+            </a:r>
+            <a:r>
+              <a:rPr sz="1500" dirty="0">
+                <a:solidFill>
+                  <a:srgbClr val="444444"/>
+                </a:solidFill>
+                <a:latin typeface="Calibri"/>
+              </a:rPr>
+              <a:t> de </a:t>
+            </a:r>
+            <a:r>
+              <a:rPr sz="1500" dirty="0" err="1">
+                <a:solidFill>
+                  <a:srgbClr val="444444"/>
+                </a:solidFill>
+                <a:latin typeface="Calibri"/>
+              </a:rPr>
+              <a:t>proficiência</a:t>
+            </a:r>
+            <a:r>
+              <a:rPr sz="1500" dirty="0">
+                <a:solidFill>
+                  <a:srgbClr val="444444"/>
+                </a:solidFill>
+                <a:latin typeface="Calibri"/>
+              </a:rPr>
+              <a:t> do Saeb </a:t>
+            </a:r>
+            <a:r>
+              <a:rPr sz="1500" dirty="0" err="1">
+                <a:solidFill>
+                  <a:srgbClr val="444444"/>
+                </a:solidFill>
+                <a:latin typeface="Calibri"/>
+              </a:rPr>
+              <a:t>como</a:t>
+            </a:r>
+            <a:r>
+              <a:rPr sz="1500" dirty="0">
+                <a:solidFill>
+                  <a:srgbClr val="444444"/>
+                </a:solidFill>
+                <a:latin typeface="Calibri"/>
+              </a:rPr>
+              <a:t> o corte de </a:t>
+            </a:r>
+            <a:r>
+              <a:rPr sz="1500" dirty="0" err="1">
+                <a:solidFill>
+                  <a:srgbClr val="444444"/>
+                </a:solidFill>
+                <a:latin typeface="Calibri"/>
+              </a:rPr>
+              <a:t>alfabetização</a:t>
+            </a:r>
+            <a:r>
+              <a:rPr sz="1500" dirty="0">
+                <a:solidFill>
+                  <a:srgbClr val="444444"/>
+                </a:solidFill>
+                <a:latin typeface="Calibri"/>
+              </a:rPr>
+              <a:t>, </a:t>
+            </a:r>
+            <a:r>
+              <a:rPr sz="1500" dirty="0" err="1">
+                <a:solidFill>
+                  <a:srgbClr val="444444"/>
+                </a:solidFill>
+                <a:latin typeface="Calibri"/>
+              </a:rPr>
+              <a:t>criando</a:t>
+            </a:r>
+            <a:r>
+              <a:rPr sz="1500" dirty="0">
+                <a:solidFill>
+                  <a:srgbClr val="444444"/>
+                </a:solidFill>
+                <a:latin typeface="Calibri"/>
+              </a:rPr>
+              <a:t> o </a:t>
+            </a:r>
+            <a:r>
+              <a:rPr sz="1500" dirty="0" err="1">
+                <a:solidFill>
+                  <a:srgbClr val="444444"/>
+                </a:solidFill>
+                <a:latin typeface="Calibri"/>
+              </a:rPr>
+              <a:t>Indicador</a:t>
+            </a:r>
+            <a:r>
+              <a:rPr sz="1500" dirty="0">
+                <a:solidFill>
+                  <a:srgbClr val="444444"/>
+                </a:solidFill>
+                <a:latin typeface="Calibri"/>
+              </a:rPr>
+              <a:t> </a:t>
+            </a:r>
+            <a:r>
+              <a:rPr sz="1500" dirty="0" err="1">
+                <a:solidFill>
+                  <a:srgbClr val="444444"/>
+                </a:solidFill>
+                <a:latin typeface="Calibri"/>
+              </a:rPr>
+              <a:t>Criança</a:t>
+            </a:r>
+            <a:r>
+              <a:rPr sz="1500" dirty="0">
+                <a:solidFill>
+                  <a:srgbClr val="444444"/>
+                </a:solidFill>
+                <a:latin typeface="Calibri"/>
+              </a:rPr>
+              <a:t> </a:t>
+            </a:r>
+            <a:r>
+              <a:rPr sz="1500" dirty="0" err="1">
+                <a:solidFill>
+                  <a:srgbClr val="444444"/>
+                </a:solidFill>
+                <a:latin typeface="Calibri"/>
+              </a:rPr>
+              <a:t>Alfabetizada</a:t>
+            </a:r>
+            <a:r>
+              <a:rPr sz="1500" dirty="0">
+                <a:solidFill>
+                  <a:srgbClr val="444444"/>
+                </a:solidFill>
+                <a:latin typeface="Calibri"/>
+              </a:rPr>
+              <a:t>.</a:t>
             </a:r>
           </a:p>
           <a:p>
@@ -3713,7 +4240,7 @@
               </a:spcAft>
             </a:pPr>
             <a:r>
-              <a:rPr sz="1500" b="1">
+              <a:rPr sz="1500" b="1" dirty="0">
                 <a:solidFill>
                   <a:srgbClr val="2E86C1"/>
                 </a:solidFill>
@@ -3722,13 +4249,94 @@
               <a:t>▶  </a:t>
             </a:r>
             <a:r>
-              <a:rPr sz="1500">
-                <a:solidFill>
-                  <a:srgbClr val="444444"/>
-                </a:solidFill>
-                <a:latin typeface="Calibri"/>
-              </a:rPr>
-              <a:t>Hoje (2025), 66,0% das crianças avaliadas atingem esse patamar — a meta é 80,0% até 2030.</a:t>
+              <a:rPr sz="1500" dirty="0" err="1">
+                <a:solidFill>
+                  <a:srgbClr val="444444"/>
+                </a:solidFill>
+                <a:latin typeface="Calibri"/>
+              </a:rPr>
+              <a:t>Hoje</a:t>
+            </a:r>
+            <a:r>
+              <a:rPr sz="1500" dirty="0">
+                <a:solidFill>
+                  <a:srgbClr val="444444"/>
+                </a:solidFill>
+                <a:latin typeface="Calibri"/>
+              </a:rPr>
+              <a:t> (2025), 66,0% das </a:t>
+            </a:r>
+            <a:r>
+              <a:rPr sz="1500" dirty="0" err="1">
+                <a:solidFill>
+                  <a:srgbClr val="444444"/>
+                </a:solidFill>
+                <a:latin typeface="Calibri"/>
+              </a:rPr>
+              <a:t>crianças</a:t>
+            </a:r>
+            <a:r>
+              <a:rPr sz="1500" dirty="0">
+                <a:solidFill>
+                  <a:srgbClr val="444444"/>
+                </a:solidFill>
+                <a:latin typeface="Calibri"/>
+              </a:rPr>
+              <a:t> </a:t>
+            </a:r>
+            <a:r>
+              <a:rPr sz="1500" dirty="0" err="1">
+                <a:solidFill>
+                  <a:srgbClr val="444444"/>
+                </a:solidFill>
+                <a:latin typeface="Calibri"/>
+              </a:rPr>
+              <a:t>avaliadas</a:t>
+            </a:r>
+            <a:r>
+              <a:rPr sz="1500" dirty="0">
+                <a:solidFill>
+                  <a:srgbClr val="444444"/>
+                </a:solidFill>
+                <a:latin typeface="Calibri"/>
+              </a:rPr>
+              <a:t> </a:t>
+            </a:r>
+            <a:r>
+              <a:rPr sz="1500" dirty="0" err="1">
+                <a:solidFill>
+                  <a:srgbClr val="444444"/>
+                </a:solidFill>
+                <a:latin typeface="Calibri"/>
+              </a:rPr>
+              <a:t>atingem</a:t>
+            </a:r>
+            <a:r>
+              <a:rPr sz="1500" dirty="0">
+                <a:solidFill>
+                  <a:srgbClr val="444444"/>
+                </a:solidFill>
+                <a:latin typeface="Calibri"/>
+              </a:rPr>
+              <a:t> esse patamar — a meta é 80,0% </a:t>
+            </a:r>
+            <a:r>
+              <a:rPr sz="1500" dirty="0" err="1">
+                <a:solidFill>
+                  <a:srgbClr val="444444"/>
+                </a:solidFill>
+                <a:latin typeface="Calibri"/>
+              </a:rPr>
+              <a:t>até</a:t>
+            </a:r>
+            <a:r>
+              <a:rPr sz="1500" dirty="0">
+                <a:solidFill>
+                  <a:srgbClr val="444444"/>
+                </a:solidFill>
+                <a:latin typeface="Calibri"/>
+              </a:rPr>
+              <a:t> 2030.</a:t>
             </a:r>
           </a:p>
           <a:p>
@@ -3738,7 +4346,7 @@
               </a:spcAft>
             </a:pPr>
             <a:r>
-              <a:rPr sz="1500" b="1">
+              <a:rPr sz="1500" b="1" dirty="0">
                 <a:solidFill>
                   <a:srgbClr val="2E86C1"/>
                 </a:solidFill>
@@ -3747,13 +4355,211 @@
               <a:t>▶  </a:t>
             </a:r>
             <a:r>
-              <a:rPr sz="1500">
-                <a:solidFill>
-                  <a:srgbClr val="444444"/>
-                </a:solidFill>
-                <a:latin typeface="Calibri"/>
-              </a:rPr>
-              <a:t>Sem integrar resultado, metas, território e contexto socioeconômico, gestores não enxergam onde agir primeiro.</a:t>
+              <a:rPr lang="pt-BR" sz="1500" dirty="0">
+                <a:solidFill>
+                  <a:srgbClr val="444444"/>
+                </a:solidFill>
+                <a:latin typeface="Calibri"/>
+              </a:rPr>
+              <a:t>Dados não integrados e sem acompanhamento de</a:t>
+            </a:r>
+            <a:r>
+              <a:rPr sz="1500" dirty="0">
+                <a:solidFill>
+                  <a:srgbClr val="444444"/>
+                </a:solidFill>
+                <a:latin typeface="Calibri"/>
+              </a:rPr>
+              <a:t> </a:t>
+            </a:r>
+            <a:r>
+              <a:rPr sz="1500" dirty="0" err="1">
+                <a:solidFill>
+                  <a:srgbClr val="444444"/>
+                </a:solidFill>
+                <a:latin typeface="Calibri"/>
+              </a:rPr>
+              <a:t>resultado</a:t>
+            </a:r>
+            <a:r>
+              <a:rPr lang="pt-BR" sz="1500" dirty="0">
+                <a:solidFill>
+                  <a:srgbClr val="444444"/>
+                </a:solidFill>
+                <a:latin typeface="Calibri"/>
+              </a:rPr>
+              <a:t>s</a:t>
+            </a:r>
+            <a:r>
+              <a:rPr sz="1500" dirty="0">
+                <a:solidFill>
+                  <a:srgbClr val="444444"/>
+                </a:solidFill>
+                <a:latin typeface="Calibri"/>
+              </a:rPr>
+              <a:t>, </a:t>
+            </a:r>
+            <a:r>
+              <a:rPr sz="1500" dirty="0" err="1">
+                <a:solidFill>
+                  <a:srgbClr val="444444"/>
+                </a:solidFill>
+                <a:latin typeface="Calibri"/>
+              </a:rPr>
+              <a:t>metas</a:t>
+            </a:r>
+            <a:r>
+              <a:rPr sz="1500" dirty="0">
+                <a:solidFill>
+                  <a:srgbClr val="444444"/>
+                </a:solidFill>
+                <a:latin typeface="Calibri"/>
+              </a:rPr>
+              <a:t>, </a:t>
+            </a:r>
+            <a:r>
+              <a:rPr sz="1500" dirty="0" err="1">
+                <a:solidFill>
+                  <a:srgbClr val="444444"/>
+                </a:solidFill>
+                <a:latin typeface="Calibri"/>
+              </a:rPr>
+              <a:t>território</a:t>
+            </a:r>
+            <a:r>
+              <a:rPr sz="1500" dirty="0">
+                <a:solidFill>
+                  <a:srgbClr val="444444"/>
+                </a:solidFill>
+                <a:latin typeface="Calibri"/>
+              </a:rPr>
+              <a:t> e </a:t>
+            </a:r>
+            <a:r>
+              <a:rPr sz="1500" dirty="0" err="1">
+                <a:solidFill>
+                  <a:srgbClr val="444444"/>
+                </a:solidFill>
+                <a:latin typeface="Calibri"/>
+              </a:rPr>
+              <a:t>contexto</a:t>
+            </a:r>
+            <a:r>
+              <a:rPr sz="1500" dirty="0">
+                <a:solidFill>
+                  <a:srgbClr val="444444"/>
+                </a:solidFill>
+                <a:latin typeface="Calibri"/>
+              </a:rPr>
+              <a:t> </a:t>
+            </a:r>
+            <a:r>
+              <a:rPr sz="1500" dirty="0" err="1">
+                <a:solidFill>
+                  <a:srgbClr val="444444"/>
+                </a:solidFill>
+                <a:latin typeface="Calibri"/>
+              </a:rPr>
+              <a:t>socioeconômico</a:t>
+            </a:r>
+            <a:r>
+              <a:rPr sz="1500" dirty="0">
+                <a:solidFill>
+                  <a:srgbClr val="444444"/>
+                </a:solidFill>
+                <a:latin typeface="Calibri"/>
+              </a:rPr>
+              <a:t>, </a:t>
+            </a:r>
+            <a:r>
+              <a:rPr sz="1500" dirty="0" err="1">
+                <a:solidFill>
+                  <a:srgbClr val="444444"/>
+                </a:solidFill>
+                <a:latin typeface="Calibri"/>
+              </a:rPr>
+              <a:t>gestores</a:t>
+            </a:r>
+            <a:r>
+              <a:rPr sz="1500" dirty="0">
+                <a:solidFill>
+                  <a:srgbClr val="444444"/>
+                </a:solidFill>
+                <a:latin typeface="Calibri"/>
+              </a:rPr>
+              <a:t> não </a:t>
+            </a:r>
+            <a:r>
+              <a:rPr sz="1500" dirty="0" err="1">
+                <a:solidFill>
+                  <a:srgbClr val="444444"/>
+                </a:solidFill>
+                <a:latin typeface="Calibri"/>
+              </a:rPr>
+              <a:t>enxergam</a:t>
+            </a:r>
+            <a:r>
+              <a:rPr sz="1500" dirty="0">
+                <a:solidFill>
+                  <a:srgbClr val="444444"/>
+                </a:solidFill>
+                <a:latin typeface="Calibri"/>
+              </a:rPr>
+              <a:t> </a:t>
+            </a:r>
+            <a:r>
+              <a:rPr sz="1500" dirty="0" err="1">
+                <a:solidFill>
+                  <a:srgbClr val="444444"/>
+                </a:solidFill>
+                <a:latin typeface="Calibri"/>
+              </a:rPr>
+              <a:t>onde</a:t>
+            </a:r>
+            <a:r>
+              <a:rPr sz="1500" dirty="0">
+                <a:solidFill>
+                  <a:srgbClr val="444444"/>
+                </a:solidFill>
+                <a:latin typeface="Calibri"/>
+              </a:rPr>
+              <a:t> </a:t>
+            </a:r>
+            <a:r>
+              <a:rPr sz="1500" dirty="0" err="1">
+                <a:solidFill>
+                  <a:srgbClr val="444444"/>
+                </a:solidFill>
+                <a:latin typeface="Calibri"/>
+              </a:rPr>
+              <a:t>agir</a:t>
+            </a:r>
+            <a:r>
+              <a:rPr sz="1500" dirty="0">
+                <a:solidFill>
+                  <a:srgbClr val="444444"/>
+                </a:solidFill>
+                <a:latin typeface="Calibri"/>
+              </a:rPr>
+              <a:t> </a:t>
+            </a:r>
+            <a:r>
+              <a:rPr sz="1500" dirty="0" err="1">
+                <a:solidFill>
+                  <a:srgbClr val="444444"/>
+                </a:solidFill>
+                <a:latin typeface="Calibri"/>
+              </a:rPr>
+              <a:t>primeiro</a:t>
+            </a:r>
+            <a:r>
+              <a:rPr sz="1500" dirty="0">
+                <a:solidFill>
+                  <a:srgbClr val="444444"/>
+                </a:solidFill>
+                <a:latin typeface="Calibri"/>
+              </a:rPr>
+              <a:t>.</a:t>
             </a:r>
           </a:p>
         </p:txBody>
@@ -3838,6 +4644,7 @@
           <a:lstStyle/>
           <a:p>
             <a:pPr algn="ctr"/>
+            <a:endParaRPr/>
           </a:p>
         </p:txBody>
       </p:sp>
@@ -3885,7 +4692,7 @@
 </file>
 
 <file path=ppt/slides/slide3.xml><?xml version="1.0" encoding="utf-8"?>
-<p:sld xmlns:a="http://schemas.openxmlformats.org/drawingml/2006/main" xmlns:p="http://schemas.openxmlformats.org/presentationml/2006/main" xmlns:r="http://schemas.openxmlformats.org/officeDocument/2006/relationships">
+<p:sld xmlns:a="http://schemas.openxmlformats.org/drawingml/2006/main" xmlns:r="http://schemas.openxmlformats.org/officeDocument/2006/relationships" xmlns:p="http://schemas.openxmlformats.org/presentationml/2006/main">
   <p:cSld>
     <p:spTree>
       <p:nvGrpSpPr>
@@ -3893,7 +4700,14 @@
         <p:cNvGrpSpPr/>
         <p:nvPr/>
       </p:nvGrpSpPr>
-      <p:grpSpPr/>
+      <p:grpSpPr>
+        <a:xfrm>
+          <a:off x="0" y="0"/>
+          <a:ext cx="0" cy="0"/>
+          <a:chOff x="0" y="0"/>
+          <a:chExt cx="0" cy="0"/>
+        </a:xfrm>
+      </p:grpSpPr>
       <p:sp>
         <p:nvSpPr>
           <p:cNvPr id="2" name="Rectangle 1"/>
@@ -3935,6 +4749,7 @@
           <a:lstStyle/>
           <a:p>
             <a:pPr algn="ctr"/>
+            <a:endParaRPr/>
           </a:p>
         </p:txBody>
       </p:sp>
@@ -3979,6 +4794,7 @@
           <a:lstStyle/>
           <a:p>
             <a:pPr algn="ctr"/>
+            <a:endParaRPr/>
           </a:p>
         </p:txBody>
       </p:sp>
@@ -4058,6 +4874,7 @@
           <a:lstStyle/>
           <a:p>
             <a:pPr algn="ctr"/>
+            <a:endParaRPr/>
           </a:p>
         </p:txBody>
       </p:sp>
@@ -4141,6 +4958,7 @@
           <a:lstStyle/>
           <a:p>
             <a:pPr algn="ctr"/>
+            <a:endParaRPr/>
           </a:p>
         </p:txBody>
       </p:sp>
@@ -4259,6 +5077,7 @@
           <a:lstStyle/>
           <a:p>
             <a:pPr algn="ctr"/>
+            <a:endParaRPr/>
           </a:p>
         </p:txBody>
       </p:sp>
@@ -4377,6 +5196,7 @@
           <a:lstStyle/>
           <a:p>
             <a:pPr algn="ctr"/>
+            <a:endParaRPr/>
           </a:p>
         </p:txBody>
       </p:sp>
@@ -4495,6 +5315,7 @@
           <a:lstStyle/>
           <a:p>
             <a:pPr algn="ctr"/>
+            <a:endParaRPr/>
           </a:p>
         </p:txBody>
       </p:sp>
@@ -4609,6 +5430,7 @@
           <a:lstStyle/>
           <a:p>
             <a:pPr algn="ctr"/>
+            <a:endParaRPr/>
           </a:p>
         </p:txBody>
       </p:sp>
@@ -4656,7 +5478,7 @@
         <p:spPr>
           <a:xfrm>
             <a:off x="365760" y="4160520"/>
-            <a:ext cx="11338560" cy="2103120"/>
+            <a:ext cx="11338560" cy="1323439"/>
           </a:xfrm>
           <a:prstGeom prst="rect">
             <a:avLst/>
@@ -4675,23 +5497,110 @@
               </a:spcAft>
             </a:pPr>
             <a:r>
-              <a:rPr sz="1500" b="1">
+              <a:rPr sz="1500" b="1" dirty="0">
                 <a:solidFill>
                   <a:srgbClr val="2E86C1"/>
                 </a:solidFill>
                 <a:latin typeface="Calibri"/>
               </a:rPr>
-              <a:t>▶  </a:t>
-            </a:r>
-            <a:r>
-              <a:rPr sz="1500">
-                <a:solidFill>
-                  <a:srgbClr val="444444"/>
-                </a:solidFill>
-                <a:latin typeface="Calibri"/>
-              </a:rPr>
-              <a:t>Estamos avançando (+10,1 p.p. em 2 anos), mas o ritmo precisa acelerar para fechar 14,0 p.p. até 2030.</a:t>
-            </a:r>
+              <a:t>▶ </a:t>
+            </a:r>
+            <a:r>
+              <a:rPr sz="1500" dirty="0">
+                <a:solidFill>
+                  <a:srgbClr val="444444"/>
+                </a:solidFill>
+                <a:latin typeface="Calibri"/>
+              </a:rPr>
+              <a:t>Estamos </a:t>
+            </a:r>
+            <a:r>
+              <a:rPr sz="1500" dirty="0" err="1">
+                <a:solidFill>
+                  <a:srgbClr val="444444"/>
+                </a:solidFill>
+                <a:latin typeface="Calibri"/>
+              </a:rPr>
+              <a:t>avançando</a:t>
+            </a:r>
+            <a:r>
+              <a:rPr sz="1500" dirty="0">
+                <a:solidFill>
+                  <a:srgbClr val="444444"/>
+                </a:solidFill>
+                <a:latin typeface="Calibri"/>
+              </a:rPr>
+              <a:t> (+10,1 p.p. </a:t>
+            </a:r>
+            <a:r>
+              <a:rPr sz="1500" dirty="0" err="1">
+                <a:solidFill>
+                  <a:srgbClr val="444444"/>
+                </a:solidFill>
+                <a:latin typeface="Calibri"/>
+              </a:rPr>
+              <a:t>em</a:t>
+            </a:r>
+            <a:r>
+              <a:rPr sz="1500" dirty="0">
+                <a:solidFill>
+                  <a:srgbClr val="444444"/>
+                </a:solidFill>
+                <a:latin typeface="Calibri"/>
+              </a:rPr>
+              <a:t> 2 </a:t>
+            </a:r>
+            <a:r>
+              <a:rPr sz="1500" dirty="0" err="1">
+                <a:solidFill>
+                  <a:srgbClr val="444444"/>
+                </a:solidFill>
+                <a:latin typeface="Calibri"/>
+              </a:rPr>
+              <a:t>anos</a:t>
+            </a:r>
+            <a:r>
+              <a:rPr sz="1500" dirty="0">
+                <a:solidFill>
+                  <a:srgbClr val="444444"/>
+                </a:solidFill>
+                <a:latin typeface="Calibri"/>
+              </a:rPr>
+              <a:t>), </a:t>
+            </a:r>
+            <a:r>
+              <a:rPr lang="pt-BR" sz="1500" dirty="0">
+                <a:solidFill>
+                  <a:srgbClr val="444444"/>
+                </a:solidFill>
+                <a:latin typeface="Calibri"/>
+              </a:rPr>
+              <a:t>	ritmo excelente, mas tende a desacelerar com estados e municípios já atingindo altos índices. O maior problema são os estados/</a:t>
+            </a:r>
+            <a:r>
+              <a:rPr lang="pt-BR" sz="1500" dirty="0" err="1">
+                <a:solidFill>
+                  <a:srgbClr val="444444"/>
+                </a:solidFill>
+                <a:latin typeface="Calibri"/>
+              </a:rPr>
+              <a:t>munícípios</a:t>
+            </a:r>
+            <a:r>
+              <a:rPr lang="pt-BR" sz="1500" dirty="0">
+                <a:solidFill>
+                  <a:srgbClr val="444444"/>
+                </a:solidFill>
+                <a:latin typeface="Calibri"/>
+              </a:rPr>
+              <a:t> com maior distância da meta.</a:t>
+            </a:r>
+            <a:endParaRPr sz="1500" dirty="0">
+              <a:solidFill>
+                <a:srgbClr val="444444"/>
+              </a:solidFill>
+              <a:latin typeface="Calibri"/>
+            </a:endParaRPr>
           </a:p>
           <a:p>
             <a:pPr>
@@ -4700,22 +5609,94 @@
               </a:spcAft>
             </a:pPr>
             <a:r>
-              <a:rPr sz="1500" b="1">
+              <a:rPr sz="1500" b="1" dirty="0">
                 <a:solidFill>
                   <a:srgbClr val="2E86C1"/>
                 </a:solidFill>
                 <a:latin typeface="Calibri"/>
               </a:rPr>
-              <a:t>▶  </a:t>
-            </a:r>
-            <a:r>
-              <a:rPr sz="1500">
-                <a:solidFill>
-                  <a:srgbClr val="444444"/>
-                </a:solidFill>
-                <a:latin typeface="Calibri"/>
-              </a:rPr>
-              <a:t>O indicador nacional esconde desigualdade regional: CE chega a 85,3%, enquanto BA não passa de 36,0%.</a:t>
+              <a:t>▶ </a:t>
+            </a:r>
+            <a:r>
+              <a:rPr lang="pt-BR" sz="1500" dirty="0">
+                <a:solidFill>
+                  <a:srgbClr val="444444"/>
+                </a:solidFill>
+                <a:latin typeface="Calibri"/>
+              </a:rPr>
+              <a:t>De</a:t>
+            </a:r>
+            <a:r>
+              <a:rPr sz="1500" dirty="0" err="1">
+                <a:solidFill>
+                  <a:srgbClr val="444444"/>
+                </a:solidFill>
+                <a:latin typeface="Calibri"/>
+              </a:rPr>
+              <a:t>sigualdade</a:t>
+            </a:r>
+            <a:r>
+              <a:rPr sz="1500" dirty="0">
+                <a:solidFill>
+                  <a:srgbClr val="444444"/>
+                </a:solidFill>
+                <a:latin typeface="Calibri"/>
+              </a:rPr>
+              <a:t> regional: CE </a:t>
+            </a:r>
+            <a:r>
+              <a:rPr sz="1500" dirty="0" err="1">
+                <a:solidFill>
+                  <a:srgbClr val="444444"/>
+                </a:solidFill>
+                <a:latin typeface="Calibri"/>
+              </a:rPr>
+              <a:t>chega</a:t>
+            </a:r>
+            <a:r>
+              <a:rPr sz="1500" dirty="0">
+                <a:solidFill>
+                  <a:srgbClr val="444444"/>
+                </a:solidFill>
+                <a:latin typeface="Calibri"/>
+              </a:rPr>
+              <a:t> a 85,3%, </a:t>
+            </a:r>
+            <a:r>
+              <a:rPr sz="1500" dirty="0" err="1">
+                <a:solidFill>
+                  <a:srgbClr val="444444"/>
+                </a:solidFill>
+                <a:latin typeface="Calibri"/>
+              </a:rPr>
+              <a:t>enquanto</a:t>
+            </a:r>
+            <a:r>
+              <a:rPr sz="1500" dirty="0">
+                <a:solidFill>
+                  <a:srgbClr val="444444"/>
+                </a:solidFill>
+                <a:latin typeface="Calibri"/>
+              </a:rPr>
+              <a:t> BA não </a:t>
+            </a:r>
+            <a:r>
+              <a:rPr sz="1500" dirty="0" err="1">
+                <a:solidFill>
+                  <a:srgbClr val="444444"/>
+                </a:solidFill>
+                <a:latin typeface="Calibri"/>
+              </a:rPr>
+              <a:t>passa</a:t>
+            </a:r>
+            <a:r>
+              <a:rPr sz="1500" dirty="0">
+                <a:solidFill>
+                  <a:srgbClr val="444444"/>
+                </a:solidFill>
+                <a:latin typeface="Calibri"/>
+              </a:rPr>
+              <a:t> de 36,0%.</a:t>
             </a:r>
           </a:p>
           <a:p>
@@ -4725,22 +5706,211 @@
               </a:spcAft>
             </a:pPr>
             <a:r>
-              <a:rPr sz="1500" b="1">
+              <a:rPr sz="1500" b="1" dirty="0">
                 <a:solidFill>
                   <a:srgbClr val="2E86C1"/>
                 </a:solidFill>
                 <a:latin typeface="Calibri"/>
               </a:rPr>
-              <a:t>▶  </a:t>
-            </a:r>
-            <a:r>
-              <a:rPr sz="1500">
-                <a:solidFill>
-                  <a:srgbClr val="444444"/>
-                </a:solidFill>
-                <a:latin typeface="Calibri"/>
-              </a:rPr>
-              <a:t>RS teve a maior queda do país entre os dois últimos anos (-18,8 p.p.) — um sinal de alerta que só aparece comparando anos lado a lado.</a:t>
+              <a:t>▶ </a:t>
+            </a:r>
+            <a:r>
+              <a:rPr sz="1500" dirty="0">
+                <a:solidFill>
+                  <a:srgbClr val="444444"/>
+                </a:solidFill>
+                <a:latin typeface="Calibri"/>
+              </a:rPr>
+              <a:t>RS </a:t>
+            </a:r>
+            <a:r>
+              <a:rPr sz="1500" dirty="0" err="1">
+                <a:solidFill>
+                  <a:srgbClr val="444444"/>
+                </a:solidFill>
+                <a:latin typeface="Calibri"/>
+              </a:rPr>
+              <a:t>teve</a:t>
+            </a:r>
+            <a:r>
+              <a:rPr sz="1500" dirty="0">
+                <a:solidFill>
+                  <a:srgbClr val="444444"/>
+                </a:solidFill>
+                <a:latin typeface="Calibri"/>
+              </a:rPr>
+              <a:t> a </a:t>
+            </a:r>
+            <a:r>
+              <a:rPr sz="1500" dirty="0" err="1">
+                <a:solidFill>
+                  <a:srgbClr val="444444"/>
+                </a:solidFill>
+                <a:latin typeface="Calibri"/>
+              </a:rPr>
+              <a:t>maior</a:t>
+            </a:r>
+            <a:r>
+              <a:rPr sz="1500" dirty="0">
+                <a:solidFill>
+                  <a:srgbClr val="444444"/>
+                </a:solidFill>
+                <a:latin typeface="Calibri"/>
+              </a:rPr>
+              <a:t> </a:t>
+            </a:r>
+            <a:r>
+              <a:rPr sz="1500" dirty="0" err="1">
+                <a:solidFill>
+                  <a:srgbClr val="444444"/>
+                </a:solidFill>
+                <a:latin typeface="Calibri"/>
+              </a:rPr>
+              <a:t>queda</a:t>
+            </a:r>
+            <a:r>
+              <a:rPr sz="1500" dirty="0">
+                <a:solidFill>
+                  <a:srgbClr val="444444"/>
+                </a:solidFill>
+                <a:latin typeface="Calibri"/>
+              </a:rPr>
+              <a:t> do </a:t>
+            </a:r>
+            <a:r>
+              <a:rPr sz="1500" dirty="0" err="1">
+                <a:solidFill>
+                  <a:srgbClr val="444444"/>
+                </a:solidFill>
+                <a:latin typeface="Calibri"/>
+              </a:rPr>
+              <a:t>país</a:t>
+            </a:r>
+            <a:r>
+              <a:rPr sz="1500" dirty="0">
+                <a:solidFill>
+                  <a:srgbClr val="444444"/>
+                </a:solidFill>
+                <a:latin typeface="Calibri"/>
+              </a:rPr>
+              <a:t> entre </a:t>
+            </a:r>
+            <a:r>
+              <a:rPr sz="1500" dirty="0" err="1">
+                <a:solidFill>
+                  <a:srgbClr val="444444"/>
+                </a:solidFill>
+                <a:latin typeface="Calibri"/>
+              </a:rPr>
+              <a:t>os</a:t>
+            </a:r>
+            <a:r>
+              <a:rPr sz="1500" dirty="0">
+                <a:solidFill>
+                  <a:srgbClr val="444444"/>
+                </a:solidFill>
+                <a:latin typeface="Calibri"/>
+              </a:rPr>
+              <a:t> </a:t>
+            </a:r>
+            <a:r>
+              <a:rPr sz="1500" dirty="0" err="1">
+                <a:solidFill>
+                  <a:srgbClr val="444444"/>
+                </a:solidFill>
+                <a:latin typeface="Calibri"/>
+              </a:rPr>
+              <a:t>dois</a:t>
+            </a:r>
+            <a:r>
+              <a:rPr sz="1500" dirty="0">
+                <a:solidFill>
+                  <a:srgbClr val="444444"/>
+                </a:solidFill>
+                <a:latin typeface="Calibri"/>
+              </a:rPr>
+              <a:t> </a:t>
+            </a:r>
+            <a:r>
+              <a:rPr sz="1500" dirty="0" err="1">
+                <a:solidFill>
+                  <a:srgbClr val="444444"/>
+                </a:solidFill>
+                <a:latin typeface="Calibri"/>
+              </a:rPr>
+              <a:t>últimos</a:t>
+            </a:r>
+            <a:r>
+              <a:rPr sz="1500" dirty="0">
+                <a:solidFill>
+                  <a:srgbClr val="444444"/>
+                </a:solidFill>
+                <a:latin typeface="Calibri"/>
+              </a:rPr>
+              <a:t> </a:t>
+            </a:r>
+            <a:r>
+              <a:rPr sz="1500" dirty="0" err="1">
+                <a:solidFill>
+                  <a:srgbClr val="444444"/>
+                </a:solidFill>
+                <a:latin typeface="Calibri"/>
+              </a:rPr>
+              <a:t>anos</a:t>
+            </a:r>
+            <a:r>
+              <a:rPr sz="1500" dirty="0">
+                <a:solidFill>
+                  <a:srgbClr val="444444"/>
+                </a:solidFill>
+                <a:latin typeface="Calibri"/>
+              </a:rPr>
+              <a:t> (-18,8 p.p.) — </a:t>
+            </a:r>
+            <a:r>
+              <a:rPr lang="pt-BR" sz="1500" dirty="0">
+                <a:solidFill>
+                  <a:srgbClr val="444444"/>
+                </a:solidFill>
+                <a:latin typeface="Calibri"/>
+              </a:rPr>
+              <a:t>S</a:t>
+            </a:r>
+            <a:r>
+              <a:rPr sz="1500" dirty="0" err="1">
+                <a:solidFill>
+                  <a:srgbClr val="444444"/>
+                </a:solidFill>
+                <a:latin typeface="Calibri"/>
+              </a:rPr>
+              <a:t>inal</a:t>
+            </a:r>
+            <a:r>
+              <a:rPr sz="1500" dirty="0">
+                <a:solidFill>
+                  <a:srgbClr val="444444"/>
+                </a:solidFill>
+                <a:latin typeface="Calibri"/>
+              </a:rPr>
+              <a:t> de alert</a:t>
+            </a:r>
+            <a:r>
+              <a:rPr lang="pt-BR" sz="1500" dirty="0">
+                <a:solidFill>
+                  <a:srgbClr val="444444"/>
+                </a:solidFill>
+                <a:latin typeface="Calibri"/>
+              </a:rPr>
+              <a:t>a</a:t>
+            </a:r>
+            <a:r>
+              <a:rPr sz="1500" dirty="0">
+                <a:solidFill>
+                  <a:srgbClr val="444444"/>
+                </a:solidFill>
+                <a:latin typeface="Calibri"/>
+              </a:rPr>
+              <a:t>.</a:t>
             </a:r>
           </a:p>
         </p:txBody>
@@ -4754,7 +5924,7 @@
 </file>
 
 <file path=ppt/slides/slide4.xml><?xml version="1.0" encoding="utf-8"?>
-<p:sld xmlns:a="http://schemas.openxmlformats.org/drawingml/2006/main" xmlns:p="http://schemas.openxmlformats.org/presentationml/2006/main" xmlns:r="http://schemas.openxmlformats.org/officeDocument/2006/relationships">
+<p:sld xmlns:a="http://schemas.openxmlformats.org/drawingml/2006/main" xmlns:r="http://schemas.openxmlformats.org/officeDocument/2006/relationships" xmlns:p="http://schemas.openxmlformats.org/presentationml/2006/main">
   <p:cSld>
     <p:spTree>
       <p:nvGrpSpPr>
@@ -4762,7 +5932,14 @@
         <p:cNvGrpSpPr/>
         <p:nvPr/>
       </p:nvGrpSpPr>
-      <p:grpSpPr/>
+      <p:grpSpPr>
+        <a:xfrm>
+          <a:off x="0" y="0"/>
+          <a:ext cx="0" cy="0"/>
+          <a:chOff x="0" y="0"/>
+          <a:chExt cx="0" cy="0"/>
+        </a:xfrm>
+      </p:grpSpPr>
       <p:sp>
         <p:nvSpPr>
           <p:cNvPr id="2" name="Rectangle 1"/>
@@ -4804,6 +5981,7 @@
           <a:lstStyle/>
           <a:p>
             <a:pPr algn="ctr"/>
+            <a:endParaRPr/>
           </a:p>
         </p:txBody>
       </p:sp>
@@ -4848,6 +6026,7 @@
           <a:lstStyle/>
           <a:p>
             <a:pPr algn="ctr"/>
+            <a:endParaRPr/>
           </a:p>
         </p:txBody>
       </p:sp>
@@ -4927,6 +6106,7 @@
           <a:lstStyle/>
           <a:p>
             <a:pPr algn="ctr"/>
+            <a:endParaRPr/>
           </a:p>
         </p:txBody>
       </p:sp>
@@ -5008,6 +6188,7 @@
           <a:lstStyle/>
           <a:p>
             <a:pPr algn="ctr"/>
+            <a:endParaRPr/>
           </a:p>
         </p:txBody>
       </p:sp>
@@ -5183,6 +6364,7 @@
           <a:lstStyle/>
           <a:p>
             <a:pPr algn="ctr"/>
+            <a:endParaRPr/>
           </a:p>
         </p:txBody>
       </p:sp>
@@ -5346,6 +6528,7 @@
           <a:lstStyle/>
           <a:p>
             <a:pPr algn="ctr"/>
+            <a:endParaRPr/>
           </a:p>
         </p:txBody>
       </p:sp>
@@ -5509,6 +6692,7 @@
           <a:lstStyle/>
           <a:p>
             <a:pPr algn="ctr"/>
+            <a:endParaRPr/>
           </a:p>
         </p:txBody>
       </p:sp>
@@ -5603,7 +6787,7 @@
         <p:spPr>
           <a:xfrm>
             <a:off x="457200" y="2880360"/>
-            <a:ext cx="11338560" cy="365760"/>
+            <a:ext cx="11338560" cy="292388"/>
           </a:xfrm>
           <a:prstGeom prst="rect">
             <a:avLst/>
@@ -5618,14 +6802,173 @@
           <a:p>
             <a:pPr algn="ctr"/>
             <a:r>
-              <a:rPr sz="1300" b="0" i="1">
-                <a:solidFill>
-                  <a:srgbClr val="444444"/>
-                </a:solidFill>
-                <a:latin typeface="Calibri"/>
-              </a:rPr>
-              <a:t>Qualidade de dados validada de ponta a ponta, em todas as camadas, a cada execução</a:t>
-            </a:r>
+              <a:rPr sz="1300" b="0" i="1" dirty="0" err="1">
+                <a:solidFill>
+                  <a:srgbClr val="444444"/>
+                </a:solidFill>
+                <a:latin typeface="Calibri"/>
+              </a:rPr>
+              <a:t>Qualidade</a:t>
+            </a:r>
+            <a:r>
+              <a:rPr sz="1300" b="0" i="1" dirty="0">
+                <a:solidFill>
+                  <a:srgbClr val="444444"/>
+                </a:solidFill>
+                <a:latin typeface="Calibri"/>
+              </a:rPr>
+              <a:t> de dados </a:t>
+            </a:r>
+            <a:r>
+              <a:rPr sz="1300" b="0" i="1" dirty="0" err="1">
+                <a:solidFill>
+                  <a:srgbClr val="444444"/>
+                </a:solidFill>
+                <a:latin typeface="Calibri"/>
+              </a:rPr>
+              <a:t>validada</a:t>
+            </a:r>
+            <a:r>
+              <a:rPr sz="1300" b="0" i="1" dirty="0">
+                <a:solidFill>
+                  <a:srgbClr val="444444"/>
+                </a:solidFill>
+                <a:latin typeface="Calibri"/>
+              </a:rPr>
+              <a:t> de </a:t>
+            </a:r>
+            <a:r>
+              <a:rPr sz="1300" b="0" i="1" dirty="0" err="1">
+                <a:solidFill>
+                  <a:srgbClr val="444444"/>
+                </a:solidFill>
+                <a:latin typeface="Calibri"/>
+              </a:rPr>
+              <a:t>ponta</a:t>
+            </a:r>
+            <a:r>
+              <a:rPr sz="1300" b="0" i="1" dirty="0">
+                <a:solidFill>
+                  <a:srgbClr val="444444"/>
+                </a:solidFill>
+                <a:latin typeface="Calibri"/>
+              </a:rPr>
+              <a:t> a </a:t>
+            </a:r>
+            <a:r>
+              <a:rPr sz="1300" b="0" i="1" dirty="0" err="1">
+                <a:solidFill>
+                  <a:srgbClr val="444444"/>
+                </a:solidFill>
+                <a:latin typeface="Calibri"/>
+              </a:rPr>
+              <a:t>ponta</a:t>
+            </a:r>
+            <a:r>
+              <a:rPr sz="1300" b="0" i="1" dirty="0">
+                <a:solidFill>
+                  <a:srgbClr val="444444"/>
+                </a:solidFill>
+                <a:latin typeface="Calibri"/>
+              </a:rPr>
+              <a:t>, </a:t>
+            </a:r>
+            <a:r>
+              <a:rPr sz="1300" b="0" i="1" dirty="0" err="1">
+                <a:solidFill>
+                  <a:srgbClr val="444444"/>
+                </a:solidFill>
+                <a:latin typeface="Calibri"/>
+              </a:rPr>
+              <a:t>em</a:t>
+            </a:r>
+            <a:r>
+              <a:rPr sz="1300" b="0" i="1" dirty="0">
+                <a:solidFill>
+                  <a:srgbClr val="444444"/>
+                </a:solidFill>
+                <a:latin typeface="Calibri"/>
+              </a:rPr>
+              <a:t> </a:t>
+            </a:r>
+            <a:r>
+              <a:rPr sz="1300" b="0" i="1" dirty="0" err="1">
+                <a:solidFill>
+                  <a:srgbClr val="444444"/>
+                </a:solidFill>
+                <a:latin typeface="Calibri"/>
+              </a:rPr>
+              <a:t>todas</a:t>
+            </a:r>
+            <a:r>
+              <a:rPr sz="1300" b="0" i="1" dirty="0">
+                <a:solidFill>
+                  <a:srgbClr val="444444"/>
+                </a:solidFill>
+                <a:latin typeface="Calibri"/>
+              </a:rPr>
+              <a:t> as </a:t>
+            </a:r>
+            <a:r>
+              <a:rPr sz="1300" b="0" i="1" dirty="0" err="1">
+                <a:solidFill>
+                  <a:srgbClr val="444444"/>
+                </a:solidFill>
+                <a:latin typeface="Calibri"/>
+              </a:rPr>
+              <a:t>camadas</a:t>
+            </a:r>
+            <a:r>
+              <a:rPr lang="pt-BR" sz="1300" i="1" dirty="0">
+                <a:solidFill>
+                  <a:srgbClr val="444444"/>
+                </a:solidFill>
+                <a:latin typeface="Calibri"/>
+              </a:rPr>
+              <a:t> e</a:t>
+            </a:r>
+            <a:r>
+              <a:rPr sz="1300" b="0" i="1" dirty="0">
+                <a:solidFill>
+                  <a:srgbClr val="444444"/>
+                </a:solidFill>
+                <a:latin typeface="Calibri"/>
+              </a:rPr>
+              <a:t> a </a:t>
+            </a:r>
+            <a:r>
+              <a:rPr sz="1300" b="0" i="1" dirty="0" err="1">
+                <a:solidFill>
+                  <a:srgbClr val="444444"/>
+                </a:solidFill>
+                <a:latin typeface="Calibri"/>
+              </a:rPr>
+              <a:t>cada</a:t>
+            </a:r>
+            <a:r>
+              <a:rPr sz="1300" b="0" i="1" dirty="0">
+                <a:solidFill>
+                  <a:srgbClr val="444444"/>
+                </a:solidFill>
+                <a:latin typeface="Calibri"/>
+              </a:rPr>
+              <a:t> </a:t>
+            </a:r>
+            <a:r>
+              <a:rPr sz="1300" b="0" i="1" dirty="0" err="1">
+                <a:solidFill>
+                  <a:srgbClr val="444444"/>
+                </a:solidFill>
+                <a:latin typeface="Calibri"/>
+              </a:rPr>
+              <a:t>execução</a:t>
+            </a:r>
+            <a:endParaRPr sz="1300" b="0" i="1" dirty="0">
+              <a:solidFill>
+                <a:srgbClr val="444444"/>
+              </a:solidFill>
+              <a:latin typeface="Calibri"/>
+            </a:endParaRPr>
           </a:p>
         </p:txBody>
       </p:sp>
@@ -5657,7 +7000,7 @@
               </a:spcAft>
             </a:pPr>
             <a:r>
-              <a:rPr sz="1450" b="1">
+              <a:rPr sz="1450" b="1" dirty="0">
                 <a:solidFill>
                   <a:srgbClr val="2E86C1"/>
                 </a:solidFill>
@@ -5666,13 +7009,292 @@
               <a:t>▶  </a:t>
             </a:r>
             <a:r>
-              <a:rPr sz="1450">
-                <a:solidFill>
-                  <a:srgbClr val="444444"/>
-                </a:solidFill>
-                <a:latin typeface="Calibri"/>
-              </a:rPr>
-              <a:t>Ingestão híbrida: dados históricos por lote (batch, com fallback automático) + eventos simulados de atualização (streaming) — o mesmo padrão usado por bancos e fintechs para ingestão contínua.</a:t>
+              <a:rPr sz="1450" dirty="0" err="1">
+                <a:solidFill>
+                  <a:srgbClr val="444444"/>
+                </a:solidFill>
+                <a:latin typeface="Calibri"/>
+              </a:rPr>
+              <a:t>Ingestão</a:t>
+            </a:r>
+            <a:r>
+              <a:rPr sz="1450" dirty="0">
+                <a:solidFill>
+                  <a:srgbClr val="444444"/>
+                </a:solidFill>
+                <a:latin typeface="Calibri"/>
+              </a:rPr>
+              <a:t> </a:t>
+            </a:r>
+            <a:r>
+              <a:rPr sz="1450" dirty="0" err="1">
+                <a:solidFill>
+                  <a:srgbClr val="444444"/>
+                </a:solidFill>
+                <a:latin typeface="Calibri"/>
+              </a:rPr>
+              <a:t>híbrida</a:t>
+            </a:r>
+            <a:r>
+              <a:rPr sz="1450" dirty="0">
+                <a:solidFill>
+                  <a:srgbClr val="444444"/>
+                </a:solidFill>
+                <a:latin typeface="Calibri"/>
+              </a:rPr>
+              <a:t>: dados </a:t>
+            </a:r>
+            <a:r>
+              <a:rPr sz="1450" dirty="0" err="1">
+                <a:solidFill>
+                  <a:srgbClr val="444444"/>
+                </a:solidFill>
+                <a:latin typeface="Calibri"/>
+              </a:rPr>
+              <a:t>históricos</a:t>
+            </a:r>
+            <a:r>
+              <a:rPr sz="1450" dirty="0">
+                <a:solidFill>
+                  <a:srgbClr val="444444"/>
+                </a:solidFill>
+                <a:latin typeface="Calibri"/>
+              </a:rPr>
+              <a:t> </a:t>
+            </a:r>
+            <a:r>
+              <a:rPr sz="1450" dirty="0" err="1">
+                <a:solidFill>
+                  <a:srgbClr val="444444"/>
+                </a:solidFill>
+                <a:latin typeface="Calibri"/>
+              </a:rPr>
+              <a:t>por</a:t>
+            </a:r>
+            <a:r>
+              <a:rPr sz="1450" dirty="0">
+                <a:solidFill>
+                  <a:srgbClr val="444444"/>
+                </a:solidFill>
+                <a:latin typeface="Calibri"/>
+              </a:rPr>
+              <a:t> </a:t>
+            </a:r>
+            <a:r>
+              <a:rPr sz="1450" dirty="0" err="1">
+                <a:solidFill>
+                  <a:srgbClr val="444444"/>
+                </a:solidFill>
+                <a:latin typeface="Calibri"/>
+              </a:rPr>
+              <a:t>lote</a:t>
+            </a:r>
+            <a:r>
+              <a:rPr sz="1450" dirty="0">
+                <a:solidFill>
+                  <a:srgbClr val="444444"/>
+                </a:solidFill>
+                <a:latin typeface="Calibri"/>
+              </a:rPr>
+              <a:t> (batch, com fallback </a:t>
+            </a:r>
+            <a:r>
+              <a:rPr sz="1450" dirty="0" err="1">
+                <a:solidFill>
+                  <a:srgbClr val="444444"/>
+                </a:solidFill>
+                <a:latin typeface="Calibri"/>
+              </a:rPr>
+              <a:t>automático</a:t>
+            </a:r>
+            <a:r>
+              <a:rPr sz="1450" dirty="0">
+                <a:solidFill>
+                  <a:srgbClr val="444444"/>
+                </a:solidFill>
+                <a:latin typeface="Calibri"/>
+              </a:rPr>
+              <a:t>) + </a:t>
+            </a:r>
+            <a:r>
+              <a:rPr sz="1450" dirty="0" err="1">
+                <a:solidFill>
+                  <a:srgbClr val="444444"/>
+                </a:solidFill>
+                <a:latin typeface="Calibri"/>
+              </a:rPr>
+              <a:t>eventos</a:t>
+            </a:r>
+            <a:r>
+              <a:rPr sz="1450" dirty="0">
+                <a:solidFill>
+                  <a:srgbClr val="444444"/>
+                </a:solidFill>
+                <a:latin typeface="Calibri"/>
+              </a:rPr>
+              <a:t> </a:t>
+            </a:r>
+            <a:r>
+              <a:rPr sz="1450" dirty="0" err="1">
+                <a:solidFill>
+                  <a:srgbClr val="444444"/>
+                </a:solidFill>
+                <a:latin typeface="Calibri"/>
+              </a:rPr>
+              <a:t>simulados</a:t>
+            </a:r>
+            <a:r>
+              <a:rPr sz="1450" dirty="0">
+                <a:solidFill>
+                  <a:srgbClr val="444444"/>
+                </a:solidFill>
+                <a:latin typeface="Calibri"/>
+              </a:rPr>
+              <a:t> de </a:t>
+            </a:r>
+            <a:r>
+              <a:rPr sz="1450" dirty="0" err="1">
+                <a:solidFill>
+                  <a:srgbClr val="444444"/>
+                </a:solidFill>
+                <a:latin typeface="Calibri"/>
+              </a:rPr>
+              <a:t>atualização</a:t>
+            </a:r>
+            <a:r>
+              <a:rPr sz="1450" dirty="0">
+                <a:solidFill>
+                  <a:srgbClr val="444444"/>
+                </a:solidFill>
+                <a:latin typeface="Calibri"/>
+              </a:rPr>
+              <a:t> (streaming) — o </a:t>
+            </a:r>
+            <a:r>
+              <a:rPr sz="1450" dirty="0" err="1">
+                <a:solidFill>
+                  <a:srgbClr val="444444"/>
+                </a:solidFill>
+                <a:latin typeface="Calibri"/>
+              </a:rPr>
+              <a:t>mesmo</a:t>
+            </a:r>
+            <a:r>
+              <a:rPr sz="1450" dirty="0">
+                <a:solidFill>
+                  <a:srgbClr val="444444"/>
+                </a:solidFill>
+                <a:latin typeface="Calibri"/>
+              </a:rPr>
+              <a:t> </a:t>
+            </a:r>
+            <a:r>
+              <a:rPr sz="1450" dirty="0" err="1">
+                <a:solidFill>
+                  <a:srgbClr val="444444"/>
+                </a:solidFill>
+                <a:latin typeface="Calibri"/>
+              </a:rPr>
+              <a:t>padrão</a:t>
+            </a:r>
+            <a:r>
+              <a:rPr sz="1450" dirty="0">
+                <a:solidFill>
+                  <a:srgbClr val="444444"/>
+                </a:solidFill>
+                <a:latin typeface="Calibri"/>
+              </a:rPr>
+              <a:t> </a:t>
+            </a:r>
+            <a:r>
+              <a:rPr sz="1450" dirty="0" err="1">
+                <a:solidFill>
+                  <a:srgbClr val="444444"/>
+                </a:solidFill>
+                <a:latin typeface="Calibri"/>
+              </a:rPr>
+              <a:t>usado</a:t>
+            </a:r>
+            <a:r>
+              <a:rPr sz="1450" dirty="0">
+                <a:solidFill>
+                  <a:srgbClr val="444444"/>
+                </a:solidFill>
+                <a:latin typeface="Calibri"/>
+              </a:rPr>
+              <a:t> </a:t>
+            </a:r>
+            <a:r>
+              <a:rPr sz="1450" dirty="0" err="1">
+                <a:solidFill>
+                  <a:srgbClr val="444444"/>
+                </a:solidFill>
+                <a:latin typeface="Calibri"/>
+              </a:rPr>
+              <a:t>por</a:t>
+            </a:r>
+            <a:r>
+              <a:rPr sz="1450" dirty="0">
+                <a:solidFill>
+                  <a:srgbClr val="444444"/>
+                </a:solidFill>
+                <a:latin typeface="Calibri"/>
+              </a:rPr>
+              <a:t> </a:t>
+            </a:r>
+            <a:r>
+              <a:rPr sz="1450" dirty="0" err="1">
+                <a:solidFill>
+                  <a:srgbClr val="444444"/>
+                </a:solidFill>
+                <a:latin typeface="Calibri"/>
+              </a:rPr>
+              <a:t>bancos</a:t>
+            </a:r>
+            <a:r>
+              <a:rPr sz="1450" dirty="0">
+                <a:solidFill>
+                  <a:srgbClr val="444444"/>
+                </a:solidFill>
+                <a:latin typeface="Calibri"/>
+              </a:rPr>
+              <a:t> e fintechs para </a:t>
+            </a:r>
+            <a:r>
+              <a:rPr sz="1450" dirty="0" err="1">
+                <a:solidFill>
+                  <a:srgbClr val="444444"/>
+                </a:solidFill>
+                <a:latin typeface="Calibri"/>
+              </a:rPr>
+              <a:t>ingestão</a:t>
+            </a:r>
+            <a:r>
+              <a:rPr sz="1450" dirty="0">
+                <a:solidFill>
+                  <a:srgbClr val="444444"/>
+                </a:solidFill>
+                <a:latin typeface="Calibri"/>
+              </a:rPr>
+              <a:t> </a:t>
+            </a:r>
+            <a:r>
+              <a:rPr sz="1450" dirty="0" err="1">
+                <a:solidFill>
+                  <a:srgbClr val="444444"/>
+                </a:solidFill>
+                <a:latin typeface="Calibri"/>
+              </a:rPr>
+              <a:t>contínua</a:t>
+            </a:r>
+            <a:r>
+              <a:rPr sz="1450" dirty="0">
+                <a:solidFill>
+                  <a:srgbClr val="444444"/>
+                </a:solidFill>
+                <a:latin typeface="Calibri"/>
+              </a:rPr>
+              <a:t>.</a:t>
             </a:r>
           </a:p>
           <a:p>
@@ -5682,7 +7304,7 @@
               </a:spcAft>
             </a:pPr>
             <a:r>
-              <a:rPr sz="1450" b="1">
+              <a:rPr sz="1450" b="1" dirty="0">
                 <a:solidFill>
                   <a:srgbClr val="2E86C1"/>
                 </a:solidFill>
@@ -5691,13 +7313,265 @@
               <a:t>▶  </a:t>
             </a:r>
             <a:r>
-              <a:rPr sz="1450">
-                <a:solidFill>
-                  <a:srgbClr val="444444"/>
-                </a:solidFill>
-                <a:latin typeface="Calibri"/>
-              </a:rPr>
-              <a:t>9 fontes de dados integradas (resultado, metas, território, microdados de alunos, IDHM), unificadas em um único registro por município e ano.</a:t>
+              <a:rPr sz="1450" dirty="0">
+                <a:solidFill>
+                  <a:srgbClr val="444444"/>
+                </a:solidFill>
+                <a:latin typeface="Calibri"/>
+              </a:rPr>
+              <a:t>9 </a:t>
+            </a:r>
+            <a:r>
+              <a:rPr sz="1450" dirty="0" err="1">
+                <a:solidFill>
+                  <a:srgbClr val="444444"/>
+                </a:solidFill>
+                <a:latin typeface="Calibri"/>
+              </a:rPr>
+              <a:t>fontes</a:t>
+            </a:r>
+            <a:r>
+              <a:rPr sz="1450" dirty="0">
+                <a:solidFill>
+                  <a:srgbClr val="444444"/>
+                </a:solidFill>
+                <a:latin typeface="Calibri"/>
+              </a:rPr>
+              <a:t> de dados </a:t>
+            </a:r>
+            <a:r>
+              <a:rPr sz="1450" dirty="0" err="1">
+                <a:solidFill>
+                  <a:srgbClr val="444444"/>
+                </a:solidFill>
+                <a:latin typeface="Calibri"/>
+              </a:rPr>
+              <a:t>integradas</a:t>
+            </a:r>
+            <a:r>
+              <a:rPr sz="1450" dirty="0">
+                <a:solidFill>
+                  <a:srgbClr val="444444"/>
+                </a:solidFill>
+                <a:latin typeface="Calibri"/>
+              </a:rPr>
+              <a:t> (</a:t>
+            </a:r>
+            <a:r>
+              <a:rPr sz="1450" dirty="0" err="1">
+                <a:solidFill>
+                  <a:srgbClr val="444444"/>
+                </a:solidFill>
+                <a:latin typeface="Calibri"/>
+              </a:rPr>
+              <a:t>resultado</a:t>
+            </a:r>
+            <a:r>
+              <a:rPr sz="1450" dirty="0">
+                <a:solidFill>
+                  <a:srgbClr val="444444"/>
+                </a:solidFill>
+                <a:latin typeface="Calibri"/>
+              </a:rPr>
+              <a:t>, </a:t>
+            </a:r>
+            <a:r>
+              <a:rPr sz="1450" dirty="0" err="1">
+                <a:solidFill>
+                  <a:srgbClr val="444444"/>
+                </a:solidFill>
+                <a:latin typeface="Calibri"/>
+              </a:rPr>
+              <a:t>metas</a:t>
+            </a:r>
+            <a:r>
+              <a:rPr sz="1450" dirty="0">
+                <a:solidFill>
+                  <a:srgbClr val="444444"/>
+                </a:solidFill>
+                <a:latin typeface="Calibri"/>
+              </a:rPr>
+              <a:t>, </a:t>
+            </a:r>
+            <a:r>
+              <a:rPr sz="1450" dirty="0" err="1">
+                <a:solidFill>
+                  <a:srgbClr val="444444"/>
+                </a:solidFill>
+                <a:latin typeface="Calibri"/>
+              </a:rPr>
+              <a:t>território</a:t>
+            </a:r>
+            <a:r>
+              <a:rPr sz="1450" dirty="0">
+                <a:solidFill>
+                  <a:srgbClr val="444444"/>
+                </a:solidFill>
+                <a:latin typeface="Calibri"/>
+              </a:rPr>
+              <a:t>, </a:t>
+            </a:r>
+            <a:r>
+              <a:rPr sz="1450" dirty="0" err="1">
+                <a:solidFill>
+                  <a:srgbClr val="444444"/>
+                </a:solidFill>
+                <a:latin typeface="Calibri"/>
+              </a:rPr>
+              <a:t>microdados</a:t>
+            </a:r>
+            <a:r>
+              <a:rPr sz="1450" dirty="0">
+                <a:solidFill>
+                  <a:srgbClr val="444444"/>
+                </a:solidFill>
+                <a:latin typeface="Calibri"/>
+              </a:rPr>
+              <a:t> de </a:t>
+            </a:r>
+            <a:r>
+              <a:rPr sz="1450" dirty="0" err="1">
+                <a:solidFill>
+                  <a:srgbClr val="444444"/>
+                </a:solidFill>
+                <a:latin typeface="Calibri"/>
+              </a:rPr>
+              <a:t>alunos</a:t>
+            </a:r>
+            <a:r>
+              <a:rPr sz="1450" dirty="0">
+                <a:solidFill>
+                  <a:srgbClr val="444444"/>
+                </a:solidFill>
+                <a:latin typeface="Calibri"/>
+              </a:rPr>
+              <a:t>, IDHM), </a:t>
+            </a:r>
+            <a:r>
+              <a:rPr sz="1450" dirty="0" err="1">
+                <a:solidFill>
+                  <a:srgbClr val="444444"/>
+                </a:solidFill>
+                <a:latin typeface="Calibri"/>
+              </a:rPr>
+              <a:t>unificadas</a:t>
+            </a:r>
+            <a:r>
+              <a:rPr sz="1450" dirty="0">
+                <a:solidFill>
+                  <a:srgbClr val="444444"/>
+                </a:solidFill>
+                <a:latin typeface="Calibri"/>
+              </a:rPr>
+              <a:t> </a:t>
+            </a:r>
+            <a:r>
+              <a:rPr sz="1450" dirty="0" err="1">
+                <a:solidFill>
+                  <a:srgbClr val="444444"/>
+                </a:solidFill>
+                <a:latin typeface="Calibri"/>
+              </a:rPr>
+              <a:t>em</a:t>
+            </a:r>
+            <a:r>
+              <a:rPr sz="1450" dirty="0">
+                <a:solidFill>
+                  <a:srgbClr val="444444"/>
+                </a:solidFill>
+                <a:latin typeface="Calibri"/>
+              </a:rPr>
+              <a:t> um </a:t>
+            </a:r>
+            <a:r>
+              <a:rPr sz="1450" dirty="0" err="1">
+                <a:solidFill>
+                  <a:srgbClr val="444444"/>
+                </a:solidFill>
+                <a:latin typeface="Calibri"/>
+              </a:rPr>
+              <a:t>único</a:t>
+            </a:r>
+            <a:r>
+              <a:rPr sz="1450" dirty="0">
+                <a:solidFill>
+                  <a:srgbClr val="444444"/>
+                </a:solidFill>
+                <a:latin typeface="Calibri"/>
+              </a:rPr>
+              <a:t> </a:t>
+            </a:r>
+            <a:r>
+              <a:rPr sz="1450" dirty="0" err="1">
+                <a:solidFill>
+                  <a:srgbClr val="444444"/>
+                </a:solidFill>
+                <a:latin typeface="Calibri"/>
+              </a:rPr>
+              <a:t>registro</a:t>
+            </a:r>
+            <a:r>
+              <a:rPr sz="1450" dirty="0">
+                <a:solidFill>
+                  <a:srgbClr val="444444"/>
+                </a:solidFill>
+                <a:latin typeface="Calibri"/>
+              </a:rPr>
+              <a:t> </a:t>
+            </a:r>
+            <a:r>
+              <a:rPr sz="1450" dirty="0" err="1">
+                <a:solidFill>
+                  <a:srgbClr val="444444"/>
+                </a:solidFill>
+                <a:latin typeface="Calibri"/>
+              </a:rPr>
+              <a:t>por</a:t>
+            </a:r>
+            <a:r>
+              <a:rPr sz="1450" dirty="0">
+                <a:solidFill>
+                  <a:srgbClr val="444444"/>
+                </a:solidFill>
+                <a:latin typeface="Calibri"/>
+              </a:rPr>
+              <a:t> </a:t>
+            </a:r>
+            <a:r>
+              <a:rPr sz="1450" dirty="0" err="1">
+                <a:solidFill>
+                  <a:srgbClr val="444444"/>
+                </a:solidFill>
+                <a:latin typeface="Calibri"/>
+              </a:rPr>
+              <a:t>município</a:t>
+            </a:r>
+            <a:r>
+              <a:rPr sz="1450" dirty="0">
+                <a:solidFill>
+                  <a:srgbClr val="444444"/>
+                </a:solidFill>
+                <a:latin typeface="Calibri"/>
+              </a:rPr>
+              <a:t> e </a:t>
+            </a:r>
+            <a:r>
+              <a:rPr sz="1450" dirty="0" err="1">
+                <a:solidFill>
+                  <a:srgbClr val="444444"/>
+                </a:solidFill>
+                <a:latin typeface="Calibri"/>
+              </a:rPr>
+              <a:t>ano</a:t>
+            </a:r>
+            <a:r>
+              <a:rPr sz="1450" dirty="0">
+                <a:solidFill>
+                  <a:srgbClr val="444444"/>
+                </a:solidFill>
+                <a:latin typeface="Calibri"/>
+              </a:rPr>
+              <a:t>.</a:t>
             </a:r>
           </a:p>
           <a:p>
@@ -5707,7 +7581,7 @@
               </a:spcAft>
             </a:pPr>
             <a:r>
-              <a:rPr sz="1450" b="1">
+              <a:rPr sz="1450" b="1" dirty="0">
                 <a:solidFill>
                   <a:srgbClr val="2E86C1"/>
                 </a:solidFill>
@@ -5716,13 +7590,175 @@
               <a:t>▶  </a:t>
             </a:r>
             <a:r>
-              <a:rPr sz="1450">
-                <a:solidFill>
-                  <a:srgbClr val="444444"/>
-                </a:solidFill>
-                <a:latin typeface="Calibri"/>
-              </a:rPr>
-              <a:t>A camada Gold alimenta diretamente dashboards, análises estatísticas e o treinamento de modelos de machine learning — sem retrabalho.</a:t>
+              <a:rPr sz="1450" dirty="0">
+                <a:solidFill>
+                  <a:srgbClr val="444444"/>
+                </a:solidFill>
+                <a:latin typeface="Calibri"/>
+              </a:rPr>
+              <a:t>A </a:t>
+            </a:r>
+            <a:r>
+              <a:rPr sz="1450" dirty="0" err="1">
+                <a:solidFill>
+                  <a:srgbClr val="444444"/>
+                </a:solidFill>
+                <a:latin typeface="Calibri"/>
+              </a:rPr>
+              <a:t>camada</a:t>
+            </a:r>
+            <a:r>
+              <a:rPr sz="1450" dirty="0">
+                <a:solidFill>
+                  <a:srgbClr val="444444"/>
+                </a:solidFill>
+                <a:latin typeface="Calibri"/>
+              </a:rPr>
+              <a:t> Gold </a:t>
+            </a:r>
+            <a:r>
+              <a:rPr sz="1450" dirty="0" err="1">
+                <a:solidFill>
+                  <a:srgbClr val="444444"/>
+                </a:solidFill>
+                <a:latin typeface="Calibri"/>
+              </a:rPr>
+              <a:t>alimenta</a:t>
+            </a:r>
+            <a:r>
+              <a:rPr sz="1450" dirty="0">
+                <a:solidFill>
+                  <a:srgbClr val="444444"/>
+                </a:solidFill>
+                <a:latin typeface="Calibri"/>
+              </a:rPr>
+              <a:t> </a:t>
+            </a:r>
+            <a:r>
+              <a:rPr sz="1450" dirty="0" err="1">
+                <a:solidFill>
+                  <a:srgbClr val="444444"/>
+                </a:solidFill>
+                <a:latin typeface="Calibri"/>
+              </a:rPr>
+              <a:t>diretamente</a:t>
+            </a:r>
+            <a:r>
+              <a:rPr sz="1450" dirty="0">
+                <a:solidFill>
+                  <a:srgbClr val="444444"/>
+                </a:solidFill>
+                <a:latin typeface="Calibri"/>
+              </a:rPr>
+              <a:t> dashboards, </a:t>
+            </a:r>
+            <a:r>
+              <a:rPr sz="1450" dirty="0" err="1">
+                <a:solidFill>
+                  <a:srgbClr val="444444"/>
+                </a:solidFill>
+                <a:latin typeface="Calibri"/>
+              </a:rPr>
+              <a:t>análises</a:t>
+            </a:r>
+            <a:r>
+              <a:rPr sz="1450" dirty="0">
+                <a:solidFill>
+                  <a:srgbClr val="444444"/>
+                </a:solidFill>
+                <a:latin typeface="Calibri"/>
+              </a:rPr>
+              <a:t> </a:t>
+            </a:r>
+            <a:r>
+              <a:rPr sz="1450" dirty="0" err="1">
+                <a:solidFill>
+                  <a:srgbClr val="444444"/>
+                </a:solidFill>
+                <a:latin typeface="Calibri"/>
+              </a:rPr>
+              <a:t>estatísticas</a:t>
+            </a:r>
+            <a:r>
+              <a:rPr sz="1450" dirty="0">
+                <a:solidFill>
+                  <a:srgbClr val="444444"/>
+                </a:solidFill>
+                <a:latin typeface="Calibri"/>
+              </a:rPr>
+              <a:t> e o </a:t>
+            </a:r>
+            <a:r>
+              <a:rPr sz="1450" dirty="0" err="1">
+                <a:solidFill>
+                  <a:srgbClr val="444444"/>
+                </a:solidFill>
+                <a:latin typeface="Calibri"/>
+              </a:rPr>
+              <a:t>treinamento</a:t>
+            </a:r>
+            <a:r>
+              <a:rPr sz="1450" dirty="0">
+                <a:solidFill>
+                  <a:srgbClr val="444444"/>
+                </a:solidFill>
+                <a:latin typeface="Calibri"/>
+              </a:rPr>
+              <a:t> de </a:t>
+            </a:r>
+            <a:r>
+              <a:rPr sz="1450" dirty="0" err="1">
+                <a:solidFill>
+                  <a:srgbClr val="444444"/>
+                </a:solidFill>
+                <a:latin typeface="Calibri"/>
+              </a:rPr>
+              <a:t>modelos</a:t>
+            </a:r>
+            <a:r>
+              <a:rPr sz="1450" dirty="0">
+                <a:solidFill>
+                  <a:srgbClr val="444444"/>
+                </a:solidFill>
+                <a:latin typeface="Calibri"/>
+              </a:rPr>
+              <a:t> de machine learning — </a:t>
+            </a:r>
+            <a:r>
+              <a:rPr sz="1450" dirty="0" err="1">
+                <a:solidFill>
+                  <a:srgbClr val="444444"/>
+                </a:solidFill>
+                <a:latin typeface="Calibri"/>
+              </a:rPr>
+              <a:t>sem</a:t>
+            </a:r>
+            <a:r>
+              <a:rPr sz="1450" dirty="0">
+                <a:solidFill>
+                  <a:srgbClr val="444444"/>
+                </a:solidFill>
+                <a:latin typeface="Calibri"/>
+              </a:rPr>
+              <a:t> </a:t>
+            </a:r>
+            <a:r>
+              <a:rPr sz="1450" dirty="0" err="1">
+                <a:solidFill>
+                  <a:srgbClr val="444444"/>
+                </a:solidFill>
+                <a:latin typeface="Calibri"/>
+              </a:rPr>
+              <a:t>retrabalho</a:t>
+            </a:r>
+            <a:r>
+              <a:rPr sz="1450" dirty="0">
+                <a:solidFill>
+                  <a:srgbClr val="444444"/>
+                </a:solidFill>
+                <a:latin typeface="Calibri"/>
+              </a:rPr>
+              <a:t>.</a:t>
             </a:r>
           </a:p>
         </p:txBody>
@@ -5736,7 +7772,7 @@
 </file>
 
 <file path=ppt/slides/slide5.xml><?xml version="1.0" encoding="utf-8"?>
-<p:sld xmlns:a="http://schemas.openxmlformats.org/drawingml/2006/main" xmlns:p="http://schemas.openxmlformats.org/presentationml/2006/main" xmlns:r="http://schemas.openxmlformats.org/officeDocument/2006/relationships">
+<p:sld xmlns:a="http://schemas.openxmlformats.org/drawingml/2006/main" xmlns:r="http://schemas.openxmlformats.org/officeDocument/2006/relationships" xmlns:p="http://schemas.openxmlformats.org/presentationml/2006/main">
   <p:cSld>
     <p:spTree>
       <p:nvGrpSpPr>
@@ -5744,7 +7780,14 @@
         <p:cNvGrpSpPr/>
         <p:nvPr/>
       </p:nvGrpSpPr>
-      <p:grpSpPr/>
+      <p:grpSpPr>
+        <a:xfrm>
+          <a:off x="0" y="0"/>
+          <a:ext cx="0" cy="0"/>
+          <a:chOff x="0" y="0"/>
+          <a:chExt cx="0" cy="0"/>
+        </a:xfrm>
+      </p:grpSpPr>
       <p:sp>
         <p:nvSpPr>
           <p:cNvPr id="2" name="Rectangle 1"/>
@@ -5786,6 +7829,7 @@
           <a:lstStyle/>
           <a:p>
             <a:pPr algn="ctr"/>
+            <a:endParaRPr/>
           </a:p>
         </p:txBody>
       </p:sp>
@@ -5830,6 +7874,7 @@
           <a:lstStyle/>
           <a:p>
             <a:pPr algn="ctr"/>
+            <a:endParaRPr/>
           </a:p>
         </p:txBody>
       </p:sp>
@@ -5944,6 +7989,7 @@
           <a:lstStyle/>
           <a:p>
             <a:pPr algn="ctr"/>
+            <a:endParaRPr/>
           </a:p>
         </p:txBody>
       </p:sp>
@@ -6027,6 +8073,7 @@
           <a:lstStyle/>
           <a:p>
             <a:pPr algn="ctr"/>
+            <a:endParaRPr/>
           </a:p>
         </p:txBody>
       </p:sp>
@@ -6054,7 +8101,7 @@
           <a:p>
             <a:pPr algn="ctr"/>
             <a:r>
-              <a:rPr sz="3200" b="1" i="0">
+              <a:rPr sz="3200" b="1" i="0" dirty="0">
                 <a:solidFill>
                   <a:srgbClr val="1A253A"/>
                 </a:solidFill>
@@ -6145,6 +8192,7 @@
           <a:lstStyle/>
           <a:p>
             <a:pPr algn="ctr"/>
+            <a:endParaRPr/>
           </a:p>
         </p:txBody>
       </p:sp>
@@ -6263,6 +8311,7 @@
           <a:lstStyle/>
           <a:p>
             <a:pPr algn="ctr"/>
+            <a:endParaRPr/>
           </a:p>
         </p:txBody>
       </p:sp>
@@ -6325,14 +8374,38 @@
           <a:p>
             <a:pPr algn="ctr"/>
             <a:r>
-              <a:rPr sz="1250" b="0" i="0">
-                <a:solidFill>
-                  <a:srgbClr val="444444"/>
-                </a:solidFill>
-                <a:latin typeface="Calibri"/>
-              </a:rPr>
-              <a:t>Alertas de qualidade</a:t>
-            </a:r>
+              <a:rPr sz="1250" b="0" i="0" dirty="0" err="1">
+                <a:solidFill>
+                  <a:srgbClr val="444444"/>
+                </a:solidFill>
+                <a:latin typeface="Calibri"/>
+              </a:rPr>
+              <a:t>Alertas</a:t>
+            </a:r>
+            <a:r>
+              <a:rPr sz="1250" b="0" i="0" dirty="0">
+                <a:solidFill>
+                  <a:srgbClr val="444444"/>
+                </a:solidFill>
+                <a:latin typeface="Calibri"/>
+              </a:rPr>
+              <a:t> de </a:t>
+            </a:r>
+            <a:r>
+              <a:rPr sz="1250" b="0" i="0" dirty="0" err="1">
+                <a:solidFill>
+                  <a:srgbClr val="444444"/>
+                </a:solidFill>
+                <a:latin typeface="Calibri"/>
+              </a:rPr>
+              <a:t>qualidade</a:t>
+            </a:r>
+            <a:endParaRPr sz="1250" b="0" i="0" dirty="0">
+              <a:solidFill>
+                <a:srgbClr val="444444"/>
+              </a:solidFill>
+              <a:latin typeface="Calibri"/>
+            </a:endParaRPr>
           </a:p>
         </p:txBody>
       </p:sp>
@@ -6381,6 +8454,7 @@
           <a:lstStyle/>
           <a:p>
             <a:pPr algn="ctr"/>
+            <a:endParaRPr/>
           </a:p>
         </p:txBody>
       </p:sp>
@@ -6425,6 +8499,7 @@
           <a:lstStyle/>
           <a:p>
             <a:pPr algn="ctr"/>
+            <a:endParaRPr/>
           </a:p>
         </p:txBody>
       </p:sp>
@@ -6472,7 +8547,7 @@
         <p:spPr>
           <a:xfrm>
             <a:off x="621792" y="3538728"/>
-            <a:ext cx="3227832" cy="2514600"/>
+            <a:ext cx="3227832" cy="646331"/>
           </a:xfrm>
           <a:prstGeom prst="rect">
             <a:avLst/>
@@ -6487,13 +8562,175 @@
           <a:p>
             <a:pPr algn="l"/>
             <a:r>
-              <a:rPr sz="1200" b="0" i="0">
-                <a:solidFill>
-                  <a:srgbClr val="444444"/>
-                </a:solidFill>
-                <a:latin typeface="Calibri"/>
-              </a:rPr>
-              <a:t>5 colunas (rede, serie, presenca, preenchimento_caderno, alfabetizado) tiveram o significado inferido — não confirmado pela fonte, que exige BigQuery pago. Validado empiricamente: alfabetizado bate 100% com o corte de 743 pontos.</a:t>
+              <a:rPr sz="1200" b="0" i="0" dirty="0">
+                <a:solidFill>
+                  <a:srgbClr val="444444"/>
+                </a:solidFill>
+                <a:latin typeface="Calibri"/>
+              </a:rPr>
+              <a:t>5 </a:t>
+            </a:r>
+            <a:r>
+              <a:rPr sz="1200" b="0" i="0" dirty="0" err="1">
+                <a:solidFill>
+                  <a:srgbClr val="444444"/>
+                </a:solidFill>
+                <a:latin typeface="Calibri"/>
+              </a:rPr>
+              <a:t>colunas</a:t>
+            </a:r>
+            <a:r>
+              <a:rPr sz="1200" b="0" i="0" dirty="0">
+                <a:solidFill>
+                  <a:srgbClr val="444444"/>
+                </a:solidFill>
+                <a:latin typeface="Calibri"/>
+              </a:rPr>
+              <a:t> (rede, </a:t>
+            </a:r>
+            <a:r>
+              <a:rPr sz="1200" b="0" i="0" dirty="0" err="1">
+                <a:solidFill>
+                  <a:srgbClr val="444444"/>
+                </a:solidFill>
+                <a:latin typeface="Calibri"/>
+              </a:rPr>
+              <a:t>serie</a:t>
+            </a:r>
+            <a:r>
+              <a:rPr sz="1200" b="0" i="0" dirty="0">
+                <a:solidFill>
+                  <a:srgbClr val="444444"/>
+                </a:solidFill>
+                <a:latin typeface="Calibri"/>
+              </a:rPr>
+              <a:t>, </a:t>
+            </a:r>
+            <a:r>
+              <a:rPr sz="1200" b="0" i="0" dirty="0" err="1">
+                <a:solidFill>
+                  <a:srgbClr val="444444"/>
+                </a:solidFill>
+                <a:latin typeface="Calibri"/>
+              </a:rPr>
+              <a:t>presenca</a:t>
+            </a:r>
+            <a:r>
+              <a:rPr sz="1200" b="0" i="0" dirty="0">
+                <a:solidFill>
+                  <a:srgbClr val="444444"/>
+                </a:solidFill>
+                <a:latin typeface="Calibri"/>
+              </a:rPr>
+              <a:t>, </a:t>
+            </a:r>
+            <a:r>
+              <a:rPr sz="1200" b="0" i="0" dirty="0" err="1">
+                <a:solidFill>
+                  <a:srgbClr val="444444"/>
+                </a:solidFill>
+                <a:latin typeface="Calibri"/>
+              </a:rPr>
+              <a:t>preenchimento_caderno</a:t>
+            </a:r>
+            <a:r>
+              <a:rPr sz="1200" b="0" i="0" dirty="0">
+                <a:solidFill>
+                  <a:srgbClr val="444444"/>
+                </a:solidFill>
+                <a:latin typeface="Calibri"/>
+              </a:rPr>
+              <a:t>, </a:t>
+            </a:r>
+            <a:r>
+              <a:rPr sz="1200" b="0" i="0" dirty="0" err="1">
+                <a:solidFill>
+                  <a:srgbClr val="444444"/>
+                </a:solidFill>
+                <a:latin typeface="Calibri"/>
+              </a:rPr>
+              <a:t>alfabetizado</a:t>
+            </a:r>
+            <a:r>
+              <a:rPr sz="1200" b="0" i="0" dirty="0">
+                <a:solidFill>
+                  <a:srgbClr val="444444"/>
+                </a:solidFill>
+                <a:latin typeface="Calibri"/>
+              </a:rPr>
+              <a:t>) </a:t>
+            </a:r>
+            <a:r>
+              <a:rPr sz="1200" b="0" i="0" dirty="0" err="1">
+                <a:solidFill>
+                  <a:srgbClr val="444444"/>
+                </a:solidFill>
+                <a:latin typeface="Calibri"/>
+              </a:rPr>
+              <a:t>tiveram</a:t>
+            </a:r>
+            <a:r>
+              <a:rPr sz="1200" b="0" i="0" dirty="0">
+                <a:solidFill>
+                  <a:srgbClr val="444444"/>
+                </a:solidFill>
+                <a:latin typeface="Calibri"/>
+              </a:rPr>
+              <a:t> o </a:t>
+            </a:r>
+            <a:r>
+              <a:rPr sz="1200" b="0" i="0" dirty="0" err="1">
+                <a:solidFill>
+                  <a:srgbClr val="444444"/>
+                </a:solidFill>
+                <a:latin typeface="Calibri"/>
+              </a:rPr>
+              <a:t>significado</a:t>
+            </a:r>
+            <a:r>
+              <a:rPr sz="1200" b="0" i="0" dirty="0">
+                <a:solidFill>
+                  <a:srgbClr val="444444"/>
+                </a:solidFill>
+                <a:latin typeface="Calibri"/>
+              </a:rPr>
+              <a:t> </a:t>
+            </a:r>
+            <a:r>
+              <a:rPr sz="1200" b="0" i="0" dirty="0" err="1">
+                <a:solidFill>
+                  <a:srgbClr val="444444"/>
+                </a:solidFill>
+                <a:latin typeface="Calibri"/>
+              </a:rPr>
+              <a:t>inferido</a:t>
+            </a:r>
+            <a:r>
+              <a:rPr sz="1200" b="0" i="0" dirty="0">
+                <a:solidFill>
+                  <a:srgbClr val="444444"/>
+                </a:solidFill>
+                <a:latin typeface="Calibri"/>
+              </a:rPr>
+              <a:t> —</a:t>
+            </a:r>
+            <a:r>
+              <a:rPr lang="pt-BR" sz="1200" b="0" i="0" dirty="0">
+                <a:solidFill>
+                  <a:srgbClr val="444444"/>
+                </a:solidFill>
+                <a:latin typeface="Calibri"/>
+              </a:rPr>
+              <a:t> Sem acesso</a:t>
+            </a:r>
+            <a:r>
+              <a:rPr sz="1200" b="0" i="0" dirty="0">
+                <a:solidFill>
+                  <a:srgbClr val="444444"/>
+                </a:solidFill>
+                <a:latin typeface="Calibri"/>
+              </a:rPr>
+              <a:t>. </a:t>
             </a:r>
           </a:p>
         </p:txBody>
@@ -6543,6 +8780,7 @@
           <a:lstStyle/>
           <a:p>
             <a:pPr algn="ctr"/>
+            <a:endParaRPr/>
           </a:p>
         </p:txBody>
       </p:sp>
@@ -6587,6 +8825,7 @@
           <a:lstStyle/>
           <a:p>
             <a:pPr algn="ctr"/>
+            <a:endParaRPr/>
           </a:p>
         </p:txBody>
       </p:sp>
@@ -6705,6 +8944,7 @@
           <a:lstStyle/>
           <a:p>
             <a:pPr algn="ctr"/>
+            <a:endParaRPr/>
           </a:p>
         </p:txBody>
       </p:sp>
@@ -6749,6 +8989,7 @@
           <a:lstStyle/>
           <a:p>
             <a:pPr algn="ctr"/>
+            <a:endParaRPr/>
           </a:p>
         </p:txBody>
       </p:sp>
@@ -6796,7 +9037,7 @@
         <p:spPr>
           <a:xfrm>
             <a:off x="8357615" y="3538728"/>
-            <a:ext cx="3227832" cy="2514600"/>
+            <a:ext cx="3227832" cy="830997"/>
           </a:xfrm>
           <a:prstGeom prst="rect">
             <a:avLst/>
@@ -6811,13 +9052,220 @@
           <a:p>
             <a:pPr algn="l"/>
             <a:r>
-              <a:rPr sz="1200" b="0" i="0">
-                <a:solidFill>
-                  <a:srgbClr val="444444"/>
-                </a:solidFill>
-                <a:latin typeface="Calibri"/>
-              </a:rPr>
-              <a:t>Eventos sintéticos demonstram o padrão de ingestão incremental. A fonte real não emite atualizações contínuas — por isso streaming de verdade seria over-engineering aqui.</a:t>
+              <a:rPr sz="1200" b="0" i="0" dirty="0" err="1">
+                <a:solidFill>
+                  <a:srgbClr val="444444"/>
+                </a:solidFill>
+                <a:latin typeface="Calibri"/>
+              </a:rPr>
+              <a:t>Eventos</a:t>
+            </a:r>
+            <a:r>
+              <a:rPr sz="1200" b="0" i="0" dirty="0">
+                <a:solidFill>
+                  <a:srgbClr val="444444"/>
+                </a:solidFill>
+                <a:latin typeface="Calibri"/>
+              </a:rPr>
+              <a:t> </a:t>
+            </a:r>
+            <a:r>
+              <a:rPr sz="1200" b="0" i="0" dirty="0" err="1">
+                <a:solidFill>
+                  <a:srgbClr val="444444"/>
+                </a:solidFill>
+                <a:latin typeface="Calibri"/>
+              </a:rPr>
+              <a:t>sintéticos</a:t>
+            </a:r>
+            <a:r>
+              <a:rPr sz="1200" b="0" i="0" dirty="0">
+                <a:solidFill>
+                  <a:srgbClr val="444444"/>
+                </a:solidFill>
+                <a:latin typeface="Calibri"/>
+              </a:rPr>
+              <a:t> </a:t>
+            </a:r>
+            <a:r>
+              <a:rPr sz="1200" b="0" i="0" dirty="0" err="1">
+                <a:solidFill>
+                  <a:srgbClr val="444444"/>
+                </a:solidFill>
+                <a:latin typeface="Calibri"/>
+              </a:rPr>
+              <a:t>demonstram</a:t>
+            </a:r>
+            <a:r>
+              <a:rPr sz="1200" b="0" i="0" dirty="0">
+                <a:solidFill>
+                  <a:srgbClr val="444444"/>
+                </a:solidFill>
+                <a:latin typeface="Calibri"/>
+              </a:rPr>
+              <a:t> o </a:t>
+            </a:r>
+            <a:r>
+              <a:rPr sz="1200" b="0" i="0" dirty="0" err="1">
+                <a:solidFill>
+                  <a:srgbClr val="444444"/>
+                </a:solidFill>
+                <a:latin typeface="Calibri"/>
+              </a:rPr>
+              <a:t>padrão</a:t>
+            </a:r>
+            <a:r>
+              <a:rPr sz="1200" b="0" i="0" dirty="0">
+                <a:solidFill>
+                  <a:srgbClr val="444444"/>
+                </a:solidFill>
+                <a:latin typeface="Calibri"/>
+              </a:rPr>
+              <a:t> de </a:t>
+            </a:r>
+            <a:r>
+              <a:rPr sz="1200" b="0" i="0" dirty="0" err="1">
+                <a:solidFill>
+                  <a:srgbClr val="444444"/>
+                </a:solidFill>
+                <a:latin typeface="Calibri"/>
+              </a:rPr>
+              <a:t>ingestão</a:t>
+            </a:r>
+            <a:r>
+              <a:rPr sz="1200" b="0" i="0" dirty="0">
+                <a:solidFill>
+                  <a:srgbClr val="444444"/>
+                </a:solidFill>
+                <a:latin typeface="Calibri"/>
+              </a:rPr>
+              <a:t> incremental. A </a:t>
+            </a:r>
+            <a:r>
+              <a:rPr sz="1200" b="0" i="0" dirty="0" err="1">
+                <a:solidFill>
+                  <a:srgbClr val="444444"/>
+                </a:solidFill>
+                <a:latin typeface="Calibri"/>
+              </a:rPr>
+              <a:t>fonte</a:t>
+            </a:r>
+            <a:r>
+              <a:rPr sz="1200" b="0" i="0" dirty="0">
+                <a:solidFill>
+                  <a:srgbClr val="444444"/>
+                </a:solidFill>
+                <a:latin typeface="Calibri"/>
+              </a:rPr>
+              <a:t> real não </a:t>
+            </a:r>
+            <a:r>
+              <a:rPr sz="1200" b="0" i="0" dirty="0" err="1">
+                <a:solidFill>
+                  <a:srgbClr val="444444"/>
+                </a:solidFill>
+                <a:latin typeface="Calibri"/>
+              </a:rPr>
+              <a:t>emite</a:t>
+            </a:r>
+            <a:r>
+              <a:rPr sz="1200" b="0" i="0" dirty="0">
+                <a:solidFill>
+                  <a:srgbClr val="444444"/>
+                </a:solidFill>
+                <a:latin typeface="Calibri"/>
+              </a:rPr>
+              <a:t> </a:t>
+            </a:r>
+            <a:r>
+              <a:rPr sz="1200" b="0" i="0" dirty="0" err="1">
+                <a:solidFill>
+                  <a:srgbClr val="444444"/>
+                </a:solidFill>
+                <a:latin typeface="Calibri"/>
+              </a:rPr>
+              <a:t>atualizações</a:t>
+            </a:r>
+            <a:r>
+              <a:rPr sz="1200" b="0" i="0" dirty="0">
+                <a:solidFill>
+                  <a:srgbClr val="444444"/>
+                </a:solidFill>
+                <a:latin typeface="Calibri"/>
+              </a:rPr>
+              <a:t> </a:t>
+            </a:r>
+            <a:r>
+              <a:rPr sz="1200" b="0" i="0" dirty="0" err="1">
+                <a:solidFill>
+                  <a:srgbClr val="444444"/>
+                </a:solidFill>
+                <a:latin typeface="Calibri"/>
+              </a:rPr>
+              <a:t>contínuas</a:t>
+            </a:r>
+            <a:r>
+              <a:rPr sz="1200" b="0" i="0" dirty="0">
+                <a:solidFill>
+                  <a:srgbClr val="444444"/>
+                </a:solidFill>
+                <a:latin typeface="Calibri"/>
+              </a:rPr>
+              <a:t> — </a:t>
+            </a:r>
+            <a:r>
+              <a:rPr sz="1200" b="0" i="0" dirty="0" err="1">
+                <a:solidFill>
+                  <a:srgbClr val="444444"/>
+                </a:solidFill>
+                <a:latin typeface="Calibri"/>
+              </a:rPr>
+              <a:t>por</a:t>
+            </a:r>
+            <a:r>
+              <a:rPr sz="1200" b="0" i="0" dirty="0">
+                <a:solidFill>
+                  <a:srgbClr val="444444"/>
+                </a:solidFill>
+                <a:latin typeface="Calibri"/>
+              </a:rPr>
+              <a:t> </a:t>
+            </a:r>
+            <a:r>
+              <a:rPr sz="1200" b="0" i="0" dirty="0" err="1">
+                <a:solidFill>
+                  <a:srgbClr val="444444"/>
+                </a:solidFill>
+                <a:latin typeface="Calibri"/>
+              </a:rPr>
+              <a:t>isso</a:t>
+            </a:r>
+            <a:r>
+              <a:rPr sz="1200" b="0" i="0" dirty="0">
+                <a:solidFill>
+                  <a:srgbClr val="444444"/>
+                </a:solidFill>
+                <a:latin typeface="Calibri"/>
+              </a:rPr>
+              <a:t> streaming </a:t>
+            </a:r>
+            <a:r>
+              <a:rPr lang="pt-BR" sz="1200" b="0" i="0" dirty="0">
+                <a:solidFill>
+                  <a:srgbClr val="444444"/>
+                </a:solidFill>
+                <a:latin typeface="Calibri"/>
+              </a:rPr>
+              <a:t>não faz sentido aqui</a:t>
+            </a:r>
+            <a:r>
+              <a:rPr sz="1200" b="0" i="0" dirty="0">
+                <a:solidFill>
+                  <a:srgbClr val="444444"/>
+                </a:solidFill>
+                <a:latin typeface="Calibri"/>
+              </a:rPr>
+              <a:t>.</a:t>
             </a:r>
           </a:p>
         </p:txBody>
@@ -6831,7 +9279,7 @@
 </file>
 
 <file path=ppt/slides/slide6.xml><?xml version="1.0" encoding="utf-8"?>
-<p:sld xmlns:a="http://schemas.openxmlformats.org/drawingml/2006/main" xmlns:p="http://schemas.openxmlformats.org/presentationml/2006/main" xmlns:r="http://schemas.openxmlformats.org/officeDocument/2006/relationships">
+<p:sld xmlns:a="http://schemas.openxmlformats.org/drawingml/2006/main" xmlns:r="http://schemas.openxmlformats.org/officeDocument/2006/relationships" xmlns:p="http://schemas.openxmlformats.org/presentationml/2006/main">
   <p:cSld>
     <p:spTree>
       <p:nvGrpSpPr>
@@ -6839,7 +9287,14 @@
         <p:cNvGrpSpPr/>
         <p:nvPr/>
       </p:nvGrpSpPr>
-      <p:grpSpPr/>
+      <p:grpSpPr>
+        <a:xfrm>
+          <a:off x="0" y="0"/>
+          <a:ext cx="0" cy="0"/>
+          <a:chOff x="0" y="0"/>
+          <a:chExt cx="0" cy="0"/>
+        </a:xfrm>
+      </p:grpSpPr>
       <p:sp>
         <p:nvSpPr>
           <p:cNvPr id="2" name="Rectangle 1"/>
@@ -6881,6 +9336,7 @@
           <a:lstStyle/>
           <a:p>
             <a:pPr algn="ctr"/>
+            <a:endParaRPr/>
           </a:p>
         </p:txBody>
       </p:sp>
@@ -6925,6 +9381,7 @@
           <a:lstStyle/>
           <a:p>
             <a:pPr algn="ctr"/>
+            <a:endParaRPr/>
           </a:p>
         </p:txBody>
       </p:sp>
@@ -7004,6 +9461,7 @@
           <a:lstStyle/>
           <a:p>
             <a:pPr algn="ctr"/>
+            <a:endParaRPr/>
           </a:p>
         </p:txBody>
       </p:sp>
@@ -7051,7 +9509,7 @@
         <p:spPr>
           <a:xfrm>
             <a:off x="457200" y="1508760"/>
-            <a:ext cx="11247120" cy="4206240"/>
+            <a:ext cx="11247120" cy="2492990"/>
           </a:xfrm>
           <a:prstGeom prst="rect">
             <a:avLst/>
@@ -7070,7 +9528,7 @@
               </a:spcAft>
             </a:pPr>
             <a:r>
-              <a:rPr sz="1600" b="1">
+              <a:rPr sz="1600" b="1" dirty="0">
                 <a:solidFill>
                   <a:srgbClr val="2E86C1"/>
                 </a:solidFill>
@@ -7079,13 +9537,130 @@
               <a:t>▶  </a:t>
             </a:r>
             <a:r>
-              <a:rPr sz="1600">
-                <a:solidFill>
-                  <a:srgbClr val="444444"/>
-                </a:solidFill>
-                <a:latin typeface="Calibri"/>
-              </a:rPr>
-              <a:t>Ranking pronto por UF e município: hoje, CE lidera com 85,3%; BA é a UF com menor indicador (36,0%).</a:t>
+              <a:rPr sz="1600" dirty="0">
+                <a:solidFill>
+                  <a:srgbClr val="444444"/>
+                </a:solidFill>
+                <a:latin typeface="Calibri"/>
+              </a:rPr>
+              <a:t>Ranking </a:t>
+            </a:r>
+            <a:r>
+              <a:rPr lang="pt-BR" sz="1600" dirty="0">
+                <a:solidFill>
+                  <a:srgbClr val="444444"/>
+                </a:solidFill>
+                <a:latin typeface="Calibri"/>
+              </a:rPr>
+              <a:t>para </a:t>
+            </a:r>
+            <a:r>
+              <a:rPr sz="1600" dirty="0">
+                <a:solidFill>
+                  <a:srgbClr val="444444"/>
+                </a:solidFill>
+                <a:latin typeface="Calibri"/>
+              </a:rPr>
+              <a:t>UF</a:t>
+            </a:r>
+            <a:r>
+              <a:rPr lang="pt-BR" sz="1600" dirty="0">
+                <a:solidFill>
+                  <a:srgbClr val="444444"/>
+                </a:solidFill>
+                <a:latin typeface="Calibri"/>
+              </a:rPr>
+              <a:t> e</a:t>
+            </a:r>
+            <a:r>
+              <a:rPr sz="1600" dirty="0">
+                <a:solidFill>
+                  <a:srgbClr val="444444"/>
+                </a:solidFill>
+                <a:latin typeface="Calibri"/>
+              </a:rPr>
+              <a:t> </a:t>
+            </a:r>
+            <a:r>
+              <a:rPr lang="pt-BR" sz="1600" dirty="0">
+                <a:solidFill>
+                  <a:srgbClr val="444444"/>
+                </a:solidFill>
+                <a:latin typeface="Calibri"/>
+              </a:rPr>
+              <a:t>M</a:t>
+            </a:r>
+            <a:r>
+              <a:rPr sz="1600" dirty="0" err="1">
+                <a:solidFill>
+                  <a:srgbClr val="444444"/>
+                </a:solidFill>
+                <a:latin typeface="Calibri"/>
+              </a:rPr>
+              <a:t>unicípio</a:t>
+            </a:r>
+            <a:r>
+              <a:rPr sz="1600" dirty="0">
+                <a:solidFill>
+                  <a:srgbClr val="444444"/>
+                </a:solidFill>
+                <a:latin typeface="Calibri"/>
+              </a:rPr>
+              <a:t>: CE </a:t>
+            </a:r>
+            <a:r>
+              <a:rPr sz="1600" dirty="0" err="1">
+                <a:solidFill>
+                  <a:srgbClr val="444444"/>
+                </a:solidFill>
+                <a:latin typeface="Calibri"/>
+              </a:rPr>
+              <a:t>lidera</a:t>
+            </a:r>
+            <a:r>
+              <a:rPr sz="1600" dirty="0">
+                <a:solidFill>
+                  <a:srgbClr val="444444"/>
+                </a:solidFill>
+                <a:latin typeface="Calibri"/>
+              </a:rPr>
+              <a:t> com 85,3%; BA é a UF com </a:t>
+            </a:r>
+            <a:r>
+              <a:rPr sz="1600" dirty="0" err="1">
+                <a:solidFill>
+                  <a:srgbClr val="444444"/>
+                </a:solidFill>
+                <a:latin typeface="Calibri"/>
+              </a:rPr>
+              <a:t>menor</a:t>
+            </a:r>
+            <a:r>
+              <a:rPr sz="1600" dirty="0">
+                <a:solidFill>
+                  <a:srgbClr val="444444"/>
+                </a:solidFill>
+                <a:latin typeface="Calibri"/>
+              </a:rPr>
+              <a:t> </a:t>
+            </a:r>
+            <a:r>
+              <a:rPr sz="1600" dirty="0" err="1">
+                <a:solidFill>
+                  <a:srgbClr val="444444"/>
+                </a:solidFill>
+                <a:latin typeface="Calibri"/>
+              </a:rPr>
+              <a:t>indicador</a:t>
+            </a:r>
+            <a:r>
+              <a:rPr sz="1600" dirty="0">
+                <a:solidFill>
+                  <a:srgbClr val="444444"/>
+                </a:solidFill>
+                <a:latin typeface="Calibri"/>
+              </a:rPr>
+              <a:t> (36,0%).</a:t>
             </a:r>
           </a:p>
           <a:p>
@@ -7095,7 +9670,7 @@
               </a:spcAft>
             </a:pPr>
             <a:r>
-              <a:rPr sz="1600" b="1">
+              <a:rPr sz="1600" b="1" dirty="0">
                 <a:solidFill>
                   <a:srgbClr val="2E86C1"/>
                 </a:solidFill>
@@ -7104,13 +9679,121 @@
               <a:t>▶  </a:t>
             </a:r>
             <a:r>
-              <a:rPr sz="1600">
-                <a:solidFill>
-                  <a:srgbClr val="444444"/>
-                </a:solidFill>
-                <a:latin typeface="Calibri"/>
-              </a:rPr>
-              <a:t>53,3% dos municípios avaliados atingiram sua própria meta municipal (2.788 de 5.232 com meta definida).</a:t>
+              <a:rPr sz="1600" dirty="0">
+                <a:solidFill>
+                  <a:srgbClr val="444444"/>
+                </a:solidFill>
+                <a:latin typeface="Calibri"/>
+              </a:rPr>
+              <a:t>53,3% dos </a:t>
+            </a:r>
+            <a:r>
+              <a:rPr sz="1600" dirty="0" err="1">
+                <a:solidFill>
+                  <a:srgbClr val="444444"/>
+                </a:solidFill>
+                <a:latin typeface="Calibri"/>
+              </a:rPr>
+              <a:t>municípios</a:t>
+            </a:r>
+            <a:r>
+              <a:rPr sz="1600" dirty="0">
+                <a:solidFill>
+                  <a:srgbClr val="444444"/>
+                </a:solidFill>
+                <a:latin typeface="Calibri"/>
+              </a:rPr>
+              <a:t> </a:t>
+            </a:r>
+            <a:r>
+              <a:rPr sz="1600" dirty="0" err="1">
+                <a:solidFill>
+                  <a:srgbClr val="444444"/>
+                </a:solidFill>
+                <a:latin typeface="Calibri"/>
+              </a:rPr>
+              <a:t>avaliados</a:t>
+            </a:r>
+            <a:r>
+              <a:rPr sz="1600" dirty="0">
+                <a:solidFill>
+                  <a:srgbClr val="444444"/>
+                </a:solidFill>
+                <a:latin typeface="Calibri"/>
+              </a:rPr>
+              <a:t> </a:t>
+            </a:r>
+            <a:r>
+              <a:rPr sz="1600" dirty="0" err="1">
+                <a:solidFill>
+                  <a:srgbClr val="444444"/>
+                </a:solidFill>
+                <a:latin typeface="Calibri"/>
+              </a:rPr>
+              <a:t>atingiram</a:t>
+            </a:r>
+            <a:r>
+              <a:rPr sz="1600" dirty="0">
+                <a:solidFill>
+                  <a:srgbClr val="444444"/>
+                </a:solidFill>
+                <a:latin typeface="Calibri"/>
+              </a:rPr>
+              <a:t> </a:t>
+            </a:r>
+            <a:r>
+              <a:rPr sz="1600" dirty="0" err="1">
+                <a:solidFill>
+                  <a:srgbClr val="444444"/>
+                </a:solidFill>
+                <a:latin typeface="Calibri"/>
+              </a:rPr>
+              <a:t>sua</a:t>
+            </a:r>
+            <a:r>
+              <a:rPr sz="1600" dirty="0">
+                <a:solidFill>
+                  <a:srgbClr val="444444"/>
+                </a:solidFill>
+                <a:latin typeface="Calibri"/>
+              </a:rPr>
+              <a:t> </a:t>
+            </a:r>
+            <a:r>
+              <a:rPr sz="1600" dirty="0" err="1">
+                <a:solidFill>
+                  <a:srgbClr val="444444"/>
+                </a:solidFill>
+                <a:latin typeface="Calibri"/>
+              </a:rPr>
+              <a:t>própria</a:t>
+            </a:r>
+            <a:r>
+              <a:rPr sz="1600" dirty="0">
+                <a:solidFill>
+                  <a:srgbClr val="444444"/>
+                </a:solidFill>
+                <a:latin typeface="Calibri"/>
+              </a:rPr>
+              <a:t> meta municipal (2.788 de 5.232 com meta </a:t>
+            </a:r>
+            <a:r>
+              <a:rPr sz="1600" dirty="0" err="1">
+                <a:solidFill>
+                  <a:srgbClr val="444444"/>
+                </a:solidFill>
+                <a:latin typeface="Calibri"/>
+              </a:rPr>
+              <a:t>definida</a:t>
+            </a:r>
+            <a:r>
+              <a:rPr sz="1600" dirty="0">
+                <a:solidFill>
+                  <a:srgbClr val="444444"/>
+                </a:solidFill>
+                <a:latin typeface="Calibri"/>
+              </a:rPr>
+              <a:t>).</a:t>
             </a:r>
           </a:p>
           <a:p>
@@ -7120,7 +9803,7 @@
               </a:spcAft>
             </a:pPr>
             <a:r>
-              <a:rPr sz="1600" b="1">
+              <a:rPr sz="1600" b="1" dirty="0">
                 <a:solidFill>
                   <a:srgbClr val="2E86C1"/>
                 </a:solidFill>
@@ -7129,14 +9812,155 @@
               <a:t>▶  </a:t>
             </a:r>
             <a:r>
-              <a:rPr sz="1600">
-                <a:solidFill>
-                  <a:srgbClr val="444444"/>
-                </a:solidFill>
-                <a:latin typeface="Calibri"/>
-              </a:rPr>
-              <a:t>RS teve a maior queda entre os dois últimos anos (-18,8 p.p.) — um sinal que só aparece quando comparamos períodos lado a lado, não em uma foto única.</a:t>
-            </a:r>
+              <a:rPr sz="1600" dirty="0">
+                <a:solidFill>
+                  <a:srgbClr val="444444"/>
+                </a:solidFill>
+                <a:latin typeface="Calibri"/>
+              </a:rPr>
+              <a:t>RS </a:t>
+            </a:r>
+            <a:r>
+              <a:rPr sz="1600" dirty="0" err="1">
+                <a:solidFill>
+                  <a:srgbClr val="444444"/>
+                </a:solidFill>
+                <a:latin typeface="Calibri"/>
+              </a:rPr>
+              <a:t>teve</a:t>
+            </a:r>
+            <a:r>
+              <a:rPr sz="1600" dirty="0">
+                <a:solidFill>
+                  <a:srgbClr val="444444"/>
+                </a:solidFill>
+                <a:latin typeface="Calibri"/>
+              </a:rPr>
+              <a:t> a </a:t>
+            </a:r>
+            <a:r>
+              <a:rPr sz="1600" dirty="0" err="1">
+                <a:solidFill>
+                  <a:srgbClr val="444444"/>
+                </a:solidFill>
+                <a:latin typeface="Calibri"/>
+              </a:rPr>
+              <a:t>maior</a:t>
+            </a:r>
+            <a:r>
+              <a:rPr sz="1600" dirty="0">
+                <a:solidFill>
+                  <a:srgbClr val="444444"/>
+                </a:solidFill>
+                <a:latin typeface="Calibri"/>
+              </a:rPr>
+              <a:t> </a:t>
+            </a:r>
+            <a:r>
+              <a:rPr sz="1600" dirty="0" err="1">
+                <a:solidFill>
+                  <a:srgbClr val="444444"/>
+                </a:solidFill>
+                <a:latin typeface="Calibri"/>
+              </a:rPr>
+              <a:t>queda</a:t>
+            </a:r>
+            <a:r>
+              <a:rPr sz="1600" dirty="0">
+                <a:solidFill>
+                  <a:srgbClr val="444444"/>
+                </a:solidFill>
+                <a:latin typeface="Calibri"/>
+              </a:rPr>
+              <a:t> entre </a:t>
+            </a:r>
+            <a:r>
+              <a:rPr sz="1600" dirty="0" err="1">
+                <a:solidFill>
+                  <a:srgbClr val="444444"/>
+                </a:solidFill>
+                <a:latin typeface="Calibri"/>
+              </a:rPr>
+              <a:t>os</a:t>
+            </a:r>
+            <a:r>
+              <a:rPr sz="1600" dirty="0">
+                <a:solidFill>
+                  <a:srgbClr val="444444"/>
+                </a:solidFill>
+                <a:latin typeface="Calibri"/>
+              </a:rPr>
+              <a:t> </a:t>
+            </a:r>
+            <a:r>
+              <a:rPr sz="1600" dirty="0" err="1">
+                <a:solidFill>
+                  <a:srgbClr val="444444"/>
+                </a:solidFill>
+                <a:latin typeface="Calibri"/>
+              </a:rPr>
+              <a:t>dois</a:t>
+            </a:r>
+            <a:r>
+              <a:rPr sz="1600" dirty="0">
+                <a:solidFill>
+                  <a:srgbClr val="444444"/>
+                </a:solidFill>
+                <a:latin typeface="Calibri"/>
+              </a:rPr>
+              <a:t> </a:t>
+            </a:r>
+            <a:r>
+              <a:rPr sz="1600" dirty="0" err="1">
+                <a:solidFill>
+                  <a:srgbClr val="444444"/>
+                </a:solidFill>
+                <a:latin typeface="Calibri"/>
+              </a:rPr>
+              <a:t>últimos</a:t>
+            </a:r>
+            <a:r>
+              <a:rPr sz="1600" dirty="0">
+                <a:solidFill>
+                  <a:srgbClr val="444444"/>
+                </a:solidFill>
+                <a:latin typeface="Calibri"/>
+              </a:rPr>
+              <a:t> </a:t>
+            </a:r>
+            <a:r>
+              <a:rPr sz="1600" dirty="0" err="1">
+                <a:solidFill>
+                  <a:srgbClr val="444444"/>
+                </a:solidFill>
+                <a:latin typeface="Calibri"/>
+              </a:rPr>
+              <a:t>anos</a:t>
+            </a:r>
+            <a:r>
+              <a:rPr sz="1600" dirty="0">
+                <a:solidFill>
+                  <a:srgbClr val="444444"/>
+                </a:solidFill>
+                <a:latin typeface="Calibri"/>
+              </a:rPr>
+              <a:t> (-18,8 p.p.)</a:t>
+            </a:r>
+            <a:r>
+              <a:rPr lang="pt-BR" sz="1600" dirty="0">
+                <a:solidFill>
+                  <a:srgbClr val="444444"/>
+                </a:solidFill>
+                <a:latin typeface="Calibri"/>
+              </a:rPr>
+              <a:t>.</a:t>
+            </a:r>
+            <a:endParaRPr sz="1600" dirty="0">
+              <a:solidFill>
+                <a:srgbClr val="444444"/>
+              </a:solidFill>
+              <a:latin typeface="Calibri"/>
+            </a:endParaRPr>
           </a:p>
           <a:p>
             <a:pPr>
@@ -7145,7 +9969,7 @@
               </a:spcAft>
             </a:pPr>
             <a:r>
-              <a:rPr sz="1600" b="1">
+              <a:rPr sz="1600" b="1" dirty="0">
                 <a:solidFill>
                   <a:srgbClr val="2E86C1"/>
                 </a:solidFill>
@@ -7154,13 +9978,229 @@
               <a:t>▶  </a:t>
             </a:r>
             <a:r>
-              <a:rPr sz="1600">
-                <a:solidFill>
-                  <a:srgbClr val="444444"/>
-                </a:solidFill>
-                <a:latin typeface="Calibri"/>
-              </a:rPr>
-              <a:t>Cada município carrega, na mesma linha, resultado, meta, gap nacional, faixa de risco e IDHM — pronto para priorizar onde investir, sem cruzar planilhas manualmente.</a:t>
+              <a:rPr sz="1600" dirty="0">
+                <a:solidFill>
+                  <a:srgbClr val="444444"/>
+                </a:solidFill>
+                <a:latin typeface="Calibri"/>
+              </a:rPr>
+              <a:t>Cada </a:t>
+            </a:r>
+            <a:r>
+              <a:rPr sz="1600" dirty="0" err="1">
+                <a:solidFill>
+                  <a:srgbClr val="444444"/>
+                </a:solidFill>
+                <a:latin typeface="Calibri"/>
+              </a:rPr>
+              <a:t>município</a:t>
+            </a:r>
+            <a:r>
+              <a:rPr sz="1600" dirty="0">
+                <a:solidFill>
+                  <a:srgbClr val="444444"/>
+                </a:solidFill>
+                <a:latin typeface="Calibri"/>
+              </a:rPr>
+              <a:t> </a:t>
+            </a:r>
+            <a:r>
+              <a:rPr sz="1600" dirty="0" err="1">
+                <a:solidFill>
+                  <a:srgbClr val="444444"/>
+                </a:solidFill>
+                <a:latin typeface="Calibri"/>
+              </a:rPr>
+              <a:t>carrega</a:t>
+            </a:r>
+            <a:r>
+              <a:rPr sz="1600" dirty="0">
+                <a:solidFill>
+                  <a:srgbClr val="444444"/>
+                </a:solidFill>
+                <a:latin typeface="Calibri"/>
+              </a:rPr>
+              <a:t>, </a:t>
+            </a:r>
+            <a:r>
+              <a:rPr sz="1600" dirty="0" err="1">
+                <a:solidFill>
+                  <a:srgbClr val="444444"/>
+                </a:solidFill>
+                <a:latin typeface="Calibri"/>
+              </a:rPr>
+              <a:t>na</a:t>
+            </a:r>
+            <a:r>
+              <a:rPr sz="1600" dirty="0">
+                <a:solidFill>
+                  <a:srgbClr val="444444"/>
+                </a:solidFill>
+                <a:latin typeface="Calibri"/>
+              </a:rPr>
+              <a:t> </a:t>
+            </a:r>
+            <a:r>
+              <a:rPr sz="1600" dirty="0" err="1">
+                <a:solidFill>
+                  <a:srgbClr val="444444"/>
+                </a:solidFill>
+                <a:latin typeface="Calibri"/>
+              </a:rPr>
+              <a:t>mesma</a:t>
+            </a:r>
+            <a:r>
+              <a:rPr sz="1600" dirty="0">
+                <a:solidFill>
+                  <a:srgbClr val="444444"/>
+                </a:solidFill>
+                <a:latin typeface="Calibri"/>
+              </a:rPr>
+              <a:t> </a:t>
+            </a:r>
+            <a:r>
+              <a:rPr sz="1600" dirty="0" err="1">
+                <a:solidFill>
+                  <a:srgbClr val="444444"/>
+                </a:solidFill>
+                <a:latin typeface="Calibri"/>
+              </a:rPr>
+              <a:t>linha</a:t>
+            </a:r>
+            <a:r>
+              <a:rPr sz="1600" dirty="0">
+                <a:solidFill>
+                  <a:srgbClr val="444444"/>
+                </a:solidFill>
+                <a:latin typeface="Calibri"/>
+              </a:rPr>
+              <a:t>, </a:t>
+            </a:r>
+            <a:r>
+              <a:rPr sz="1600" dirty="0" err="1">
+                <a:solidFill>
+                  <a:srgbClr val="444444"/>
+                </a:solidFill>
+                <a:latin typeface="Calibri"/>
+              </a:rPr>
+              <a:t>resultado</a:t>
+            </a:r>
+            <a:r>
+              <a:rPr sz="1600" dirty="0">
+                <a:solidFill>
+                  <a:srgbClr val="444444"/>
+                </a:solidFill>
+                <a:latin typeface="Calibri"/>
+              </a:rPr>
+              <a:t>, meta, gap </a:t>
+            </a:r>
+            <a:r>
+              <a:rPr sz="1600" dirty="0" err="1">
+                <a:solidFill>
+                  <a:srgbClr val="444444"/>
+                </a:solidFill>
+                <a:latin typeface="Calibri"/>
+              </a:rPr>
+              <a:t>nacional</a:t>
+            </a:r>
+            <a:r>
+              <a:rPr sz="1600" dirty="0">
+                <a:solidFill>
+                  <a:srgbClr val="444444"/>
+                </a:solidFill>
+                <a:latin typeface="Calibri"/>
+              </a:rPr>
+              <a:t>, </a:t>
+            </a:r>
+            <a:r>
+              <a:rPr sz="1600" dirty="0" err="1">
+                <a:solidFill>
+                  <a:srgbClr val="444444"/>
+                </a:solidFill>
+                <a:latin typeface="Calibri"/>
+              </a:rPr>
+              <a:t>faixa</a:t>
+            </a:r>
+            <a:r>
+              <a:rPr sz="1600" dirty="0">
+                <a:solidFill>
+                  <a:srgbClr val="444444"/>
+                </a:solidFill>
+                <a:latin typeface="Calibri"/>
+              </a:rPr>
+              <a:t> de </a:t>
+            </a:r>
+            <a:r>
+              <a:rPr sz="1600" dirty="0" err="1">
+                <a:solidFill>
+                  <a:srgbClr val="444444"/>
+                </a:solidFill>
+                <a:latin typeface="Calibri"/>
+              </a:rPr>
+              <a:t>risco</a:t>
+            </a:r>
+            <a:r>
+              <a:rPr sz="1600" dirty="0">
+                <a:solidFill>
+                  <a:srgbClr val="444444"/>
+                </a:solidFill>
+                <a:latin typeface="Calibri"/>
+              </a:rPr>
+              <a:t> e IDHM — pronto para </a:t>
+            </a:r>
+            <a:r>
+              <a:rPr sz="1600" dirty="0" err="1">
+                <a:solidFill>
+                  <a:srgbClr val="444444"/>
+                </a:solidFill>
+                <a:latin typeface="Calibri"/>
+              </a:rPr>
+              <a:t>priorizar</a:t>
+            </a:r>
+            <a:r>
+              <a:rPr sz="1600" dirty="0">
+                <a:solidFill>
+                  <a:srgbClr val="444444"/>
+                </a:solidFill>
+                <a:latin typeface="Calibri"/>
+              </a:rPr>
+              <a:t> </a:t>
+            </a:r>
+            <a:r>
+              <a:rPr sz="1600" dirty="0" err="1">
+                <a:solidFill>
+                  <a:srgbClr val="444444"/>
+                </a:solidFill>
+                <a:latin typeface="Calibri"/>
+              </a:rPr>
+              <a:t>onde</a:t>
+            </a:r>
+            <a:r>
+              <a:rPr sz="1600" dirty="0">
+                <a:solidFill>
+                  <a:srgbClr val="444444"/>
+                </a:solidFill>
+                <a:latin typeface="Calibri"/>
+              </a:rPr>
+              <a:t> </a:t>
+            </a:r>
+            <a:r>
+              <a:rPr sz="1600" dirty="0" err="1">
+                <a:solidFill>
+                  <a:srgbClr val="444444"/>
+                </a:solidFill>
+                <a:latin typeface="Calibri"/>
+              </a:rPr>
+              <a:t>investir</a:t>
+            </a:r>
+            <a:r>
+              <a:rPr sz="1600" dirty="0">
+                <a:solidFill>
+                  <a:srgbClr val="444444"/>
+                </a:solidFill>
+                <a:latin typeface="Calibri"/>
+              </a:rPr>
+              <a:t>.</a:t>
             </a:r>
           </a:p>
           <a:p>
@@ -7170,7 +10210,7 @@
               </a:spcAft>
             </a:pPr>
             <a:r>
-              <a:rPr sz="1600" b="1">
+              <a:rPr sz="1600" b="1" dirty="0">
                 <a:solidFill>
                   <a:srgbClr val="2E86C1"/>
                 </a:solidFill>
@@ -7179,13 +10219,247 @@
               <a:t>▶  </a:t>
             </a:r>
             <a:r>
-              <a:rPr sz="1600">
-                <a:solidFill>
-                  <a:srgbClr val="444444"/>
-                </a:solidFill>
-                <a:latin typeface="Calibri"/>
-              </a:rPr>
-              <a:t>Tudo isso já está disponível como um painel interativo (4 visões: Brasil, UF, Município, Aluno), pronto para gestores explorarem sem escrever uma linha de código.</a:t>
+              <a:rPr lang="pt-BR" sz="1600" dirty="0" err="1">
+                <a:solidFill>
+                  <a:srgbClr val="444444"/>
+                </a:solidFill>
+                <a:latin typeface="Calibri"/>
+              </a:rPr>
+              <a:t>Pa</a:t>
+            </a:r>
+            <a:r>
+              <a:rPr sz="1600" dirty="0" err="1">
+                <a:solidFill>
+                  <a:srgbClr val="444444"/>
+                </a:solidFill>
+                <a:latin typeface="Calibri"/>
+              </a:rPr>
+              <a:t>inel</a:t>
+            </a:r>
+            <a:r>
+              <a:rPr sz="1600" dirty="0">
+                <a:solidFill>
+                  <a:srgbClr val="444444"/>
+                </a:solidFill>
+                <a:latin typeface="Calibri"/>
+              </a:rPr>
+              <a:t> </a:t>
+            </a:r>
+            <a:r>
+              <a:rPr sz="1600" dirty="0" err="1">
+                <a:solidFill>
+                  <a:srgbClr val="444444"/>
+                </a:solidFill>
+                <a:latin typeface="Calibri"/>
+              </a:rPr>
+              <a:t>interativo</a:t>
+            </a:r>
+            <a:r>
+              <a:rPr sz="1600" dirty="0">
+                <a:solidFill>
+                  <a:srgbClr val="444444"/>
+                </a:solidFill>
+                <a:latin typeface="Calibri"/>
+              </a:rPr>
+              <a:t> (4 </a:t>
+            </a:r>
+            <a:r>
+              <a:rPr sz="1600" dirty="0" err="1">
+                <a:solidFill>
+                  <a:srgbClr val="444444"/>
+                </a:solidFill>
+                <a:latin typeface="Calibri"/>
+              </a:rPr>
+              <a:t>visões</a:t>
+            </a:r>
+            <a:r>
+              <a:rPr sz="1600" dirty="0">
+                <a:solidFill>
+                  <a:srgbClr val="444444"/>
+                </a:solidFill>
+                <a:latin typeface="Calibri"/>
+              </a:rPr>
+              <a:t>: </a:t>
+            </a:r>
+            <a:r>
+              <a:rPr sz="1600" dirty="0" err="1">
+                <a:solidFill>
+                  <a:srgbClr val="444444"/>
+                </a:solidFill>
+                <a:latin typeface="Calibri"/>
+              </a:rPr>
+              <a:t>Brasil</a:t>
+            </a:r>
+            <a:r>
+              <a:rPr sz="1600" dirty="0">
+                <a:solidFill>
+                  <a:srgbClr val="444444"/>
+                </a:solidFill>
+                <a:latin typeface="Calibri"/>
+              </a:rPr>
+              <a:t>, UF, </a:t>
+            </a:r>
+            <a:r>
+              <a:rPr sz="1600" dirty="0" err="1">
+                <a:solidFill>
+                  <a:srgbClr val="444444"/>
+                </a:solidFill>
+                <a:latin typeface="Calibri"/>
+              </a:rPr>
+              <a:t>Município</a:t>
+            </a:r>
+            <a:r>
+              <a:rPr sz="1600" dirty="0">
+                <a:solidFill>
+                  <a:srgbClr val="444444"/>
+                </a:solidFill>
+                <a:latin typeface="Calibri"/>
+              </a:rPr>
+              <a:t>, </a:t>
+            </a:r>
+            <a:r>
+              <a:rPr sz="1600" dirty="0" err="1">
+                <a:solidFill>
+                  <a:srgbClr val="444444"/>
+                </a:solidFill>
+                <a:latin typeface="Calibri"/>
+              </a:rPr>
+              <a:t>Aluno</a:t>
+            </a:r>
+            <a:r>
+              <a:rPr sz="1600" dirty="0">
+                <a:solidFill>
+                  <a:srgbClr val="444444"/>
+                </a:solidFill>
+                <a:latin typeface="Calibri"/>
+              </a:rPr>
+              <a:t>), pronto para </a:t>
+            </a:r>
+            <a:r>
+              <a:rPr sz="1600" dirty="0" err="1">
+                <a:solidFill>
+                  <a:srgbClr val="444444"/>
+                </a:solidFill>
+                <a:latin typeface="Calibri"/>
+              </a:rPr>
+              <a:t>gestores</a:t>
+            </a:r>
+            <a:r>
+              <a:rPr sz="1600" dirty="0">
+                <a:solidFill>
+                  <a:srgbClr val="444444"/>
+                </a:solidFill>
+                <a:latin typeface="Calibri"/>
+              </a:rPr>
+              <a:t> </a:t>
+            </a:r>
+            <a:r>
+              <a:rPr sz="1600" dirty="0" err="1">
+                <a:solidFill>
+                  <a:srgbClr val="444444"/>
+                </a:solidFill>
+                <a:latin typeface="Calibri"/>
+              </a:rPr>
+              <a:t>explorarem</a:t>
+            </a:r>
+            <a:r>
+              <a:rPr sz="1600" dirty="0">
+                <a:solidFill>
+                  <a:srgbClr val="444444"/>
+                </a:solidFill>
+                <a:latin typeface="Calibri"/>
+              </a:rPr>
+              <a:t> </a:t>
+            </a:r>
+            <a:r>
+              <a:rPr sz="1600" dirty="0" err="1">
+                <a:solidFill>
+                  <a:srgbClr val="444444"/>
+                </a:solidFill>
+                <a:latin typeface="Calibri"/>
+              </a:rPr>
+              <a:t>sem</a:t>
+            </a:r>
+            <a:r>
+              <a:rPr sz="1600" dirty="0">
+                <a:solidFill>
+                  <a:srgbClr val="444444"/>
+                </a:solidFill>
+                <a:latin typeface="Calibri"/>
+              </a:rPr>
+              <a:t> </a:t>
+            </a:r>
+            <a:r>
+              <a:rPr sz="1600" dirty="0" err="1">
+                <a:solidFill>
+                  <a:srgbClr val="444444"/>
+                </a:solidFill>
+                <a:latin typeface="Calibri"/>
+              </a:rPr>
+              <a:t>escrever</a:t>
+            </a:r>
+            <a:r>
+              <a:rPr sz="1600" dirty="0">
+                <a:solidFill>
+                  <a:srgbClr val="444444"/>
+                </a:solidFill>
+                <a:latin typeface="Calibri"/>
+              </a:rPr>
+              <a:t> </a:t>
+            </a:r>
+            <a:r>
+              <a:rPr sz="1600" dirty="0" err="1">
+                <a:solidFill>
+                  <a:srgbClr val="444444"/>
+                </a:solidFill>
+                <a:latin typeface="Calibri"/>
+              </a:rPr>
+              <a:t>uma</a:t>
+            </a:r>
+            <a:r>
+              <a:rPr sz="1600" dirty="0">
+                <a:solidFill>
+                  <a:srgbClr val="444444"/>
+                </a:solidFill>
+                <a:latin typeface="Calibri"/>
+              </a:rPr>
+              <a:t> </a:t>
+            </a:r>
+            <a:r>
+              <a:rPr sz="1600" dirty="0" err="1">
+                <a:solidFill>
+                  <a:srgbClr val="444444"/>
+                </a:solidFill>
+                <a:latin typeface="Calibri"/>
+              </a:rPr>
+              <a:t>linha</a:t>
+            </a:r>
+            <a:r>
+              <a:rPr sz="1600" dirty="0">
+                <a:solidFill>
+                  <a:srgbClr val="444444"/>
+                </a:solidFill>
+                <a:latin typeface="Calibri"/>
+              </a:rPr>
+              <a:t> de </a:t>
+            </a:r>
+            <a:r>
+              <a:rPr sz="1600" dirty="0" err="1">
+                <a:solidFill>
+                  <a:srgbClr val="444444"/>
+                </a:solidFill>
+                <a:latin typeface="Calibri"/>
+              </a:rPr>
+              <a:t>código</a:t>
+            </a:r>
+            <a:r>
+              <a:rPr sz="1600" dirty="0">
+                <a:solidFill>
+                  <a:srgbClr val="444444"/>
+                </a:solidFill>
+                <a:latin typeface="Calibri"/>
+              </a:rPr>
+              <a:t>.</a:t>
             </a:r>
           </a:p>
         </p:txBody>
@@ -7199,7 +10473,7 @@
 </file>
 
 <file path=ppt/slides/slide7.xml><?xml version="1.0" encoding="utf-8"?>
-<p:sld xmlns:a="http://schemas.openxmlformats.org/drawingml/2006/main" xmlns:p="http://schemas.openxmlformats.org/presentationml/2006/main" xmlns:r="http://schemas.openxmlformats.org/officeDocument/2006/relationships">
+<p:sld xmlns:a="http://schemas.openxmlformats.org/drawingml/2006/main" xmlns:r="http://schemas.openxmlformats.org/officeDocument/2006/relationships" xmlns:p="http://schemas.openxmlformats.org/presentationml/2006/main">
   <p:cSld>
     <p:spTree>
       <p:nvGrpSpPr>
@@ -7207,7 +10481,14 @@
         <p:cNvGrpSpPr/>
         <p:nvPr/>
       </p:nvGrpSpPr>
-      <p:grpSpPr/>
+      <p:grpSpPr>
+        <a:xfrm>
+          <a:off x="0" y="0"/>
+          <a:ext cx="0" cy="0"/>
+          <a:chOff x="0" y="0"/>
+          <a:chExt cx="0" cy="0"/>
+        </a:xfrm>
+      </p:grpSpPr>
       <p:sp>
         <p:nvSpPr>
           <p:cNvPr id="2" name="Rectangle 1"/>
@@ -7249,6 +10530,7 @@
           <a:lstStyle/>
           <a:p>
             <a:pPr algn="ctr"/>
+            <a:endParaRPr/>
           </a:p>
         </p:txBody>
       </p:sp>
@@ -7293,6 +10575,7 @@
           <a:lstStyle/>
           <a:p>
             <a:pPr algn="ctr"/>
+            <a:endParaRPr/>
           </a:p>
         </p:txBody>
       </p:sp>
@@ -7372,6 +10655,7 @@
           <a:lstStyle/>
           <a:p>
             <a:pPr algn="ctr"/>
+            <a:endParaRPr/>
           </a:p>
         </p:txBody>
       </p:sp>
@@ -7455,6 +10739,7 @@
           <a:lstStyle/>
           <a:p>
             <a:pPr algn="ctr"/>
+            <a:endParaRPr/>
           </a:p>
         </p:txBody>
       </p:sp>
@@ -7499,6 +10784,7 @@
           <a:lstStyle/>
           <a:p>
             <a:pPr algn="ctr"/>
+            <a:endParaRPr/>
           </a:p>
         </p:txBody>
       </p:sp>
@@ -7617,6 +10903,7 @@
           <a:lstStyle/>
           <a:p>
             <a:pPr algn="ctr"/>
+            <a:endParaRPr/>
           </a:p>
         </p:txBody>
       </p:sp>
@@ -7661,6 +10948,7 @@
           <a:lstStyle/>
           <a:p>
             <a:pPr algn="ctr"/>
+            <a:endParaRPr/>
           </a:p>
         </p:txBody>
       </p:sp>
@@ -7779,6 +11067,7 @@
           <a:lstStyle/>
           <a:p>
             <a:pPr algn="ctr"/>
+            <a:endParaRPr/>
           </a:p>
         </p:txBody>
       </p:sp>
@@ -7823,6 +11112,7 @@
           <a:lstStyle/>
           <a:p>
             <a:pPr algn="ctr"/>
+            <a:endParaRPr/>
           </a:p>
         </p:txBody>
       </p:sp>
@@ -7941,6 +11231,7 @@
           <a:lstStyle/>
           <a:p>
             <a:pPr algn="ctr"/>
+            <a:endParaRPr/>
           </a:p>
         </p:txBody>
       </p:sp>
@@ -7985,6 +11276,7 @@
           <a:lstStyle/>
           <a:p>
             <a:pPr algn="ctr"/>
+            <a:endParaRPr/>
           </a:p>
         </p:txBody>
       </p:sp>
@@ -8067,7 +11359,7 @@
 </file>
 
 <file path=ppt/slides/slide8.xml><?xml version="1.0" encoding="utf-8"?>
-<p:sld xmlns:a="http://schemas.openxmlformats.org/drawingml/2006/main" xmlns:p="http://schemas.openxmlformats.org/presentationml/2006/main" xmlns:r="http://schemas.openxmlformats.org/officeDocument/2006/relationships">
+<p:sld xmlns:a="http://schemas.openxmlformats.org/drawingml/2006/main" xmlns:r="http://schemas.openxmlformats.org/officeDocument/2006/relationships" xmlns:p="http://schemas.openxmlformats.org/presentationml/2006/main">
   <p:cSld>
     <p:spTree>
       <p:nvGrpSpPr>
@@ -8075,7 +11367,14 @@
         <p:cNvGrpSpPr/>
         <p:nvPr/>
       </p:nvGrpSpPr>
-      <p:grpSpPr/>
+      <p:grpSpPr>
+        <a:xfrm>
+          <a:off x="0" y="0"/>
+          <a:ext cx="0" cy="0"/>
+          <a:chOff x="0" y="0"/>
+          <a:chExt cx="0" cy="0"/>
+        </a:xfrm>
+      </p:grpSpPr>
       <p:sp>
         <p:nvSpPr>
           <p:cNvPr id="2" name="Rectangle 1"/>
@@ -8117,6 +11416,7 @@
           <a:lstStyle/>
           <a:p>
             <a:pPr algn="ctr"/>
+            <a:endParaRPr/>
           </a:p>
         </p:txBody>
       </p:sp>
@@ -8161,6 +11461,7 @@
           <a:lstStyle/>
           <a:p>
             <a:pPr algn="ctr"/>
+            <a:endParaRPr/>
           </a:p>
         </p:txBody>
       </p:sp>
@@ -8275,6 +11576,7 @@
           <a:lstStyle/>
           <a:p>
             <a:pPr algn="ctr"/>
+            <a:endParaRPr/>
           </a:p>
         </p:txBody>
       </p:sp>
@@ -8389,6 +11691,7 @@
           <a:lstStyle/>
           <a:p>
             <a:pPr algn="ctr"/>
+            <a:endParaRPr/>
           </a:p>
         </p:txBody>
       </p:sp>
@@ -8540,6 +11843,7 @@
           <a:lstStyle/>
           <a:p>
             <a:pPr algn="ctr"/>
+            <a:endParaRPr/>
           </a:p>
         </p:txBody>
       </p:sp>
@@ -8584,6 +11888,7 @@
           <a:lstStyle/>
           <a:p>
             <a:pPr algn="ctr"/>
+            <a:endParaRPr/>
           </a:p>
         </p:txBody>
       </p:sp>
@@ -8735,6 +12040,7 @@
           <a:lstStyle/>
           <a:p>
             <a:pPr algn="ctr"/>
+            <a:endParaRPr/>
           </a:p>
         </p:txBody>
       </p:sp>
@@ -8779,6 +12085,7 @@
           <a:lstStyle/>
           <a:p>
             <a:pPr algn="ctr"/>
+            <a:endParaRPr/>
           </a:p>
         </p:txBody>
       </p:sp>
@@ -8930,6 +12237,7 @@
           <a:lstStyle/>
           <a:p>
             <a:pPr algn="ctr"/>
+            <a:endParaRPr/>
           </a:p>
         </p:txBody>
       </p:sp>
@@ -8974,6 +12282,7 @@
           <a:lstStyle/>
           <a:p>
             <a:pPr algn="ctr"/>
+            <a:endParaRPr/>
           </a:p>
         </p:txBody>
       </p:sp>
@@ -9125,6 +12434,7 @@
           <a:lstStyle/>
           <a:p>
             <a:pPr algn="ctr"/>
+            <a:endParaRPr/>
           </a:p>
         </p:txBody>
       </p:sp>
@@ -9169,6 +12479,7 @@
           <a:lstStyle/>
           <a:p>
             <a:pPr algn="ctr"/>
+            <a:endParaRPr/>
           </a:p>
         </p:txBody>
       </p:sp>
@@ -9322,6 +12633,7 @@
           <a:lstStyle/>
           <a:p>
             <a:pPr algn="ctr"/>
+            <a:endParaRPr/>
           </a:p>
         </p:txBody>
       </p:sp>
@@ -9333,8 +12645,8 @@
         </p:nvSpPr>
         <p:spPr>
           <a:xfrm>
-            <a:off x="594360" y="5742432"/>
-            <a:ext cx="10972800" cy="548640"/>
+            <a:off x="594360" y="5874405"/>
+            <a:ext cx="10972800" cy="284693"/>
           </a:xfrm>
           <a:prstGeom prst="rect">
             <a:avLst/>
@@ -9349,13 +12661,265 @@
           <a:p>
             <a:pPr algn="l"/>
             <a:r>
-              <a:rPr sz="1250" b="0" i="1">
+              <a:rPr sz="1250" b="0" i="1" dirty="0">
                 <a:solidFill>
                   <a:srgbClr val="1A253A"/>
                 </a:solidFill>
                 <a:latin typeface="Calibri"/>
               </a:rPr>
-              <a:t>Rodar mensalmente custa ~96% menos que diariamente — sem perder capacidade de captar dado novo, já que a fonte não publica com essa frequência. Dentro do tier gratuito do BigQuery, o custo real hoje é R$ 0.</a:t>
+              <a:t>Rodar </a:t>
+            </a:r>
+            <a:r>
+              <a:rPr sz="1250" b="0" i="1" dirty="0" err="1">
+                <a:solidFill>
+                  <a:srgbClr val="1A253A"/>
+                </a:solidFill>
+                <a:latin typeface="Calibri"/>
+              </a:rPr>
+              <a:t>mensalmente</a:t>
+            </a:r>
+            <a:r>
+              <a:rPr sz="1250" b="0" i="1" dirty="0">
+                <a:solidFill>
+                  <a:srgbClr val="1A253A"/>
+                </a:solidFill>
+                <a:latin typeface="Calibri"/>
+              </a:rPr>
+              <a:t> </a:t>
+            </a:r>
+            <a:r>
+              <a:rPr sz="1250" b="0" i="1" dirty="0" err="1">
+                <a:solidFill>
+                  <a:srgbClr val="1A253A"/>
+                </a:solidFill>
+                <a:latin typeface="Calibri"/>
+              </a:rPr>
+              <a:t>custa</a:t>
+            </a:r>
+            <a:r>
+              <a:rPr sz="1250" b="0" i="1" dirty="0">
+                <a:solidFill>
+                  <a:srgbClr val="1A253A"/>
+                </a:solidFill>
+                <a:latin typeface="Calibri"/>
+              </a:rPr>
+              <a:t> ~96% </a:t>
+            </a:r>
+            <a:r>
+              <a:rPr sz="1250" b="0" i="1" dirty="0" err="1">
+                <a:solidFill>
+                  <a:srgbClr val="1A253A"/>
+                </a:solidFill>
+                <a:latin typeface="Calibri"/>
+              </a:rPr>
+              <a:t>menos</a:t>
+            </a:r>
+            <a:r>
+              <a:rPr sz="1250" b="0" i="1" dirty="0">
+                <a:solidFill>
+                  <a:srgbClr val="1A253A"/>
+                </a:solidFill>
+                <a:latin typeface="Calibri"/>
+              </a:rPr>
+              <a:t> </a:t>
+            </a:r>
+            <a:r>
+              <a:rPr sz="1250" b="0" i="1" dirty="0" err="1">
+                <a:solidFill>
+                  <a:srgbClr val="1A253A"/>
+                </a:solidFill>
+                <a:latin typeface="Calibri"/>
+              </a:rPr>
+              <a:t>que</a:t>
+            </a:r>
+            <a:r>
+              <a:rPr sz="1250" b="0" i="1" dirty="0">
+                <a:solidFill>
+                  <a:srgbClr val="1A253A"/>
+                </a:solidFill>
+                <a:latin typeface="Calibri"/>
+              </a:rPr>
+              <a:t> </a:t>
+            </a:r>
+            <a:r>
+              <a:rPr sz="1250" b="0" i="1" dirty="0" err="1">
+                <a:solidFill>
+                  <a:srgbClr val="1A253A"/>
+                </a:solidFill>
+                <a:latin typeface="Calibri"/>
+              </a:rPr>
+              <a:t>diariamente</a:t>
+            </a:r>
+            <a:r>
+              <a:rPr sz="1250" b="0" i="1" dirty="0">
+                <a:solidFill>
+                  <a:srgbClr val="1A253A"/>
+                </a:solidFill>
+                <a:latin typeface="Calibri"/>
+              </a:rPr>
+              <a:t> — </a:t>
+            </a:r>
+            <a:r>
+              <a:rPr sz="1250" b="0" i="1" dirty="0" err="1">
+                <a:solidFill>
+                  <a:srgbClr val="1A253A"/>
+                </a:solidFill>
+                <a:latin typeface="Calibri"/>
+              </a:rPr>
+              <a:t>sem</a:t>
+            </a:r>
+            <a:r>
+              <a:rPr sz="1250" b="0" i="1" dirty="0">
+                <a:solidFill>
+                  <a:srgbClr val="1A253A"/>
+                </a:solidFill>
+                <a:latin typeface="Calibri"/>
+              </a:rPr>
+              <a:t> </a:t>
+            </a:r>
+            <a:r>
+              <a:rPr sz="1250" b="0" i="1" dirty="0" err="1">
+                <a:solidFill>
+                  <a:srgbClr val="1A253A"/>
+                </a:solidFill>
+                <a:latin typeface="Calibri"/>
+              </a:rPr>
+              <a:t>perder</a:t>
+            </a:r>
+            <a:r>
+              <a:rPr sz="1250" b="0" i="1" dirty="0">
+                <a:solidFill>
+                  <a:srgbClr val="1A253A"/>
+                </a:solidFill>
+                <a:latin typeface="Calibri"/>
+              </a:rPr>
+              <a:t> </a:t>
+            </a:r>
+            <a:r>
+              <a:rPr sz="1250" b="0" i="1" dirty="0" err="1">
+                <a:solidFill>
+                  <a:srgbClr val="1A253A"/>
+                </a:solidFill>
+                <a:latin typeface="Calibri"/>
+              </a:rPr>
+              <a:t>capacidade</a:t>
+            </a:r>
+            <a:r>
+              <a:rPr sz="1250" b="0" i="1" dirty="0">
+                <a:solidFill>
+                  <a:srgbClr val="1A253A"/>
+                </a:solidFill>
+                <a:latin typeface="Calibri"/>
+              </a:rPr>
+              <a:t> de </a:t>
+            </a:r>
+            <a:r>
+              <a:rPr sz="1250" b="0" i="1" dirty="0" err="1">
+                <a:solidFill>
+                  <a:srgbClr val="1A253A"/>
+                </a:solidFill>
+                <a:latin typeface="Calibri"/>
+              </a:rPr>
+              <a:t>captar</a:t>
+            </a:r>
+            <a:r>
+              <a:rPr sz="1250" b="0" i="1" dirty="0">
+                <a:solidFill>
+                  <a:srgbClr val="1A253A"/>
+                </a:solidFill>
+                <a:latin typeface="Calibri"/>
+              </a:rPr>
+              <a:t> dado novo, </a:t>
+            </a:r>
+            <a:r>
+              <a:rPr sz="1250" b="0" i="1" dirty="0" err="1">
+                <a:solidFill>
+                  <a:srgbClr val="1A253A"/>
+                </a:solidFill>
+                <a:latin typeface="Calibri"/>
+              </a:rPr>
+              <a:t>já</a:t>
+            </a:r>
+            <a:r>
+              <a:rPr sz="1250" b="0" i="1" dirty="0">
+                <a:solidFill>
+                  <a:srgbClr val="1A253A"/>
+                </a:solidFill>
+                <a:latin typeface="Calibri"/>
+              </a:rPr>
+              <a:t> </a:t>
+            </a:r>
+            <a:r>
+              <a:rPr sz="1250" b="0" i="1" dirty="0" err="1">
+                <a:solidFill>
+                  <a:srgbClr val="1A253A"/>
+                </a:solidFill>
+                <a:latin typeface="Calibri"/>
+              </a:rPr>
+              <a:t>que</a:t>
+            </a:r>
+            <a:r>
+              <a:rPr sz="1250" b="0" i="1" dirty="0">
+                <a:solidFill>
+                  <a:srgbClr val="1A253A"/>
+                </a:solidFill>
+                <a:latin typeface="Calibri"/>
+              </a:rPr>
+              <a:t> a </a:t>
+            </a:r>
+            <a:r>
+              <a:rPr sz="1250" b="0" i="1" dirty="0" err="1">
+                <a:solidFill>
+                  <a:srgbClr val="1A253A"/>
+                </a:solidFill>
+                <a:latin typeface="Calibri"/>
+              </a:rPr>
+              <a:t>fonte</a:t>
+            </a:r>
+            <a:r>
+              <a:rPr sz="1250" b="0" i="1" dirty="0">
+                <a:solidFill>
+                  <a:srgbClr val="1A253A"/>
+                </a:solidFill>
+                <a:latin typeface="Calibri"/>
+              </a:rPr>
+              <a:t> não publica com </a:t>
+            </a:r>
+            <a:r>
+              <a:rPr sz="1250" b="0" i="1" dirty="0" err="1">
+                <a:solidFill>
+                  <a:srgbClr val="1A253A"/>
+                </a:solidFill>
+                <a:latin typeface="Calibri"/>
+              </a:rPr>
+              <a:t>essa</a:t>
+            </a:r>
+            <a:r>
+              <a:rPr sz="1250" b="0" i="1" dirty="0">
+                <a:solidFill>
+                  <a:srgbClr val="1A253A"/>
+                </a:solidFill>
+                <a:latin typeface="Calibri"/>
+              </a:rPr>
+              <a:t> </a:t>
+            </a:r>
+            <a:r>
+              <a:rPr sz="1250" b="0" i="1" dirty="0" err="1">
+                <a:solidFill>
+                  <a:srgbClr val="1A253A"/>
+                </a:solidFill>
+                <a:latin typeface="Calibri"/>
+              </a:rPr>
+              <a:t>frequência</a:t>
+            </a:r>
+            <a:r>
+              <a:rPr sz="1250" b="0" i="1" dirty="0">
+                <a:solidFill>
+                  <a:srgbClr val="1A253A"/>
+                </a:solidFill>
+                <a:latin typeface="Calibri"/>
+              </a:rPr>
+              <a:t>.</a:t>
             </a:r>
           </a:p>
         </p:txBody>
@@ -9369,7 +12933,7 @@
 </file>
 
 <file path=ppt/slides/slide9.xml><?xml version="1.0" encoding="utf-8"?>
-<p:sld xmlns:a="http://schemas.openxmlformats.org/drawingml/2006/main" xmlns:p="http://schemas.openxmlformats.org/presentationml/2006/main" xmlns:r="http://schemas.openxmlformats.org/officeDocument/2006/relationships">
+<p:sld xmlns:a="http://schemas.openxmlformats.org/drawingml/2006/main" xmlns:r="http://schemas.openxmlformats.org/officeDocument/2006/relationships" xmlns:p="http://schemas.openxmlformats.org/presentationml/2006/main">
   <p:cSld>
     <p:spTree>
       <p:nvGrpSpPr>
@@ -9377,7 +12941,14 @@
         <p:cNvGrpSpPr/>
         <p:nvPr/>
       </p:nvGrpSpPr>
-      <p:grpSpPr/>
+      <p:grpSpPr>
+        <a:xfrm>
+          <a:off x="0" y="0"/>
+          <a:ext cx="0" cy="0"/>
+          <a:chOff x="0" y="0"/>
+          <a:chExt cx="0" cy="0"/>
+        </a:xfrm>
+      </p:grpSpPr>
       <p:sp>
         <p:nvSpPr>
           <p:cNvPr id="2" name="Rectangle 1"/>
@@ -9419,6 +12990,7 @@
           <a:lstStyle/>
           <a:p>
             <a:pPr algn="ctr"/>
+            <a:endParaRPr/>
           </a:p>
         </p:txBody>
       </p:sp>
@@ -9463,6 +13035,7 @@
           <a:lstStyle/>
           <a:p>
             <a:pPr algn="ctr"/>
+            <a:endParaRPr/>
           </a:p>
         </p:txBody>
       </p:sp>
@@ -9542,6 +13115,7 @@
           <a:lstStyle/>
           <a:p>
             <a:pPr algn="ctr"/>
+            <a:endParaRPr/>
           </a:p>
         </p:txBody>
       </p:sp>
@@ -9656,6 +13230,7 @@
           <a:lstStyle/>
           <a:p>
             <a:pPr algn="ctr"/>
+            <a:endParaRPr/>
           </a:p>
         </p:txBody>
       </p:sp>
@@ -9668,7 +13243,7 @@
         <p:spPr>
           <a:xfrm>
             <a:off x="548640" y="1965960"/>
-            <a:ext cx="11064240" cy="365760"/>
+            <a:ext cx="11064240" cy="323165"/>
           </a:xfrm>
           <a:prstGeom prst="rect">
             <a:avLst/>
@@ -9683,14 +13258,83 @@
           <a:p>
             <a:pPr algn="l"/>
             <a:r>
-              <a:rPr sz="1500" b="0" i="0">
-                <a:solidFill>
-                  <a:srgbClr val="444444"/>
-                </a:solidFill>
-                <a:latin typeface="Calibri"/>
-              </a:rPr>
-              <a:t>O indicador está subindo (+10,1 p.p.) mas o ritmo não fecha a meta 2030 sem ação direcionada</a:t>
-            </a:r>
+              <a:rPr sz="1500" b="0" i="0" dirty="0">
+                <a:solidFill>
+                  <a:srgbClr val="444444"/>
+                </a:solidFill>
+                <a:latin typeface="Calibri"/>
+              </a:rPr>
+              <a:t>O </a:t>
+            </a:r>
+            <a:r>
+              <a:rPr sz="1500" b="0" i="0" dirty="0" err="1">
+                <a:solidFill>
+                  <a:srgbClr val="444444"/>
+                </a:solidFill>
+                <a:latin typeface="Calibri"/>
+              </a:rPr>
+              <a:t>indicador</a:t>
+            </a:r>
+            <a:r>
+              <a:rPr sz="1500" b="0" i="0" dirty="0">
+                <a:solidFill>
+                  <a:srgbClr val="444444"/>
+                </a:solidFill>
+                <a:latin typeface="Calibri"/>
+              </a:rPr>
+              <a:t> </a:t>
+            </a:r>
+            <a:r>
+              <a:rPr sz="1500" b="0" i="0" dirty="0" err="1">
+                <a:solidFill>
+                  <a:srgbClr val="444444"/>
+                </a:solidFill>
+                <a:latin typeface="Calibri"/>
+              </a:rPr>
+              <a:t>está</a:t>
+            </a:r>
+            <a:r>
+              <a:rPr sz="1500" b="0" i="0" dirty="0">
+                <a:solidFill>
+                  <a:srgbClr val="444444"/>
+                </a:solidFill>
+                <a:latin typeface="Calibri"/>
+              </a:rPr>
+              <a:t> </a:t>
+            </a:r>
+            <a:r>
+              <a:rPr sz="1500" b="0" i="0" dirty="0" err="1">
+                <a:solidFill>
+                  <a:srgbClr val="444444"/>
+                </a:solidFill>
+                <a:latin typeface="Calibri"/>
+              </a:rPr>
+              <a:t>subindo</a:t>
+            </a:r>
+            <a:r>
+              <a:rPr sz="1500" b="0" i="0" dirty="0">
+                <a:solidFill>
+                  <a:srgbClr val="444444"/>
+                </a:solidFill>
+                <a:latin typeface="Calibri"/>
+              </a:rPr>
+              <a:t> (+10,1 p.p.)</a:t>
+            </a:r>
+            <a:r>
+              <a:rPr lang="pt-BR" sz="1500" b="0" i="0" dirty="0">
+                <a:solidFill>
+                  <a:srgbClr val="444444"/>
+                </a:solidFill>
+                <a:latin typeface="Calibri"/>
+              </a:rPr>
+              <a:t>, ritmo bom, mas será desafio para lugares com índices muito baixos como BH.</a:t>
+            </a:r>
+            <a:endParaRPr sz="1500" b="0" i="0" dirty="0">
+              <a:solidFill>
+                <a:srgbClr val="444444"/>
+              </a:solidFill>
+              <a:latin typeface="Calibri"/>
+            </a:endParaRPr>
           </a:p>
         </p:txBody>
       </p:sp>
@@ -9735,6 +13379,7 @@
           <a:lstStyle/>
           <a:p>
             <a:pPr algn="ctr"/>
+            <a:endParaRPr/>
           </a:p>
         </p:txBody>
       </p:sp>
@@ -9747,7 +13392,7 @@
         <p:spPr>
           <a:xfrm>
             <a:off x="548640" y="2532888"/>
-            <a:ext cx="11064240" cy="365760"/>
+            <a:ext cx="11064240" cy="323165"/>
           </a:xfrm>
           <a:prstGeom prst="rect">
             <a:avLst/>
@@ -9762,14 +13407,101 @@
           <a:p>
             <a:pPr algn="l"/>
             <a:r>
-              <a:rPr sz="1500" b="0" i="0">
-                <a:solidFill>
-                  <a:srgbClr val="444444"/>
-                </a:solidFill>
-                <a:latin typeface="Calibri"/>
-              </a:rPr>
-              <a:t>A pipeline já entrega, hoje, ranking, gaps e deltas prontos para decisão — sem esperar TI</a:t>
-            </a:r>
+              <a:rPr sz="1500" b="0" i="0" dirty="0">
+                <a:solidFill>
+                  <a:srgbClr val="444444"/>
+                </a:solidFill>
+                <a:latin typeface="Calibri"/>
+              </a:rPr>
+              <a:t>A pipeline </a:t>
+            </a:r>
+            <a:r>
+              <a:rPr sz="1500" b="0" i="0" dirty="0" err="1">
+                <a:solidFill>
+                  <a:srgbClr val="444444"/>
+                </a:solidFill>
+                <a:latin typeface="Calibri"/>
+              </a:rPr>
+              <a:t>já</a:t>
+            </a:r>
+            <a:r>
+              <a:rPr sz="1500" b="0" i="0" dirty="0">
+                <a:solidFill>
+                  <a:srgbClr val="444444"/>
+                </a:solidFill>
+                <a:latin typeface="Calibri"/>
+              </a:rPr>
+              <a:t> </a:t>
+            </a:r>
+            <a:r>
+              <a:rPr sz="1500" b="0" i="0" dirty="0" err="1">
+                <a:solidFill>
+                  <a:srgbClr val="444444"/>
+                </a:solidFill>
+                <a:latin typeface="Calibri"/>
+              </a:rPr>
+              <a:t>entrega</a:t>
+            </a:r>
+            <a:r>
+              <a:rPr sz="1500" b="0" i="0" dirty="0">
+                <a:solidFill>
+                  <a:srgbClr val="444444"/>
+                </a:solidFill>
+                <a:latin typeface="Calibri"/>
+              </a:rPr>
+              <a:t> ranking, gaps e deltas </a:t>
+            </a:r>
+            <a:r>
+              <a:rPr sz="1500" b="0" i="0" dirty="0" err="1">
+                <a:solidFill>
+                  <a:srgbClr val="444444"/>
+                </a:solidFill>
+                <a:latin typeface="Calibri"/>
+              </a:rPr>
+              <a:t>prontos</a:t>
+            </a:r>
+            <a:r>
+              <a:rPr sz="1500" b="0" i="0" dirty="0">
+                <a:solidFill>
+                  <a:srgbClr val="444444"/>
+                </a:solidFill>
+                <a:latin typeface="Calibri"/>
+              </a:rPr>
+              <a:t> para </a:t>
+            </a:r>
+            <a:r>
+              <a:rPr sz="1500" b="0" i="0" dirty="0" err="1">
+                <a:solidFill>
+                  <a:srgbClr val="444444"/>
+                </a:solidFill>
+                <a:latin typeface="Calibri"/>
+              </a:rPr>
+              <a:t>decisão</a:t>
+            </a:r>
+            <a:r>
+              <a:rPr sz="1500" b="0" i="0" dirty="0">
+                <a:solidFill>
+                  <a:srgbClr val="444444"/>
+                </a:solidFill>
+                <a:latin typeface="Calibri"/>
+              </a:rPr>
+              <a:t> — </a:t>
+            </a:r>
+            <a:r>
+              <a:rPr lang="pt-BR" sz="1500" b="0" i="0" dirty="0">
+                <a:solidFill>
+                  <a:srgbClr val="444444"/>
+                </a:solidFill>
+                <a:latin typeface="Calibri"/>
+              </a:rPr>
+              <a:t>Sem necessidade de ajustes futuros.</a:t>
+            </a:r>
+            <a:endParaRPr sz="1500" b="0" i="0" dirty="0">
+              <a:solidFill>
+                <a:srgbClr val="444444"/>
+              </a:solidFill>
+              <a:latin typeface="Calibri"/>
+            </a:endParaRPr>
           </a:p>
         </p:txBody>
       </p:sp>
@@ -9814,6 +13546,7 @@
           <a:lstStyle/>
           <a:p>
             <a:pPr algn="ctr"/>
+            <a:endParaRPr/>
           </a:p>
         </p:txBody>
       </p:sp>
@@ -9826,7 +13559,7 @@
         <p:spPr>
           <a:xfrm>
             <a:off x="548640" y="3099816"/>
-            <a:ext cx="11064240" cy="365760"/>
+            <a:ext cx="11064240" cy="323165"/>
           </a:xfrm>
           <a:prstGeom prst="rect">
             <a:avLst/>
@@ -9841,14 +13574,164 @@
           <a:p>
             <a:pPr algn="l"/>
             <a:r>
-              <a:rPr sz="1500" b="0" i="0">
-                <a:solidFill>
-                  <a:srgbClr val="444444"/>
-                </a:solidFill>
-                <a:latin typeface="Calibri"/>
-              </a:rPr>
-              <a:t>A base Gold, com IDHM, já está pronta para os primeiros modelos preditivos e clusters de vulnerabilidade</a:t>
-            </a:r>
+              <a:rPr sz="1500" b="0" i="0" dirty="0">
+                <a:solidFill>
+                  <a:srgbClr val="444444"/>
+                </a:solidFill>
+                <a:latin typeface="Calibri"/>
+              </a:rPr>
+              <a:t>A base Gold, com IDHM, </a:t>
+            </a:r>
+            <a:r>
+              <a:rPr sz="1500" b="0" i="0" dirty="0" err="1">
+                <a:solidFill>
+                  <a:srgbClr val="444444"/>
+                </a:solidFill>
+                <a:latin typeface="Calibri"/>
+              </a:rPr>
+              <a:t>já</a:t>
+            </a:r>
+            <a:r>
+              <a:rPr sz="1500" b="0" i="0" dirty="0">
+                <a:solidFill>
+                  <a:srgbClr val="444444"/>
+                </a:solidFill>
+                <a:latin typeface="Calibri"/>
+              </a:rPr>
+              <a:t> </a:t>
+            </a:r>
+            <a:r>
+              <a:rPr sz="1500" b="0" i="0" dirty="0" err="1">
+                <a:solidFill>
+                  <a:srgbClr val="444444"/>
+                </a:solidFill>
+                <a:latin typeface="Calibri"/>
+              </a:rPr>
+              <a:t>está</a:t>
+            </a:r>
+            <a:r>
+              <a:rPr sz="1500" b="0" i="0" dirty="0">
+                <a:solidFill>
+                  <a:srgbClr val="444444"/>
+                </a:solidFill>
+                <a:latin typeface="Calibri"/>
+              </a:rPr>
+              <a:t> </a:t>
+            </a:r>
+            <a:r>
+              <a:rPr sz="1500" b="0" i="0" dirty="0" err="1">
+                <a:solidFill>
+                  <a:srgbClr val="444444"/>
+                </a:solidFill>
+                <a:latin typeface="Calibri"/>
+              </a:rPr>
+              <a:t>pronta</a:t>
+            </a:r>
+            <a:r>
+              <a:rPr sz="1500" b="0" i="0" dirty="0">
+                <a:solidFill>
+                  <a:srgbClr val="444444"/>
+                </a:solidFill>
+                <a:latin typeface="Calibri"/>
+              </a:rPr>
+              <a:t> para </a:t>
+            </a:r>
+            <a:r>
+              <a:rPr sz="1500" b="0" i="0" dirty="0" err="1">
+                <a:solidFill>
+                  <a:srgbClr val="444444"/>
+                </a:solidFill>
+                <a:latin typeface="Calibri"/>
+              </a:rPr>
+              <a:t>os</a:t>
+            </a:r>
+            <a:r>
+              <a:rPr sz="1500" b="0" i="0" dirty="0">
+                <a:solidFill>
+                  <a:srgbClr val="444444"/>
+                </a:solidFill>
+                <a:latin typeface="Calibri"/>
+              </a:rPr>
+              <a:t> </a:t>
+            </a:r>
+            <a:r>
+              <a:rPr sz="1500" b="0" i="0" dirty="0" err="1">
+                <a:solidFill>
+                  <a:srgbClr val="444444"/>
+                </a:solidFill>
+                <a:latin typeface="Calibri"/>
+              </a:rPr>
+              <a:t>primeiros</a:t>
+            </a:r>
+            <a:r>
+              <a:rPr sz="1500" b="0" i="0" dirty="0">
+                <a:solidFill>
+                  <a:srgbClr val="444444"/>
+                </a:solidFill>
+                <a:latin typeface="Calibri"/>
+              </a:rPr>
+              <a:t> </a:t>
+            </a:r>
+            <a:r>
+              <a:rPr sz="1500" b="0" i="0" dirty="0" err="1">
+                <a:solidFill>
+                  <a:srgbClr val="444444"/>
+                </a:solidFill>
+                <a:latin typeface="Calibri"/>
+              </a:rPr>
+              <a:t>modelos</a:t>
+            </a:r>
+            <a:r>
+              <a:rPr sz="1500" b="0" i="0" dirty="0">
+                <a:solidFill>
+                  <a:srgbClr val="444444"/>
+                </a:solidFill>
+                <a:latin typeface="Calibri"/>
+              </a:rPr>
+              <a:t> </a:t>
+            </a:r>
+            <a:r>
+              <a:rPr sz="1500" b="0" i="0" dirty="0" err="1">
+                <a:solidFill>
+                  <a:srgbClr val="444444"/>
+                </a:solidFill>
+                <a:latin typeface="Calibri"/>
+              </a:rPr>
+              <a:t>preditivos</a:t>
+            </a:r>
+            <a:r>
+              <a:rPr sz="1500" b="0" i="0" dirty="0">
+                <a:solidFill>
+                  <a:srgbClr val="444444"/>
+                </a:solidFill>
+                <a:latin typeface="Calibri"/>
+              </a:rPr>
+              <a:t> e clusters de </a:t>
+            </a:r>
+            <a:r>
+              <a:rPr sz="1500" b="0" i="0" dirty="0" err="1">
+                <a:solidFill>
+                  <a:srgbClr val="444444"/>
+                </a:solidFill>
+                <a:latin typeface="Calibri"/>
+              </a:rPr>
+              <a:t>vulnerabilidade</a:t>
+            </a:r>
+            <a:r>
+              <a:rPr lang="pt-BR" sz="1500" dirty="0">
+                <a:solidFill>
+                  <a:srgbClr val="444444"/>
+                </a:solidFill>
+                <a:latin typeface="Calibri"/>
+              </a:rPr>
+              <a:t>.</a:t>
+            </a:r>
+            <a:endParaRPr sz="1500" b="0" i="0" dirty="0">
+              <a:solidFill>
+                <a:srgbClr val="444444"/>
+              </a:solidFill>
+              <a:latin typeface="Calibri"/>
+            </a:endParaRPr>
           </a:p>
         </p:txBody>
       </p:sp>
@@ -9893,6 +13776,7 @@
           <a:lstStyle/>
           <a:p>
             <a:pPr algn="ctr"/>
+            <a:endParaRPr/>
           </a:p>
         </p:txBody>
       </p:sp>
@@ -9972,6 +13856,7 @@
           <a:lstStyle/>
           <a:p>
             <a:pPr algn="ctr"/>
+            <a:endParaRPr/>
           </a:p>
         </p:txBody>
       </p:sp>
@@ -9984,7 +13869,7 @@
         <p:spPr>
           <a:xfrm>
             <a:off x="548640" y="4233672"/>
-            <a:ext cx="11064240" cy="365760"/>
+            <a:ext cx="11064240" cy="323165"/>
           </a:xfrm>
           <a:prstGeom prst="rect">
             <a:avLst/>
@@ -9999,14 +13884,38 @@
           <a:p>
             <a:pPr algn="l"/>
             <a:r>
-              <a:rPr sz="1500" b="0" i="0">
-                <a:solidFill>
-                  <a:srgbClr val="444444"/>
-                </a:solidFill>
-                <a:latin typeface="Calibri"/>
-              </a:rPr>
-              <a:t>Operar isso custa centavos por ano — a decisão de frequência importa mais que a infraestrutura</a:t>
-            </a:r>
+              <a:rPr sz="1500" b="0" i="0" dirty="0" err="1">
+                <a:solidFill>
+                  <a:srgbClr val="444444"/>
+                </a:solidFill>
+                <a:latin typeface="Calibri"/>
+              </a:rPr>
+              <a:t>Operar</a:t>
+            </a:r>
+            <a:r>
+              <a:rPr sz="1500" b="0" i="0" dirty="0">
+                <a:solidFill>
+                  <a:srgbClr val="444444"/>
+                </a:solidFill>
+                <a:latin typeface="Calibri"/>
+              </a:rPr>
+              <a:t> </a:t>
+            </a:r>
+            <a:r>
+              <a:rPr lang="pt-BR" sz="1500" b="0" i="0" dirty="0">
+                <a:solidFill>
+                  <a:srgbClr val="444444"/>
+                </a:solidFill>
+                <a:latin typeface="Calibri"/>
+              </a:rPr>
+              <a:t>custa pouco para atualizar por demanda ou com fluxos mensais.</a:t>
+            </a:r>
+            <a:endParaRPr sz="1500" b="0" i="0" dirty="0">
+              <a:solidFill>
+                <a:srgbClr val="444444"/>
+              </a:solidFill>
+              <a:latin typeface="Calibri"/>
+            </a:endParaRPr>
           </a:p>
         </p:txBody>
       </p:sp>

--- a/reports/presentation/Alfabetizacao_Apresentacao.pptx
+++ b/reports/presentation/Alfabetizacao_Apresentacao.pptx
@@ -310,7 +310,7 @@
           <a:p>
             <a:fld id="{5BCAD085-E8A6-8845-BD4E-CB4CCA059FC4}" type="datetimeFigureOut">
               <a:rPr lang="en-US" smtClean="0"/>
-              <a:t>8/23/2026</a:t>
+              <a:t>8/29/2026</a:t>
             </a:fld>
             <a:endParaRPr lang="en-US"/>
           </a:p>
@@ -478,7 +478,7 @@
           <a:p>
             <a:fld id="{5BCAD085-E8A6-8845-BD4E-CB4CCA059FC4}" type="datetimeFigureOut">
               <a:rPr lang="en-US" smtClean="0"/>
-              <a:t>8/23/2026</a:t>
+              <a:t>8/29/2026</a:t>
             </a:fld>
             <a:endParaRPr lang="en-US"/>
           </a:p>
@@ -656,7 +656,7 @@
           <a:p>
             <a:fld id="{5BCAD085-E8A6-8845-BD4E-CB4CCA059FC4}" type="datetimeFigureOut">
               <a:rPr lang="en-US" smtClean="0"/>
-              <a:t>8/23/2026</a:t>
+              <a:t>8/29/2026</a:t>
             </a:fld>
             <a:endParaRPr lang="en-US"/>
           </a:p>
@@ -824,7 +824,7 @@
           <a:p>
             <a:fld id="{5BCAD085-E8A6-8845-BD4E-CB4CCA059FC4}" type="datetimeFigureOut">
               <a:rPr lang="en-US" smtClean="0"/>
-              <a:t>8/23/2026</a:t>
+              <a:t>8/29/2026</a:t>
             </a:fld>
             <a:endParaRPr lang="en-US"/>
           </a:p>
@@ -1069,7 +1069,7 @@
           <a:p>
             <a:fld id="{5BCAD085-E8A6-8845-BD4E-CB4CCA059FC4}" type="datetimeFigureOut">
               <a:rPr lang="en-US" smtClean="0"/>
-              <a:t>8/23/2026</a:t>
+              <a:t>8/29/2026</a:t>
             </a:fld>
             <a:endParaRPr lang="en-US"/>
           </a:p>
@@ -1354,7 +1354,7 @@
           <a:p>
             <a:fld id="{5BCAD085-E8A6-8845-BD4E-CB4CCA059FC4}" type="datetimeFigureOut">
               <a:rPr lang="en-US" smtClean="0"/>
-              <a:t>8/23/2026</a:t>
+              <a:t>8/29/2026</a:t>
             </a:fld>
             <a:endParaRPr lang="en-US"/>
           </a:p>
@@ -1773,7 +1773,7 @@
           <a:p>
             <a:fld id="{5BCAD085-E8A6-8845-BD4E-CB4CCA059FC4}" type="datetimeFigureOut">
               <a:rPr lang="en-US" smtClean="0"/>
-              <a:t>8/23/2026</a:t>
+              <a:t>8/29/2026</a:t>
             </a:fld>
             <a:endParaRPr lang="en-US"/>
           </a:p>
@@ -1890,7 +1890,7 @@
           <a:p>
             <a:fld id="{5BCAD085-E8A6-8845-BD4E-CB4CCA059FC4}" type="datetimeFigureOut">
               <a:rPr lang="en-US" smtClean="0"/>
-              <a:t>8/23/2026</a:t>
+              <a:t>8/29/2026</a:t>
             </a:fld>
             <a:endParaRPr lang="en-US"/>
           </a:p>
@@ -1985,7 +1985,7 @@
           <a:p>
             <a:fld id="{5BCAD085-E8A6-8845-BD4E-CB4CCA059FC4}" type="datetimeFigureOut">
               <a:rPr lang="en-US" smtClean="0"/>
-              <a:t>8/23/2026</a:t>
+              <a:t>8/29/2026</a:t>
             </a:fld>
             <a:endParaRPr lang="en-US"/>
           </a:p>
@@ -2260,7 +2260,7 @@
           <a:p>
             <a:fld id="{5BCAD085-E8A6-8845-BD4E-CB4CCA059FC4}" type="datetimeFigureOut">
               <a:rPr lang="en-US" smtClean="0"/>
-              <a:t>8/23/2026</a:t>
+              <a:t>8/29/2026</a:t>
             </a:fld>
             <a:endParaRPr lang="en-US"/>
           </a:p>
@@ -2512,7 +2512,7 @@
           <a:p>
             <a:fld id="{5BCAD085-E8A6-8845-BD4E-CB4CCA059FC4}" type="datetimeFigureOut">
               <a:rPr lang="en-US" smtClean="0"/>
-              <a:t>8/23/2026</a:t>
+              <a:t>8/29/2026</a:t>
             </a:fld>
             <a:endParaRPr lang="en-US"/>
           </a:p>
@@ -2723,7 +2723,7 @@
           <a:p>
             <a:fld id="{5BCAD085-E8A6-8845-BD4E-CB4CCA059FC4}" type="datetimeFigureOut">
               <a:rPr lang="en-US" smtClean="0"/>
-              <a:t>8/23/2026</a:t>
+              <a:t>8/29/2026</a:t>
             </a:fld>
             <a:endParaRPr lang="en-US"/>
           </a:p>
@@ -3434,6 +3434,14 @@
   <p:clrMapOvr>
     <a:masterClrMapping/>
   </p:clrMapOvr>
+  <mc:AlternateContent xmlns:mc="http://schemas.openxmlformats.org/markup-compatibility/2006" xmlns:p14="http://schemas.microsoft.com/office/powerpoint/2010/main">
+    <mc:Choice Requires="p14">
+      <p:transition spd="slow" p14:dur="2000" advTm="9061"/>
+    </mc:Choice>
+    <mc:Fallback xmlns="">
+      <p:transition spd="slow" advTm="9061"/>
+    </mc:Fallback>
+  </mc:AlternateContent>
 </p:sld>
 </file>
 
@@ -3495,7 +3503,7 @@
           <a:lstStyle/>
           <a:p>
             <a:pPr algn="ctr"/>
-            <a:endParaRPr/>
+            <a:endParaRPr lang="pt-BR"/>
           </a:p>
         </p:txBody>
       </p:sp>
@@ -3703,7 +3711,7 @@
         <p:spPr>
           <a:xfrm>
             <a:off x="365760" y="1920240"/>
-            <a:ext cx="11338560" cy="1938992"/>
+            <a:ext cx="11338560" cy="2169825"/>
           </a:xfrm>
           <a:prstGeom prst="rect">
             <a:avLst/>
@@ -3740,6 +3748,15 @@
               <a:t>O </a:t>
             </a:r>
             <a:r>
+              <a:rPr lang="pt-BR" sz="1500" dirty="0">
+                <a:solidFill>
+                  <a:srgbClr val="444444"/>
+                </a:solidFill>
+                <a:latin typeface="Calibri"/>
+              </a:rPr>
+              <a:t>CNCA (</a:t>
+            </a:r>
+            <a:r>
               <a:rPr sz="1500" dirty="0" err="1">
                 <a:solidFill>
                   <a:srgbClr val="444444"/>
@@ -3785,6 +3802,15 @@
               <a:t>Alfabetizada</a:t>
             </a:r>
             <a:r>
+              <a:rPr lang="pt-BR" sz="1500" dirty="0">
+                <a:solidFill>
+                  <a:srgbClr val="444444"/>
+                </a:solidFill>
+                <a:latin typeface="Calibri"/>
+              </a:rPr>
+              <a:t>)</a:t>
+            </a:r>
+            <a:r>
               <a:rPr sz="1500" dirty="0">
                 <a:solidFill>
                   <a:srgbClr val="444444"/>
@@ -3863,7 +3889,7 @@
                 </a:solidFill>
                 <a:latin typeface="Calibri"/>
               </a:rPr>
-              <a:t> para </a:t>
+              <a:t> para que </a:t>
             </a:r>
             <a:r>
               <a:rPr sz="1500" dirty="0" err="1">
@@ -3872,7 +3898,7 @@
                 </a:solidFill>
                 <a:latin typeface="Calibri"/>
               </a:rPr>
-              <a:t>que</a:t>
+              <a:t>toda</a:t>
             </a:r>
             <a:r>
               <a:rPr sz="1500" dirty="0">
@@ -3890,7 +3916,7 @@
                 </a:solidFill>
                 <a:latin typeface="Calibri"/>
               </a:rPr>
-              <a:t>toda</a:t>
+              <a:t>criança</a:t>
             </a:r>
             <a:r>
               <a:rPr sz="1500" dirty="0">
@@ -3908,7 +3934,7 @@
                 </a:solidFill>
                 <a:latin typeface="Calibri"/>
               </a:rPr>
-              <a:t>criança</a:t>
+              <a:t>esteja</a:t>
             </a:r>
             <a:r>
               <a:rPr sz="1500" dirty="0">
@@ -3926,7 +3952,7 @@
                 </a:solidFill>
                 <a:latin typeface="Calibri"/>
               </a:rPr>
-              <a:t>esteja</a:t>
+              <a:t>alfabetizada</a:t>
             </a:r>
             <a:r>
               <a:rPr sz="1500" dirty="0">
@@ -3944,7 +3970,7 @@
                 </a:solidFill>
                 <a:latin typeface="Calibri"/>
               </a:rPr>
-              <a:t>alfabetizada</a:t>
+              <a:t>até</a:t>
             </a:r>
             <a:r>
               <a:rPr sz="1500" dirty="0">
@@ -3953,7 +3979,7 @@
                 </a:solidFill>
                 <a:latin typeface="Calibri"/>
               </a:rPr>
-              <a:t> </a:t>
+              <a:t> o final do 2º </a:t>
             </a:r>
             <a:r>
               <a:rPr sz="1500" dirty="0" err="1">
@@ -3962,7 +3988,7 @@
                 </a:solidFill>
                 <a:latin typeface="Calibri"/>
               </a:rPr>
-              <a:t>até</a:t>
+              <a:t>ano</a:t>
             </a:r>
             <a:r>
               <a:rPr sz="1500" dirty="0">
@@ -3971,7 +3997,7 @@
                 </a:solidFill>
                 <a:latin typeface="Calibri"/>
               </a:rPr>
-              <a:t> o final do 2º </a:t>
+              <a:t> do </a:t>
             </a:r>
             <a:r>
               <a:rPr sz="1500" dirty="0" err="1">
@@ -3980,7 +4006,7 @@
                 </a:solidFill>
                 <a:latin typeface="Calibri"/>
               </a:rPr>
-              <a:t>ano</a:t>
+              <a:t>ensino</a:t>
             </a:r>
             <a:r>
               <a:rPr sz="1500" dirty="0">
@@ -3989,26 +4015,14 @@
                 </a:solidFill>
                 <a:latin typeface="Calibri"/>
               </a:rPr>
-              <a:t> do </a:t>
-            </a:r>
-            <a:r>
-              <a:rPr sz="1500" dirty="0" err="1">
-                <a:solidFill>
-                  <a:srgbClr val="444444"/>
-                </a:solidFill>
-                <a:latin typeface="Calibri"/>
-              </a:rPr>
-              <a:t>ensino</a:t>
-            </a:r>
-            <a:r>
-              <a:rPr sz="1500" dirty="0">
-                <a:solidFill>
-                  <a:srgbClr val="444444"/>
-                </a:solidFill>
-                <a:latin typeface="Calibri"/>
-              </a:rPr>
               <a:t> fundamental — meta: 2030.</a:t>
             </a:r>
+            <a:endParaRPr lang="pt-BR" sz="1500" dirty="0">
+              <a:solidFill>
+                <a:srgbClr val="444444"/>
+              </a:solidFill>
+              <a:latin typeface="Calibri"/>
+            </a:endParaRPr>
           </a:p>
           <a:p>
             <a:pPr>
@@ -4017,7 +4031,7 @@
               </a:spcAft>
             </a:pPr>
             <a:r>
-              <a:rPr sz="1500" b="1" dirty="0">
+              <a:rPr lang="pt-BR" sz="1500" b="1" dirty="0">
                 <a:solidFill>
                   <a:srgbClr val="2E86C1"/>
                 </a:solidFill>
@@ -4026,212 +4040,20 @@
               <a:t>▶  </a:t>
             </a:r>
             <a:r>
-              <a:rPr sz="1500" dirty="0">
-                <a:solidFill>
-                  <a:srgbClr val="444444"/>
-                </a:solidFill>
-                <a:latin typeface="Calibri"/>
-              </a:rPr>
-              <a:t>O INEP </a:t>
-            </a:r>
-            <a:r>
-              <a:rPr sz="1500" dirty="0" err="1">
-                <a:solidFill>
-                  <a:srgbClr val="444444"/>
-                </a:solidFill>
-                <a:latin typeface="Calibri"/>
-              </a:rPr>
-              <a:t>definiu</a:t>
-            </a:r>
-            <a:r>
-              <a:rPr sz="1500" dirty="0">
-                <a:solidFill>
-                  <a:srgbClr val="444444"/>
-                </a:solidFill>
-                <a:latin typeface="Calibri"/>
-              </a:rPr>
-              <a:t> 743 </a:t>
-            </a:r>
-            <a:r>
-              <a:rPr sz="1500" dirty="0" err="1">
-                <a:solidFill>
-                  <a:srgbClr val="444444"/>
-                </a:solidFill>
-                <a:latin typeface="Calibri"/>
-              </a:rPr>
-              <a:t>pontos</a:t>
-            </a:r>
-            <a:r>
-              <a:rPr sz="1500" dirty="0">
-                <a:solidFill>
-                  <a:srgbClr val="444444"/>
-                </a:solidFill>
-                <a:latin typeface="Calibri"/>
-              </a:rPr>
-              <a:t> </a:t>
-            </a:r>
-            <a:r>
-              <a:rPr sz="1500" dirty="0" err="1">
-                <a:solidFill>
-                  <a:srgbClr val="444444"/>
-                </a:solidFill>
-                <a:latin typeface="Calibri"/>
-              </a:rPr>
-              <a:t>na</a:t>
-            </a:r>
-            <a:r>
-              <a:rPr sz="1500" dirty="0">
-                <a:solidFill>
-                  <a:srgbClr val="444444"/>
-                </a:solidFill>
-                <a:latin typeface="Calibri"/>
-              </a:rPr>
-              <a:t> </a:t>
-            </a:r>
-            <a:r>
-              <a:rPr sz="1500" dirty="0" err="1">
-                <a:solidFill>
-                  <a:srgbClr val="444444"/>
-                </a:solidFill>
-                <a:latin typeface="Calibri"/>
-              </a:rPr>
-              <a:t>escala</a:t>
-            </a:r>
-            <a:r>
-              <a:rPr sz="1500" dirty="0">
-                <a:solidFill>
-                  <a:srgbClr val="444444"/>
-                </a:solidFill>
-                <a:latin typeface="Calibri"/>
-              </a:rPr>
-              <a:t> de </a:t>
-            </a:r>
-            <a:r>
-              <a:rPr sz="1500" dirty="0" err="1">
-                <a:solidFill>
-                  <a:srgbClr val="444444"/>
-                </a:solidFill>
-                <a:latin typeface="Calibri"/>
-              </a:rPr>
-              <a:t>proficiência</a:t>
-            </a:r>
-            <a:r>
-              <a:rPr sz="1500" dirty="0">
-                <a:solidFill>
-                  <a:srgbClr val="444444"/>
-                </a:solidFill>
-                <a:latin typeface="Calibri"/>
-              </a:rPr>
-              <a:t> do Saeb </a:t>
-            </a:r>
-            <a:r>
-              <a:rPr sz="1500" dirty="0" err="1">
-                <a:solidFill>
-                  <a:srgbClr val="444444"/>
-                </a:solidFill>
-                <a:latin typeface="Calibri"/>
-              </a:rPr>
-              <a:t>como</a:t>
-            </a:r>
-            <a:r>
-              <a:rPr sz="1500" dirty="0">
-                <a:solidFill>
-                  <a:srgbClr val="444444"/>
-                </a:solidFill>
-                <a:latin typeface="Calibri"/>
-              </a:rPr>
-              <a:t> o corte de </a:t>
-            </a:r>
-            <a:r>
-              <a:rPr sz="1500" dirty="0" err="1">
-                <a:solidFill>
-                  <a:srgbClr val="444444"/>
-                </a:solidFill>
-                <a:latin typeface="Calibri"/>
-              </a:rPr>
-              <a:t>alfabetização</a:t>
-            </a:r>
-            <a:r>
-              <a:rPr sz="1500" dirty="0">
-                <a:solidFill>
-                  <a:srgbClr val="444444"/>
-                </a:solidFill>
-                <a:latin typeface="Calibri"/>
-              </a:rPr>
-              <a:t>, </a:t>
-            </a:r>
-            <a:r>
-              <a:rPr sz="1500" dirty="0" err="1">
-                <a:solidFill>
-                  <a:srgbClr val="444444"/>
-                </a:solidFill>
-                <a:latin typeface="Calibri"/>
-              </a:rPr>
-              <a:t>criando</a:t>
-            </a:r>
-            <a:r>
-              <a:rPr sz="1500" dirty="0">
-                <a:solidFill>
-                  <a:srgbClr val="444444"/>
-                </a:solidFill>
-                <a:latin typeface="Calibri"/>
-              </a:rPr>
-              <a:t> o </a:t>
-            </a:r>
-            <a:r>
-              <a:rPr sz="1500" dirty="0" err="1">
-                <a:solidFill>
-                  <a:srgbClr val="444444"/>
-                </a:solidFill>
-                <a:latin typeface="Calibri"/>
-              </a:rPr>
-              <a:t>Indicador</a:t>
-            </a:r>
-            <a:r>
-              <a:rPr sz="1500" dirty="0">
-                <a:solidFill>
-                  <a:srgbClr val="444444"/>
-                </a:solidFill>
-                <a:latin typeface="Calibri"/>
-              </a:rPr>
-              <a:t> </a:t>
-            </a:r>
-            <a:r>
-              <a:rPr sz="1500" dirty="0" err="1">
-                <a:solidFill>
-                  <a:srgbClr val="444444"/>
-                </a:solidFill>
-                <a:latin typeface="Calibri"/>
-              </a:rPr>
-              <a:t>Criança</a:t>
-            </a:r>
-            <a:r>
-              <a:rPr sz="1500" dirty="0">
-                <a:solidFill>
-                  <a:srgbClr val="444444"/>
-                </a:solidFill>
-                <a:latin typeface="Calibri"/>
-              </a:rPr>
-              <a:t> </a:t>
-            </a:r>
-            <a:r>
-              <a:rPr sz="1500" dirty="0" err="1">
-                <a:solidFill>
-                  <a:srgbClr val="444444"/>
-                </a:solidFill>
-                <a:latin typeface="Calibri"/>
-              </a:rPr>
-              <a:t>Alfabetizada</a:t>
-            </a:r>
-            <a:r>
-              <a:rPr sz="1500" dirty="0">
-                <a:solidFill>
-                  <a:srgbClr val="444444"/>
-                </a:solidFill>
-                <a:latin typeface="Calibri"/>
-              </a:rPr>
-              <a:t>.</a:t>
-            </a:r>
+              <a:rPr lang="pt-BR" sz="1500" dirty="0">
+                <a:solidFill>
+                  <a:srgbClr val="444444"/>
+                </a:solidFill>
+                <a:latin typeface="Calibri"/>
+              </a:rPr>
+              <a:t>Em 2025, 66,0% das crianças avaliadas atingem esse patamar — a meta é 80,0% até 2030.</a:t>
+            </a:r>
+            <a:endParaRPr sz="1500" dirty="0">
+              <a:solidFill>
+                <a:srgbClr val="444444"/>
+              </a:solidFill>
+              <a:latin typeface="Calibri"/>
+            </a:endParaRPr>
           </a:p>
           <a:p>
             <a:pPr>
@@ -4249,13 +4071,22 @@
               <a:t>▶  </a:t>
             </a:r>
             <a:r>
+              <a:rPr sz="1500" dirty="0">
+                <a:solidFill>
+                  <a:srgbClr val="444444"/>
+                </a:solidFill>
+                <a:latin typeface="Calibri"/>
+              </a:rPr>
+              <a:t>O INEP </a:t>
+            </a:r>
+            <a:r>
               <a:rPr sz="1500" dirty="0" err="1">
                 <a:solidFill>
                   <a:srgbClr val="444444"/>
                 </a:solidFill>
                 <a:latin typeface="Calibri"/>
               </a:rPr>
-              <a:t>Hoje</a:t>
+              <a:t>definiu</a:t>
             </a:r>
             <a:r>
               <a:rPr sz="1500" dirty="0">
@@ -4264,7 +4095,7 @@
                 </a:solidFill>
                 <a:latin typeface="Calibri"/>
               </a:rPr>
-              <a:t> (2025), 66,0% das </a:t>
+              <a:t> 743 </a:t>
             </a:r>
             <a:r>
               <a:rPr sz="1500" dirty="0" err="1">
@@ -4273,7 +4104,7 @@
                 </a:solidFill>
                 <a:latin typeface="Calibri"/>
               </a:rPr>
-              <a:t>crianças</a:t>
+              <a:t>pontos</a:t>
             </a:r>
             <a:r>
               <a:rPr sz="1500" dirty="0">
@@ -4291,7 +4122,7 @@
                 </a:solidFill>
                 <a:latin typeface="Calibri"/>
               </a:rPr>
-              <a:t>avaliadas</a:t>
+              <a:t>na</a:t>
             </a:r>
             <a:r>
               <a:rPr sz="1500" dirty="0">
@@ -4309,7 +4140,7 @@
                 </a:solidFill>
                 <a:latin typeface="Calibri"/>
               </a:rPr>
-              <a:t>atingem</a:t>
+              <a:t>escala</a:t>
             </a:r>
             <a:r>
               <a:rPr sz="1500" dirty="0">
@@ -4318,7 +4149,7 @@
                 </a:solidFill>
                 <a:latin typeface="Calibri"/>
               </a:rPr>
-              <a:t> esse patamar — a meta é 80,0% </a:t>
+              <a:t> de </a:t>
             </a:r>
             <a:r>
               <a:rPr sz="1500" dirty="0" err="1">
@@ -4327,7 +4158,7 @@
                 </a:solidFill>
                 <a:latin typeface="Calibri"/>
               </a:rPr>
-              <a:t>até</a:t>
+              <a:t>proficiência</a:t>
             </a:r>
             <a:r>
               <a:rPr sz="1500" dirty="0">
@@ -4336,7 +4167,124 @@
                 </a:solidFill>
                 <a:latin typeface="Calibri"/>
               </a:rPr>
-              <a:t> 2030.</a:t>
+              <a:t> do Saeb </a:t>
+            </a:r>
+            <a:r>
+              <a:rPr lang="pt-BR" sz="1500" dirty="0">
+                <a:solidFill>
+                  <a:srgbClr val="444444"/>
+                </a:solidFill>
+                <a:latin typeface="Calibri"/>
+              </a:rPr>
+              <a:t>(Sistema de Avaliação da Educação Básica) </a:t>
+            </a:r>
+            <a:r>
+              <a:rPr sz="1500" dirty="0" err="1">
+                <a:solidFill>
+                  <a:srgbClr val="444444"/>
+                </a:solidFill>
+                <a:latin typeface="Calibri"/>
+              </a:rPr>
+              <a:t>como</a:t>
+            </a:r>
+            <a:r>
+              <a:rPr sz="1500" dirty="0">
+                <a:solidFill>
+                  <a:srgbClr val="444444"/>
+                </a:solidFill>
+                <a:latin typeface="Calibri"/>
+              </a:rPr>
+              <a:t> o corte de </a:t>
+            </a:r>
+            <a:r>
+              <a:rPr sz="1500" dirty="0" err="1">
+                <a:solidFill>
+                  <a:srgbClr val="444444"/>
+                </a:solidFill>
+                <a:latin typeface="Calibri"/>
+              </a:rPr>
+              <a:t>alfabetização</a:t>
+            </a:r>
+            <a:r>
+              <a:rPr sz="1500" dirty="0">
+                <a:solidFill>
+                  <a:srgbClr val="444444"/>
+                </a:solidFill>
+                <a:latin typeface="Calibri"/>
+              </a:rPr>
+              <a:t>, </a:t>
+            </a:r>
+            <a:r>
+              <a:rPr sz="1500" dirty="0" err="1">
+                <a:solidFill>
+                  <a:srgbClr val="444444"/>
+                </a:solidFill>
+                <a:latin typeface="Calibri"/>
+              </a:rPr>
+              <a:t>criando</a:t>
+            </a:r>
+            <a:r>
+              <a:rPr sz="1500" dirty="0">
+                <a:solidFill>
+                  <a:srgbClr val="444444"/>
+                </a:solidFill>
+                <a:latin typeface="Calibri"/>
+              </a:rPr>
+              <a:t> o </a:t>
+            </a:r>
+            <a:r>
+              <a:rPr sz="1500" dirty="0" err="1">
+                <a:solidFill>
+                  <a:srgbClr val="444444"/>
+                </a:solidFill>
+                <a:latin typeface="Calibri"/>
+              </a:rPr>
+              <a:t>Indicador</a:t>
+            </a:r>
+            <a:r>
+              <a:rPr sz="1500" dirty="0">
+                <a:solidFill>
+                  <a:srgbClr val="444444"/>
+                </a:solidFill>
+                <a:latin typeface="Calibri"/>
+              </a:rPr>
+              <a:t> </a:t>
+            </a:r>
+            <a:r>
+              <a:rPr sz="1500" dirty="0" err="1">
+                <a:solidFill>
+                  <a:srgbClr val="444444"/>
+                </a:solidFill>
+                <a:latin typeface="Calibri"/>
+              </a:rPr>
+              <a:t>Criança</a:t>
+            </a:r>
+            <a:r>
+              <a:rPr sz="1500" dirty="0">
+                <a:solidFill>
+                  <a:srgbClr val="444444"/>
+                </a:solidFill>
+                <a:latin typeface="Calibri"/>
+              </a:rPr>
+              <a:t> </a:t>
+            </a:r>
+            <a:r>
+              <a:rPr sz="1500" dirty="0" err="1">
+                <a:solidFill>
+                  <a:srgbClr val="444444"/>
+                </a:solidFill>
+                <a:latin typeface="Calibri"/>
+              </a:rPr>
+              <a:t>Alfabetizada</a:t>
+            </a:r>
+            <a:r>
+              <a:rPr sz="1500" dirty="0">
+                <a:solidFill>
+                  <a:srgbClr val="444444"/>
+                </a:solidFill>
+                <a:latin typeface="Calibri"/>
+              </a:rPr>
+              <a:t>.</a:t>
             </a:r>
           </a:p>
           <a:p>
@@ -4346,7 +4294,7 @@
               </a:spcAft>
             </a:pPr>
             <a:r>
-              <a:rPr sz="1500" b="1" dirty="0">
+              <a:rPr lang="pt-BR" sz="1500" b="1" dirty="0">
                 <a:solidFill>
                   <a:srgbClr val="2E86C1"/>
                 </a:solidFill>
@@ -4361,205 +4309,7 @@
                 </a:solidFill>
                 <a:latin typeface="Calibri"/>
               </a:rPr>
-              <a:t>Dados não integrados e sem acompanhamento de</a:t>
-            </a:r>
-            <a:r>
-              <a:rPr sz="1500" dirty="0">
-                <a:solidFill>
-                  <a:srgbClr val="444444"/>
-                </a:solidFill>
-                <a:latin typeface="Calibri"/>
-              </a:rPr>
-              <a:t> </a:t>
-            </a:r>
-            <a:r>
-              <a:rPr sz="1500" dirty="0" err="1">
-                <a:solidFill>
-                  <a:srgbClr val="444444"/>
-                </a:solidFill>
-                <a:latin typeface="Calibri"/>
-              </a:rPr>
-              <a:t>resultado</a:t>
-            </a:r>
-            <a:r>
-              <a:rPr lang="pt-BR" sz="1500" dirty="0">
-                <a:solidFill>
-                  <a:srgbClr val="444444"/>
-                </a:solidFill>
-                <a:latin typeface="Calibri"/>
-              </a:rPr>
-              <a:t>s</a:t>
-            </a:r>
-            <a:r>
-              <a:rPr sz="1500" dirty="0">
-                <a:solidFill>
-                  <a:srgbClr val="444444"/>
-                </a:solidFill>
-                <a:latin typeface="Calibri"/>
-              </a:rPr>
-              <a:t>, </a:t>
-            </a:r>
-            <a:r>
-              <a:rPr sz="1500" dirty="0" err="1">
-                <a:solidFill>
-                  <a:srgbClr val="444444"/>
-                </a:solidFill>
-                <a:latin typeface="Calibri"/>
-              </a:rPr>
-              <a:t>metas</a:t>
-            </a:r>
-            <a:r>
-              <a:rPr sz="1500" dirty="0">
-                <a:solidFill>
-                  <a:srgbClr val="444444"/>
-                </a:solidFill>
-                <a:latin typeface="Calibri"/>
-              </a:rPr>
-              <a:t>, </a:t>
-            </a:r>
-            <a:r>
-              <a:rPr sz="1500" dirty="0" err="1">
-                <a:solidFill>
-                  <a:srgbClr val="444444"/>
-                </a:solidFill>
-                <a:latin typeface="Calibri"/>
-              </a:rPr>
-              <a:t>território</a:t>
-            </a:r>
-            <a:r>
-              <a:rPr sz="1500" dirty="0">
-                <a:solidFill>
-                  <a:srgbClr val="444444"/>
-                </a:solidFill>
-                <a:latin typeface="Calibri"/>
-              </a:rPr>
-              <a:t> e </a:t>
-            </a:r>
-            <a:r>
-              <a:rPr sz="1500" dirty="0" err="1">
-                <a:solidFill>
-                  <a:srgbClr val="444444"/>
-                </a:solidFill>
-                <a:latin typeface="Calibri"/>
-              </a:rPr>
-              <a:t>contexto</a:t>
-            </a:r>
-            <a:r>
-              <a:rPr sz="1500" dirty="0">
-                <a:solidFill>
-                  <a:srgbClr val="444444"/>
-                </a:solidFill>
-                <a:latin typeface="Calibri"/>
-              </a:rPr>
-              <a:t> </a:t>
-            </a:r>
-            <a:r>
-              <a:rPr sz="1500" dirty="0" err="1">
-                <a:solidFill>
-                  <a:srgbClr val="444444"/>
-                </a:solidFill>
-                <a:latin typeface="Calibri"/>
-              </a:rPr>
-              <a:t>socioeconômico</a:t>
-            </a:r>
-            <a:r>
-              <a:rPr sz="1500" dirty="0">
-                <a:solidFill>
-                  <a:srgbClr val="444444"/>
-                </a:solidFill>
-                <a:latin typeface="Calibri"/>
-              </a:rPr>
-              <a:t>, </a:t>
-            </a:r>
-            <a:r>
-              <a:rPr sz="1500" dirty="0" err="1">
-                <a:solidFill>
-                  <a:srgbClr val="444444"/>
-                </a:solidFill>
-                <a:latin typeface="Calibri"/>
-              </a:rPr>
-              <a:t>gestores</a:t>
-            </a:r>
-            <a:r>
-              <a:rPr sz="1500" dirty="0">
-                <a:solidFill>
-                  <a:srgbClr val="444444"/>
-                </a:solidFill>
-                <a:latin typeface="Calibri"/>
-              </a:rPr>
-              <a:t> não </a:t>
-            </a:r>
-            <a:r>
-              <a:rPr sz="1500" dirty="0" err="1">
-                <a:solidFill>
-                  <a:srgbClr val="444444"/>
-                </a:solidFill>
-                <a:latin typeface="Calibri"/>
-              </a:rPr>
-              <a:t>enxergam</a:t>
-            </a:r>
-            <a:r>
-              <a:rPr sz="1500" dirty="0">
-                <a:solidFill>
-                  <a:srgbClr val="444444"/>
-                </a:solidFill>
-                <a:latin typeface="Calibri"/>
-              </a:rPr>
-              <a:t> </a:t>
-            </a:r>
-            <a:r>
-              <a:rPr sz="1500" dirty="0" err="1">
-                <a:solidFill>
-                  <a:srgbClr val="444444"/>
-                </a:solidFill>
-                <a:latin typeface="Calibri"/>
-              </a:rPr>
-              <a:t>onde</a:t>
-            </a:r>
-            <a:r>
-              <a:rPr sz="1500" dirty="0">
-                <a:solidFill>
-                  <a:srgbClr val="444444"/>
-                </a:solidFill>
-                <a:latin typeface="Calibri"/>
-              </a:rPr>
-              <a:t> </a:t>
-            </a:r>
-            <a:r>
-              <a:rPr sz="1500" dirty="0" err="1">
-                <a:solidFill>
-                  <a:srgbClr val="444444"/>
-                </a:solidFill>
-                <a:latin typeface="Calibri"/>
-              </a:rPr>
-              <a:t>agir</a:t>
-            </a:r>
-            <a:r>
-              <a:rPr sz="1500" dirty="0">
-                <a:solidFill>
-                  <a:srgbClr val="444444"/>
-                </a:solidFill>
-                <a:latin typeface="Calibri"/>
-              </a:rPr>
-              <a:t> </a:t>
-            </a:r>
-            <a:r>
-              <a:rPr sz="1500" dirty="0" err="1">
-                <a:solidFill>
-                  <a:srgbClr val="444444"/>
-                </a:solidFill>
-                <a:latin typeface="Calibri"/>
-              </a:rPr>
-              <a:t>primeiro</a:t>
-            </a:r>
-            <a:r>
-              <a:rPr sz="1500" dirty="0">
-                <a:solidFill>
-                  <a:srgbClr val="444444"/>
-                </a:solidFill>
-                <a:latin typeface="Calibri"/>
-              </a:rPr>
-              <a:t>.</a:t>
+              <a:t>Dados não integrados e sem acompanhamento de resultados, metas, território e contexto socioeconômico, gestores não enxergam onde agir primeiro.</a:t>
             </a:r>
           </a:p>
         </p:txBody>
@@ -4608,7 +4358,7 @@
         <p:spPr>
           <a:xfrm>
             <a:off x="365760" y="4892040"/>
-            <a:ext cx="11430000" cy="1234440"/>
+            <a:ext cx="9439143" cy="1234440"/>
           </a:xfrm>
           <a:prstGeom prst="roundRect">
             <a:avLst>
@@ -4656,8 +4406,8 @@
         </p:nvSpPr>
         <p:spPr>
           <a:xfrm>
-            <a:off x="640080" y="5074920"/>
-            <a:ext cx="10881360" cy="914400"/>
+            <a:off x="640080" y="5224343"/>
+            <a:ext cx="9098280" cy="615553"/>
           </a:xfrm>
           <a:prstGeom prst="rect">
             <a:avLst/>
@@ -4672,13 +4422,319 @@
           <a:p>
             <a:pPr algn="l"/>
             <a:r>
-              <a:rPr sz="1700" b="0" i="1">
+              <a:rPr sz="1700" b="0" i="1" dirty="0">
                 <a:solidFill>
                   <a:srgbClr val="1A253A"/>
                 </a:solidFill>
                 <a:latin typeface="Calibri"/>
               </a:rPr>
-              <a:t>“Como transformar dados dispersos do INEP em uma base confiável, atualizada e pronta para decisão — mostrando quem está evoluindo, quem está estagnado, e por quê?”</a:t>
+              <a:t>“Como </a:t>
+            </a:r>
+            <a:r>
+              <a:rPr sz="1700" b="0" i="1" dirty="0" err="1">
+                <a:solidFill>
+                  <a:srgbClr val="1A253A"/>
+                </a:solidFill>
+                <a:latin typeface="Calibri"/>
+              </a:rPr>
+              <a:t>transformar</a:t>
+            </a:r>
+            <a:r>
+              <a:rPr sz="1700" b="0" i="1" dirty="0">
+                <a:solidFill>
+                  <a:srgbClr val="1A253A"/>
+                </a:solidFill>
+                <a:latin typeface="Calibri"/>
+              </a:rPr>
+              <a:t> dados </a:t>
+            </a:r>
+            <a:r>
+              <a:rPr sz="1700" b="0" i="1" dirty="0" err="1">
+                <a:solidFill>
+                  <a:srgbClr val="1A253A"/>
+                </a:solidFill>
+                <a:latin typeface="Calibri"/>
+              </a:rPr>
+              <a:t>dispersos</a:t>
+            </a:r>
+            <a:r>
+              <a:rPr sz="1700" b="0" i="1" dirty="0">
+                <a:solidFill>
+                  <a:srgbClr val="1A253A"/>
+                </a:solidFill>
+                <a:latin typeface="Calibri"/>
+              </a:rPr>
+              <a:t> do INEP </a:t>
+            </a:r>
+            <a:r>
+              <a:rPr sz="1700" b="0" i="1" dirty="0" err="1">
+                <a:solidFill>
+                  <a:srgbClr val="1A253A"/>
+                </a:solidFill>
+                <a:latin typeface="Calibri"/>
+              </a:rPr>
+              <a:t>em</a:t>
+            </a:r>
+            <a:r>
+              <a:rPr sz="1700" b="0" i="1" dirty="0">
+                <a:solidFill>
+                  <a:srgbClr val="1A253A"/>
+                </a:solidFill>
+                <a:latin typeface="Calibri"/>
+              </a:rPr>
+              <a:t> </a:t>
+            </a:r>
+            <a:r>
+              <a:rPr sz="1700" b="0" i="1" dirty="0" err="1">
+                <a:solidFill>
+                  <a:srgbClr val="1A253A"/>
+                </a:solidFill>
+                <a:latin typeface="Calibri"/>
+              </a:rPr>
+              <a:t>uma</a:t>
+            </a:r>
+            <a:r>
+              <a:rPr sz="1700" b="0" i="1" dirty="0">
+                <a:solidFill>
+                  <a:srgbClr val="1A253A"/>
+                </a:solidFill>
+                <a:latin typeface="Calibri"/>
+              </a:rPr>
+              <a:t> base </a:t>
+            </a:r>
+            <a:r>
+              <a:rPr sz="1700" b="0" i="1" dirty="0" err="1">
+                <a:solidFill>
+                  <a:srgbClr val="1A253A"/>
+                </a:solidFill>
+                <a:latin typeface="Calibri"/>
+              </a:rPr>
+              <a:t>confiável</a:t>
+            </a:r>
+            <a:r>
+              <a:rPr sz="1700" b="0" i="1" dirty="0">
+                <a:solidFill>
+                  <a:srgbClr val="1A253A"/>
+                </a:solidFill>
+                <a:latin typeface="Calibri"/>
+              </a:rPr>
+              <a:t>, </a:t>
+            </a:r>
+            <a:r>
+              <a:rPr sz="1700" b="0" i="1" dirty="0" err="1">
+                <a:solidFill>
+                  <a:srgbClr val="1A253A"/>
+                </a:solidFill>
+                <a:latin typeface="Calibri"/>
+              </a:rPr>
+              <a:t>atualizada</a:t>
+            </a:r>
+            <a:r>
+              <a:rPr sz="1700" b="0" i="1" dirty="0">
+                <a:solidFill>
+                  <a:srgbClr val="1A253A"/>
+                </a:solidFill>
+                <a:latin typeface="Calibri"/>
+              </a:rPr>
+              <a:t> e </a:t>
+            </a:r>
+            <a:r>
+              <a:rPr sz="1700" b="0" i="1" dirty="0" err="1">
+                <a:solidFill>
+                  <a:srgbClr val="1A253A"/>
+                </a:solidFill>
+                <a:latin typeface="Calibri"/>
+              </a:rPr>
+              <a:t>pronta</a:t>
+            </a:r>
+            <a:r>
+              <a:rPr sz="1700" b="0" i="1" dirty="0">
+                <a:solidFill>
+                  <a:srgbClr val="1A253A"/>
+                </a:solidFill>
+                <a:latin typeface="Calibri"/>
+              </a:rPr>
+              <a:t> para </a:t>
+            </a:r>
+            <a:r>
+              <a:rPr sz="1700" b="0" i="1" dirty="0" err="1">
+                <a:solidFill>
+                  <a:srgbClr val="1A253A"/>
+                </a:solidFill>
+                <a:latin typeface="Calibri"/>
+              </a:rPr>
+              <a:t>decisão</a:t>
+            </a:r>
+            <a:r>
+              <a:rPr sz="1700" b="0" i="1" dirty="0">
+                <a:solidFill>
+                  <a:srgbClr val="1A253A"/>
+                </a:solidFill>
+                <a:latin typeface="Calibri"/>
+              </a:rPr>
+              <a:t> — </a:t>
+            </a:r>
+            <a:r>
+              <a:rPr sz="1700" b="0" i="1" dirty="0" err="1">
+                <a:solidFill>
+                  <a:srgbClr val="1A253A"/>
+                </a:solidFill>
+                <a:latin typeface="Calibri"/>
+              </a:rPr>
+              <a:t>mostrando</a:t>
+            </a:r>
+            <a:r>
+              <a:rPr sz="1700" b="0" i="1" dirty="0">
+                <a:solidFill>
+                  <a:srgbClr val="1A253A"/>
+                </a:solidFill>
+                <a:latin typeface="Calibri"/>
+              </a:rPr>
+              <a:t> </a:t>
+            </a:r>
+            <a:r>
+              <a:rPr sz="1700" b="0" i="1" dirty="0" err="1">
+                <a:solidFill>
+                  <a:srgbClr val="1A253A"/>
+                </a:solidFill>
+                <a:latin typeface="Calibri"/>
+              </a:rPr>
+              <a:t>quem</a:t>
+            </a:r>
+            <a:r>
+              <a:rPr sz="1700" b="0" i="1" dirty="0">
+                <a:solidFill>
+                  <a:srgbClr val="1A253A"/>
+                </a:solidFill>
+                <a:latin typeface="Calibri"/>
+              </a:rPr>
+              <a:t> </a:t>
+            </a:r>
+            <a:r>
+              <a:rPr sz="1700" b="0" i="1" dirty="0" err="1">
+                <a:solidFill>
+                  <a:srgbClr val="1A253A"/>
+                </a:solidFill>
+                <a:latin typeface="Calibri"/>
+              </a:rPr>
+              <a:t>está</a:t>
+            </a:r>
+            <a:r>
+              <a:rPr sz="1700" b="0" i="1" dirty="0">
+                <a:solidFill>
+                  <a:srgbClr val="1A253A"/>
+                </a:solidFill>
+                <a:latin typeface="Calibri"/>
+              </a:rPr>
+              <a:t> </a:t>
+            </a:r>
+            <a:r>
+              <a:rPr sz="1700" b="0" i="1" dirty="0" err="1">
+                <a:solidFill>
+                  <a:srgbClr val="1A253A"/>
+                </a:solidFill>
+                <a:latin typeface="Calibri"/>
+              </a:rPr>
+              <a:t>evoluindo</a:t>
+            </a:r>
+            <a:r>
+              <a:rPr sz="1700" b="0" i="1" dirty="0">
+                <a:solidFill>
+                  <a:srgbClr val="1A253A"/>
+                </a:solidFill>
+                <a:latin typeface="Calibri"/>
+              </a:rPr>
+              <a:t>, </a:t>
+            </a:r>
+            <a:r>
+              <a:rPr sz="1700" b="0" i="1" dirty="0" err="1">
+                <a:solidFill>
+                  <a:srgbClr val="1A253A"/>
+                </a:solidFill>
+                <a:latin typeface="Calibri"/>
+              </a:rPr>
+              <a:t>quem</a:t>
+            </a:r>
+            <a:r>
+              <a:rPr sz="1700" b="0" i="1" dirty="0">
+                <a:solidFill>
+                  <a:srgbClr val="1A253A"/>
+                </a:solidFill>
+                <a:latin typeface="Calibri"/>
+              </a:rPr>
+              <a:t> </a:t>
+            </a:r>
+            <a:r>
+              <a:rPr sz="1700" b="0" i="1" dirty="0" err="1">
+                <a:solidFill>
+                  <a:srgbClr val="1A253A"/>
+                </a:solidFill>
+                <a:latin typeface="Calibri"/>
+              </a:rPr>
+              <a:t>está</a:t>
+            </a:r>
+            <a:r>
+              <a:rPr sz="1700" b="0" i="1" dirty="0">
+                <a:solidFill>
+                  <a:srgbClr val="1A253A"/>
+                </a:solidFill>
+                <a:latin typeface="Calibri"/>
+              </a:rPr>
+              <a:t> </a:t>
+            </a:r>
+            <a:r>
+              <a:rPr sz="1700" b="0" i="1" dirty="0" err="1">
+                <a:solidFill>
+                  <a:srgbClr val="1A253A"/>
+                </a:solidFill>
+                <a:latin typeface="Calibri"/>
+              </a:rPr>
+              <a:t>estagnado</a:t>
+            </a:r>
+            <a:r>
+              <a:rPr sz="1700" b="0" i="1" dirty="0">
+                <a:solidFill>
+                  <a:srgbClr val="1A253A"/>
+                </a:solidFill>
+                <a:latin typeface="Calibri"/>
+              </a:rPr>
+              <a:t>, e </a:t>
+            </a:r>
+            <a:r>
+              <a:rPr sz="1700" b="0" i="1" dirty="0" err="1">
+                <a:solidFill>
+                  <a:srgbClr val="1A253A"/>
+                </a:solidFill>
+                <a:latin typeface="Calibri"/>
+              </a:rPr>
+              <a:t>por</a:t>
+            </a:r>
+            <a:r>
+              <a:rPr sz="1700" b="0" i="1" dirty="0">
+                <a:solidFill>
+                  <a:srgbClr val="1A253A"/>
+                </a:solidFill>
+                <a:latin typeface="Calibri"/>
+              </a:rPr>
+              <a:t> </a:t>
+            </a:r>
+            <a:r>
+              <a:rPr sz="1700" b="0" i="1" dirty="0" err="1">
+                <a:solidFill>
+                  <a:srgbClr val="1A253A"/>
+                </a:solidFill>
+                <a:latin typeface="Calibri"/>
+              </a:rPr>
+              <a:t>quê</a:t>
+            </a:r>
+            <a:r>
+              <a:rPr sz="1700" b="0" i="1" dirty="0">
+                <a:solidFill>
+                  <a:srgbClr val="1A253A"/>
+                </a:solidFill>
+                <a:latin typeface="Calibri"/>
+              </a:rPr>
+              <a:t>?”</a:t>
             </a:r>
           </a:p>
         </p:txBody>
@@ -4688,6 +4744,14 @@
   <p:clrMapOvr>
     <a:masterClrMapping/>
   </p:clrMapOvr>
+  <mc:AlternateContent xmlns:mc="http://schemas.openxmlformats.org/markup-compatibility/2006" xmlns:p14="http://schemas.microsoft.com/office/powerpoint/2010/main">
+    <mc:Choice Requires="p14">
+      <p:transition spd="slow" p14:dur="2000" advTm="83989"/>
+    </mc:Choice>
+    <mc:Fallback xmlns="">
+      <p:transition spd="slow" advTm="83989"/>
+    </mc:Fallback>
+  </mc:AlternateContent>
 </p:sld>
 </file>
 
@@ -5920,6 +5984,14 @@
   <p:clrMapOvr>
     <a:masterClrMapping/>
   </p:clrMapOvr>
+  <mc:AlternateContent xmlns:mc="http://schemas.openxmlformats.org/markup-compatibility/2006" xmlns:p14="http://schemas.microsoft.com/office/powerpoint/2010/main">
+    <mc:Choice Requires="p14">
+      <p:transition spd="slow" p14:dur="2000" advTm="14006"/>
+    </mc:Choice>
+    <mc:Fallback xmlns="">
+      <p:transition spd="slow" advTm="14006"/>
+    </mc:Fallback>
+  </mc:AlternateContent>
 </p:sld>
 </file>
 
@@ -6981,7 +7053,7 @@
         <p:spPr>
           <a:xfrm>
             <a:off x="457200" y="3520440"/>
-            <a:ext cx="11247120" cy="2743200"/>
+            <a:ext cx="11247120" cy="1069524"/>
           </a:xfrm>
           <a:prstGeom prst="rect">
             <a:avLst/>
@@ -7168,133 +7240,7 @@
                 </a:solidFill>
                 <a:latin typeface="Calibri"/>
               </a:rPr>
-              <a:t> (streaming) — o </a:t>
-            </a:r>
-            <a:r>
-              <a:rPr sz="1450" dirty="0" err="1">
-                <a:solidFill>
-                  <a:srgbClr val="444444"/>
-                </a:solidFill>
-                <a:latin typeface="Calibri"/>
-              </a:rPr>
-              <a:t>mesmo</a:t>
-            </a:r>
-            <a:r>
-              <a:rPr sz="1450" dirty="0">
-                <a:solidFill>
-                  <a:srgbClr val="444444"/>
-                </a:solidFill>
-                <a:latin typeface="Calibri"/>
-              </a:rPr>
-              <a:t> </a:t>
-            </a:r>
-            <a:r>
-              <a:rPr sz="1450" dirty="0" err="1">
-                <a:solidFill>
-                  <a:srgbClr val="444444"/>
-                </a:solidFill>
-                <a:latin typeface="Calibri"/>
-              </a:rPr>
-              <a:t>padrão</a:t>
-            </a:r>
-            <a:r>
-              <a:rPr sz="1450" dirty="0">
-                <a:solidFill>
-                  <a:srgbClr val="444444"/>
-                </a:solidFill>
-                <a:latin typeface="Calibri"/>
-              </a:rPr>
-              <a:t> </a:t>
-            </a:r>
-            <a:r>
-              <a:rPr sz="1450" dirty="0" err="1">
-                <a:solidFill>
-                  <a:srgbClr val="444444"/>
-                </a:solidFill>
-                <a:latin typeface="Calibri"/>
-              </a:rPr>
-              <a:t>usado</a:t>
-            </a:r>
-            <a:r>
-              <a:rPr sz="1450" dirty="0">
-                <a:solidFill>
-                  <a:srgbClr val="444444"/>
-                </a:solidFill>
-                <a:latin typeface="Calibri"/>
-              </a:rPr>
-              <a:t> </a:t>
-            </a:r>
-            <a:r>
-              <a:rPr sz="1450" dirty="0" err="1">
-                <a:solidFill>
-                  <a:srgbClr val="444444"/>
-                </a:solidFill>
-                <a:latin typeface="Calibri"/>
-              </a:rPr>
-              <a:t>por</a:t>
-            </a:r>
-            <a:r>
-              <a:rPr sz="1450" dirty="0">
-                <a:solidFill>
-                  <a:srgbClr val="444444"/>
-                </a:solidFill>
-                <a:latin typeface="Calibri"/>
-              </a:rPr>
-              <a:t> </a:t>
-            </a:r>
-            <a:r>
-              <a:rPr sz="1450" dirty="0" err="1">
-                <a:solidFill>
-                  <a:srgbClr val="444444"/>
-                </a:solidFill>
-                <a:latin typeface="Calibri"/>
-              </a:rPr>
-              <a:t>bancos</a:t>
-            </a:r>
-            <a:r>
-              <a:rPr sz="1450" dirty="0">
-                <a:solidFill>
-                  <a:srgbClr val="444444"/>
-                </a:solidFill>
-                <a:latin typeface="Calibri"/>
-              </a:rPr>
-              <a:t> e fintechs para </a:t>
-            </a:r>
-            <a:r>
-              <a:rPr sz="1450" dirty="0" err="1">
-                <a:solidFill>
-                  <a:srgbClr val="444444"/>
-                </a:solidFill>
-                <a:latin typeface="Calibri"/>
-              </a:rPr>
-              <a:t>ingestão</a:t>
-            </a:r>
-            <a:r>
-              <a:rPr sz="1450" dirty="0">
-                <a:solidFill>
-                  <a:srgbClr val="444444"/>
-                </a:solidFill>
-                <a:latin typeface="Calibri"/>
-              </a:rPr>
-              <a:t> </a:t>
-            </a:r>
-            <a:r>
-              <a:rPr sz="1450" dirty="0" err="1">
-                <a:solidFill>
-                  <a:srgbClr val="444444"/>
-                </a:solidFill>
-                <a:latin typeface="Calibri"/>
-              </a:rPr>
-              <a:t>contínua</a:t>
-            </a:r>
-            <a:r>
-              <a:rPr sz="1450" dirty="0">
-                <a:solidFill>
-                  <a:srgbClr val="444444"/>
-                </a:solidFill>
-                <a:latin typeface="Calibri"/>
-              </a:rPr>
-              <a:t>.</a:t>
+              <a:t> (streaming).</a:t>
             </a:r>
           </a:p>
           <a:p>
@@ -7768,6 +7714,14 @@
   <p:clrMapOvr>
     <a:masterClrMapping/>
   </p:clrMapOvr>
+  <mc:AlternateContent xmlns:mc="http://schemas.openxmlformats.org/markup-compatibility/2006" xmlns:p14="http://schemas.microsoft.com/office/powerpoint/2010/main">
+    <mc:Choice Requires="p14">
+      <p:transition spd="slow" p14:dur="2000" advTm="33735"/>
+    </mc:Choice>
+    <mc:Fallback xmlns="">
+      <p:transition spd="slow" advTm="33735"/>
+    </mc:Fallback>
+  </mc:AlternateContent>
 </p:sld>
 </file>
 
@@ -9275,6 +9229,14 @@
   <p:clrMapOvr>
     <a:masterClrMapping/>
   </p:clrMapOvr>
+  <mc:AlternateContent xmlns:mc="http://schemas.openxmlformats.org/markup-compatibility/2006" xmlns:p14="http://schemas.microsoft.com/office/powerpoint/2010/main">
+    <mc:Choice Requires="p14">
+      <p:transition spd="slow" p14:dur="2000" advTm="48425"/>
+    </mc:Choice>
+    <mc:Fallback xmlns="">
+      <p:transition spd="slow" advTm="48425"/>
+    </mc:Fallback>
+  </mc:AlternateContent>
 </p:sld>
 </file>
 
@@ -10469,6 +10431,14 @@
   <p:clrMapOvr>
     <a:masterClrMapping/>
   </p:clrMapOvr>
+  <mc:AlternateContent xmlns:mc="http://schemas.openxmlformats.org/markup-compatibility/2006" xmlns:p14="http://schemas.microsoft.com/office/powerpoint/2010/main">
+    <mc:Choice Requires="p14">
+      <p:transition spd="slow" p14:dur="2000" advTm="13983"/>
+    </mc:Choice>
+    <mc:Fallback xmlns="">
+      <p:transition spd="slow" advTm="13983"/>
+    </mc:Fallback>
+  </mc:AlternateContent>
 </p:sld>
 </file>
 
@@ -11355,6 +11325,14 @@
   <p:clrMapOvr>
     <a:masterClrMapping/>
   </p:clrMapOvr>
+  <mc:AlternateContent xmlns:mc="http://schemas.openxmlformats.org/markup-compatibility/2006" xmlns:p14="http://schemas.microsoft.com/office/powerpoint/2010/main">
+    <mc:Choice Requires="p14">
+      <p:transition spd="slow" p14:dur="2000" advTm="29023"/>
+    </mc:Choice>
+    <mc:Fallback xmlns="">
+      <p:transition spd="slow" advTm="29023"/>
+    </mc:Fallback>
+  </mc:AlternateContent>
 </p:sld>
 </file>
 
@@ -11658,7 +11636,7 @@
         </p:nvSpPr>
         <p:spPr>
           <a:xfrm>
-            <a:off x="457200" y="2148840"/>
+            <a:off x="457200" y="1868635"/>
             <a:ext cx="9326880" cy="502920"/>
           </a:xfrm>
           <a:prstGeom prst="rect">
@@ -11703,7 +11681,7 @@
         </p:nvSpPr>
         <p:spPr>
           <a:xfrm>
-            <a:off x="594360" y="2240280"/>
+            <a:off x="594360" y="1960075"/>
             <a:ext cx="3657600" cy="365760"/>
           </a:xfrm>
           <a:prstGeom prst="rect">
@@ -11738,7 +11716,7 @@
         </p:nvSpPr>
         <p:spPr>
           <a:xfrm>
-            <a:off x="4434840" y="2240280"/>
+            <a:off x="4434840" y="1960075"/>
             <a:ext cx="2560320" cy="365760"/>
           </a:xfrm>
           <a:prstGeom prst="rect">
@@ -11773,7 +11751,7 @@
         </p:nvSpPr>
         <p:spPr>
           <a:xfrm>
-            <a:off x="7178040" y="2240280"/>
+            <a:off x="7178040" y="1960075"/>
             <a:ext cx="2560320" cy="365760"/>
           </a:xfrm>
           <a:prstGeom prst="rect">
@@ -11808,7 +11786,7 @@
         </p:nvSpPr>
         <p:spPr>
           <a:xfrm>
-            <a:off x="457200" y="2651760"/>
+            <a:off x="457200" y="2371555"/>
             <a:ext cx="9326880" cy="777240"/>
           </a:xfrm>
           <a:prstGeom prst="rect">
@@ -11855,7 +11833,7 @@
         </p:nvSpPr>
         <p:spPr>
           <a:xfrm>
-            <a:off x="457200" y="2651760"/>
+            <a:off x="457200" y="2371555"/>
             <a:ext cx="73152" cy="777240"/>
           </a:xfrm>
           <a:prstGeom prst="rect">
@@ -11900,7 +11878,7 @@
         </p:nvSpPr>
         <p:spPr>
           <a:xfrm>
-            <a:off x="640080" y="2834640"/>
+            <a:off x="640080" y="2554435"/>
             <a:ext cx="3566160" cy="457200"/>
           </a:xfrm>
           <a:prstGeom prst="rect">
@@ -11935,7 +11913,7 @@
         </p:nvSpPr>
         <p:spPr>
           <a:xfrm>
-            <a:off x="4480560" y="2834640"/>
+            <a:off x="4480560" y="2554435"/>
             <a:ext cx="2468880" cy="457200"/>
           </a:xfrm>
           <a:prstGeom prst="rect">
@@ -11970,7 +11948,7 @@
         </p:nvSpPr>
         <p:spPr>
           <a:xfrm>
-            <a:off x="7223760" y="2834640"/>
+            <a:off x="7223760" y="2554435"/>
             <a:ext cx="2468880" cy="457200"/>
           </a:xfrm>
           <a:prstGeom prst="rect">
@@ -12005,7 +11983,7 @@
         </p:nvSpPr>
         <p:spPr>
           <a:xfrm>
-            <a:off x="457200" y="3429000"/>
+            <a:off x="457200" y="3148795"/>
             <a:ext cx="9326880" cy="777240"/>
           </a:xfrm>
           <a:prstGeom prst="rect">
@@ -12052,7 +12030,7 @@
         </p:nvSpPr>
         <p:spPr>
           <a:xfrm>
-            <a:off x="457200" y="3429000"/>
+            <a:off x="457200" y="3148795"/>
             <a:ext cx="73152" cy="777240"/>
           </a:xfrm>
           <a:prstGeom prst="rect">
@@ -12097,7 +12075,7 @@
         </p:nvSpPr>
         <p:spPr>
           <a:xfrm>
-            <a:off x="640080" y="3611880"/>
+            <a:off x="640080" y="3331675"/>
             <a:ext cx="3566160" cy="457200"/>
           </a:xfrm>
           <a:prstGeom prst="rect">
@@ -12132,7 +12110,7 @@
         </p:nvSpPr>
         <p:spPr>
           <a:xfrm>
-            <a:off x="4480560" y="3611880"/>
+            <a:off x="4480560" y="3331675"/>
             <a:ext cx="2468880" cy="457200"/>
           </a:xfrm>
           <a:prstGeom prst="rect">
@@ -12167,7 +12145,7 @@
         </p:nvSpPr>
         <p:spPr>
           <a:xfrm>
-            <a:off x="7223760" y="3611880"/>
+            <a:off x="7223760" y="3331675"/>
             <a:ext cx="2468880" cy="457200"/>
           </a:xfrm>
           <a:prstGeom prst="rect">
@@ -12202,7 +12180,7 @@
         </p:nvSpPr>
         <p:spPr>
           <a:xfrm>
-            <a:off x="457200" y="4206240"/>
+            <a:off x="457200" y="3926035"/>
             <a:ext cx="9326880" cy="777240"/>
           </a:xfrm>
           <a:prstGeom prst="rect">
@@ -12249,7 +12227,7 @@
         </p:nvSpPr>
         <p:spPr>
           <a:xfrm>
-            <a:off x="457200" y="4206240"/>
+            <a:off x="457200" y="3926035"/>
             <a:ext cx="73152" cy="777240"/>
           </a:xfrm>
           <a:prstGeom prst="rect">
@@ -12294,7 +12272,7 @@
         </p:nvSpPr>
         <p:spPr>
           <a:xfrm>
-            <a:off x="640080" y="4389120"/>
+            <a:off x="640080" y="4108915"/>
             <a:ext cx="3566160" cy="457200"/>
           </a:xfrm>
           <a:prstGeom prst="rect">
@@ -12329,7 +12307,7 @@
         </p:nvSpPr>
         <p:spPr>
           <a:xfrm>
-            <a:off x="4480560" y="4389120"/>
+            <a:off x="4480560" y="4108915"/>
             <a:ext cx="2468880" cy="457200"/>
           </a:xfrm>
           <a:prstGeom prst="rect">
@@ -12364,7 +12342,7 @@
         </p:nvSpPr>
         <p:spPr>
           <a:xfrm>
-            <a:off x="7223760" y="4389120"/>
+            <a:off x="7223760" y="4108915"/>
             <a:ext cx="2468880" cy="457200"/>
           </a:xfrm>
           <a:prstGeom prst="rect">
@@ -12399,7 +12377,7 @@
         </p:nvSpPr>
         <p:spPr>
           <a:xfrm>
-            <a:off x="457200" y="4983480"/>
+            <a:off x="457200" y="4703275"/>
             <a:ext cx="9326880" cy="777240"/>
           </a:xfrm>
           <a:prstGeom prst="rect">
@@ -12446,7 +12424,7 @@
         </p:nvSpPr>
         <p:spPr>
           <a:xfrm>
-            <a:off x="457200" y="4983480"/>
+            <a:off x="457200" y="4703275"/>
             <a:ext cx="73152" cy="777240"/>
           </a:xfrm>
           <a:prstGeom prst="rect">
@@ -12491,7 +12469,7 @@
         </p:nvSpPr>
         <p:spPr>
           <a:xfrm>
-            <a:off x="640080" y="5166360"/>
+            <a:off x="640080" y="4886155"/>
             <a:ext cx="3566160" cy="457200"/>
           </a:xfrm>
           <a:prstGeom prst="rect">
@@ -12526,7 +12504,7 @@
         </p:nvSpPr>
         <p:spPr>
           <a:xfrm>
-            <a:off x="4480560" y="5166360"/>
+            <a:off x="4480560" y="4886155"/>
             <a:ext cx="2468880" cy="457200"/>
           </a:xfrm>
           <a:prstGeom prst="rect">
@@ -12561,7 +12539,7 @@
         </p:nvSpPr>
         <p:spPr>
           <a:xfrm>
-            <a:off x="7223760" y="5166360"/>
+            <a:off x="7223760" y="4886155"/>
             <a:ext cx="2468880" cy="457200"/>
           </a:xfrm>
           <a:prstGeom prst="rect">
@@ -12597,7 +12575,7 @@
         <p:spPr>
           <a:xfrm>
             <a:off x="365760" y="5623560"/>
-            <a:ext cx="11430000" cy="777240"/>
+            <a:ext cx="9493464" cy="777240"/>
           </a:xfrm>
           <a:prstGeom prst="roundRect">
             <a:avLst>
@@ -12645,8 +12623,8 @@
         </p:nvSpPr>
         <p:spPr>
           <a:xfrm>
-            <a:off x="594360" y="5874405"/>
-            <a:ext cx="10972800" cy="284693"/>
+            <a:off x="594360" y="5778225"/>
+            <a:ext cx="9098280" cy="477054"/>
           </a:xfrm>
           <a:prstGeom prst="rect">
             <a:avLst/>
@@ -12929,6 +12907,14 @@
   <p:clrMapOvr>
     <a:masterClrMapping/>
   </p:clrMapOvr>
+  <mc:AlternateContent xmlns:mc="http://schemas.openxmlformats.org/markup-compatibility/2006" xmlns:p14="http://schemas.microsoft.com/office/powerpoint/2010/main">
+    <mc:Choice Requires="p14">
+      <p:transition spd="slow" p14:dur="2000" advTm="21712"/>
+    </mc:Choice>
+    <mc:Fallback xmlns="">
+      <p:transition spd="slow" advTm="21712"/>
+    </mc:Fallback>
+  </mc:AlternateContent>
 </p:sld>
 </file>
 
@@ -13924,6 +13910,14 @@
   <p:clrMapOvr>
     <a:masterClrMapping/>
   </p:clrMapOvr>
+  <mc:AlternateContent xmlns:mc="http://schemas.openxmlformats.org/markup-compatibility/2006" xmlns:p14="http://schemas.microsoft.com/office/powerpoint/2010/main">
+    <mc:Choice Requires="p14">
+      <p:transition spd="slow" p14:dur="2000" advTm="40931"/>
+    </mc:Choice>
+    <mc:Fallback xmlns="">
+      <p:transition spd="slow" advTm="40931"/>
+    </mc:Fallback>
+  </mc:AlternateContent>
 </p:sld>
 </file>
 
